--- a/reports/Otsenka_Vovlechennosti_2026_god.pptx
+++ b/reports/Otsenka_Vovlechennosti_2026_god.pptx
@@ -13,6 +13,7 @@
     <p:sldId id="261" r:id="rId12"/>
     <p:sldId id="262" r:id="rId13"/>
     <p:sldId id="263" r:id="rId14"/>
+    <p:sldId id="264" r:id="rId15"/>
   </p:sldIdLst>
   <p:sldSz cx="12191695" cy="6858000" type="screen4x3"/>
   <p:notesSz cx="6858000" cy="9144000"/>
@@ -3213,7 +3214,7 @@
                 </a:solidFill>
                 <a:latin typeface="Calibri"/>
               </a:rPr>
-              <a:t>Оптовое направление: офис / коммерция и СиТЛ</a:t>
+              <a:t>Оптовое направление: КС и СиТЛ</a:t>
             </a:r>
           </a:p>
         </p:txBody>
@@ -3288,7 +3289,7 @@
                 </a:solidFill>
                 <a:latin typeface="Calibri"/>
               </a:rPr>
-              <a:t>Анкетирование 2026</a:t>
+              <a:t>Анкетирование 2026 — КС</a:t>
             </a:r>
           </a:p>
         </p:txBody>
@@ -3302,7 +3303,7 @@
         <p:spPr>
           <a:xfrm>
             <a:off x="1691640" y="713232"/>
-            <a:ext cx="9875520" cy="548640"/>
+            <a:ext cx="9875520" cy="457200"/>
           </a:xfrm>
           <a:prstGeom prst="rect">
             <a:avLst/>
@@ -3321,7 +3322,7 @@
                 </a:solidFill>
                 <a:latin typeface="Calibri"/>
               </a:rPr>
-              <a:t>Опрос проведён 10–21 августа 2026. Два опросника — по направлениям, с разным набором вопросов. В расчёт взяты только полностью пройденные анкеты.</a:t>
+              <a:t>Опрос проведён 10–21 августа 2026. В расчёт взяты только полностью пройденные анкеты.</a:t>
             </a:r>
           </a:p>
         </p:txBody>
@@ -3334,8 +3335,8 @@
         </p:nvSpPr>
         <p:spPr>
           <a:xfrm>
-            <a:off x="502920" y="1371600"/>
-            <a:ext cx="3657600" cy="1417320"/>
+            <a:off x="502920" y="1280160"/>
+            <a:ext cx="5486400" cy="1554480"/>
           </a:xfrm>
           <a:prstGeom prst="roundRect">
             <a:avLst/>
@@ -3377,8 +3378,8 @@
         </p:nvSpPr>
         <p:spPr>
           <a:xfrm>
-            <a:off x="502920" y="1371600"/>
-            <a:ext cx="90000" cy="1417320"/>
+            <a:off x="502920" y="1280160"/>
+            <a:ext cx="90000" cy="1554480"/>
           </a:xfrm>
           <a:prstGeom prst="rect">
             <a:avLst/>
@@ -3420,8 +3421,8 @@
         </p:nvSpPr>
         <p:spPr>
           <a:xfrm>
-            <a:off x="731520" y="1481328"/>
-            <a:ext cx="3291840" cy="320040"/>
+            <a:off x="731520" y="1389888"/>
+            <a:ext cx="5120640" cy="320040"/>
           </a:xfrm>
           <a:prstGeom prst="rect">
             <a:avLst/>
@@ -3440,7 +3441,7 @@
                 </a:solidFill>
                 <a:latin typeface="Calibri"/>
               </a:rPr>
-              <a:t>Явка</a:t>
+              <a:t>Явка КС</a:t>
             </a:r>
           </a:p>
         </p:txBody>
@@ -3453,8 +3454,8 @@
         </p:nvSpPr>
         <p:spPr>
           <a:xfrm>
-            <a:off x="731520" y="1755648"/>
-            <a:ext cx="3291840" cy="640080"/>
+            <a:off x="731520" y="1664208"/>
+            <a:ext cx="5120640" cy="640080"/>
           </a:xfrm>
           <a:prstGeom prst="rect">
             <a:avLst/>
@@ -3473,7 +3474,7 @@
                 </a:solidFill>
                 <a:latin typeface="Calibri"/>
               </a:rPr>
-              <a:t>102 / 327</a:t>
+              <a:t>67 из 205</a:t>
             </a:r>
           </a:p>
         </p:txBody>
@@ -3486,8 +3487,8 @@
         </p:nvSpPr>
         <p:spPr>
           <a:xfrm>
-            <a:off x="731520" y="2423160"/>
-            <a:ext cx="3291840" cy="411480"/>
+            <a:off x="731520" y="2331720"/>
+            <a:ext cx="5120640" cy="411480"/>
           </a:xfrm>
           <a:prstGeom prst="rect">
             <a:avLst/>
@@ -3506,7 +3507,7 @@
                 </a:solidFill>
                 <a:latin typeface="Calibri"/>
               </a:rPr>
-              <a:t>31,2% сотрудников  ·  в 2025 было 36%</a:t>
+              <a:t>32,7% сотрудников направления</a:t>
             </a:r>
           </a:p>
         </p:txBody>
@@ -3519,8 +3520,8 @@
         </p:nvSpPr>
         <p:spPr>
           <a:xfrm>
-            <a:off x="4297680" y="1371600"/>
-            <a:ext cx="3657600" cy="1417320"/>
+            <a:off x="6172200" y="1280160"/>
+            <a:ext cx="5440680" cy="1554480"/>
           </a:xfrm>
           <a:prstGeom prst="roundRect">
             <a:avLst/>
@@ -3562,8 +3563,8 @@
         </p:nvSpPr>
         <p:spPr>
           <a:xfrm>
-            <a:off x="4297680" y="1371600"/>
-            <a:ext cx="90000" cy="1417320"/>
+            <a:off x="6172200" y="1280160"/>
+            <a:ext cx="90000" cy="1554480"/>
           </a:xfrm>
           <a:prstGeom prst="rect">
             <a:avLst/>
@@ -3605,8 +3606,8 @@
         </p:nvSpPr>
         <p:spPr>
           <a:xfrm>
-            <a:off x="4526280" y="1481328"/>
-            <a:ext cx="3291840" cy="320040"/>
+            <a:off x="6400800" y="1389888"/>
+            <a:ext cx="5074920" cy="320040"/>
           </a:xfrm>
           <a:prstGeom prst="rect">
             <a:avLst/>
@@ -3625,7 +3626,7 @@
                 </a:solidFill>
                 <a:latin typeface="Calibri"/>
               </a:rPr>
-              <a:t>Офис / коммерция</a:t>
+              <a:t>Численность КС</a:t>
             </a:r>
           </a:p>
         </p:txBody>
@@ -3638,8 +3639,8 @@
         </p:nvSpPr>
         <p:spPr>
           <a:xfrm>
-            <a:off x="4526280" y="1755648"/>
-            <a:ext cx="3291840" cy="640080"/>
+            <a:off x="6400800" y="1664208"/>
+            <a:ext cx="5074920" cy="640080"/>
           </a:xfrm>
           <a:prstGeom prst="rect">
             <a:avLst/>
@@ -3658,7 +3659,7 @@
                 </a:solidFill>
                 <a:latin typeface="Calibri"/>
               </a:rPr>
-              <a:t>67 анкет</a:t>
+              <a:t>205</a:t>
             </a:r>
           </a:p>
         </p:txBody>
@@ -3671,8 +3672,8 @@
         </p:nvSpPr>
         <p:spPr>
           <a:xfrm>
-            <a:off x="4526280" y="2423160"/>
-            <a:ext cx="3291840" cy="411480"/>
+            <a:off x="6400800" y="2331720"/>
+            <a:ext cx="5074920" cy="411480"/>
           </a:xfrm>
           <a:prstGeom prst="rect">
             <a:avLst/>
@@ -3691,207 +3692,22 @@
                 </a:solidFill>
                 <a:latin typeface="Calibri"/>
               </a:rPr>
-              <a:t>завершено 67 из 80 стартов</a:t>
-            </a:r>
-          </a:p>
-        </p:txBody>
-      </p:sp>
-      <p:sp>
-        <p:nvSpPr>
-          <p:cNvPr id="15" name="Rounded Rectangle 14"/>
-          <p:cNvSpPr/>
-          <p:nvPr/>
-        </p:nvSpPr>
-        <p:spPr>
-          <a:xfrm>
-            <a:off x="8092440" y="1371600"/>
-            <a:ext cx="3611880" cy="1417320"/>
-          </a:xfrm>
-          <a:prstGeom prst="roundRect">
-            <a:avLst/>
-          </a:prstGeom>
-          <a:solidFill>
-            <a:srgbClr val="2F2F2F"/>
-          </a:solidFill>
-          <a:ln>
-            <a:noFill/>
-          </a:ln>
-        </p:spPr>
-        <p:style>
-          <a:lnRef idx="1">
-            <a:schemeClr val="accent1"/>
-          </a:lnRef>
-          <a:fillRef idx="3">
-            <a:schemeClr val="accent1"/>
-          </a:fillRef>
-          <a:effectRef idx="2">
-            <a:schemeClr val="accent1"/>
-          </a:effectRef>
-          <a:fontRef idx="minor">
-            <a:schemeClr val="lt1"/>
-          </a:fontRef>
-        </p:style>
-        <p:txBody>
-          <a:bodyPr rtlCol="0" anchor="ctr"/>
-          <a:lstStyle/>
-          <a:p>
-            <a:pPr algn="ctr"/>
-          </a:p>
-        </p:txBody>
-      </p:sp>
-      <p:sp>
-        <p:nvSpPr>
-          <p:cNvPr id="16" name="Rectangle 15"/>
-          <p:cNvSpPr/>
-          <p:nvPr/>
-        </p:nvSpPr>
-        <p:spPr>
-          <a:xfrm>
-            <a:off x="8092440" y="1371600"/>
-            <a:ext cx="90000" cy="1417320"/>
-          </a:xfrm>
-          <a:prstGeom prst="rect">
-            <a:avLst/>
-          </a:prstGeom>
-          <a:solidFill>
-            <a:srgbClr val="D4A017"/>
-          </a:solidFill>
-          <a:ln>
-            <a:noFill/>
-          </a:ln>
-        </p:spPr>
-        <p:style>
-          <a:lnRef idx="1">
-            <a:schemeClr val="accent1"/>
-          </a:lnRef>
-          <a:fillRef idx="3">
-            <a:schemeClr val="accent1"/>
-          </a:fillRef>
-          <a:effectRef idx="2">
-            <a:schemeClr val="accent1"/>
-          </a:effectRef>
-          <a:fontRef idx="minor">
-            <a:schemeClr val="lt1"/>
-          </a:fontRef>
-        </p:style>
-        <p:txBody>
-          <a:bodyPr rtlCol="0" anchor="ctr"/>
-          <a:lstStyle/>
-          <a:p>
-            <a:pPr algn="ctr"/>
-          </a:p>
-        </p:txBody>
-      </p:sp>
-      <p:sp>
-        <p:nvSpPr>
-          <p:cNvPr id="17" name="TextBox 16"/>
-          <p:cNvSpPr txBox="1"/>
-          <p:nvPr/>
-        </p:nvSpPr>
-        <p:spPr>
-          <a:xfrm>
-            <a:off x="8321040" y="1481328"/>
-            <a:ext cx="3246120" cy="320040"/>
-          </a:xfrm>
-          <a:prstGeom prst="rect">
-            <a:avLst/>
-          </a:prstGeom>
-          <a:noFill/>
-        </p:spPr>
-        <p:txBody>
-          <a:bodyPr wrap="square" anchor="t"/>
-          <a:lstStyle/>
-          <a:p>
-            <a:pPr algn="l"/>
-            <a:r>
-              <a:rPr sz="1300" b="1">
-                <a:solidFill>
-                  <a:srgbClr val="F5C242"/>
-                </a:solidFill>
-                <a:latin typeface="Calibri"/>
-              </a:rPr>
-              <a:t>СиТЛ</a:t>
-            </a:r>
-          </a:p>
-        </p:txBody>
-      </p:sp>
-      <p:sp>
-        <p:nvSpPr>
-          <p:cNvPr id="18" name="TextBox 17"/>
-          <p:cNvSpPr txBox="1"/>
-          <p:nvPr/>
-        </p:nvSpPr>
-        <p:spPr>
-          <a:xfrm>
-            <a:off x="8321040" y="1755648"/>
-            <a:ext cx="3246120" cy="640080"/>
-          </a:xfrm>
-          <a:prstGeom prst="rect">
-            <a:avLst/>
-          </a:prstGeom>
-          <a:noFill/>
-        </p:spPr>
-        <p:txBody>
-          <a:bodyPr wrap="square" anchor="t"/>
-          <a:lstStyle/>
-          <a:p>
-            <a:pPr algn="l"/>
-            <a:r>
-              <a:rPr sz="3600" b="1">
-                <a:solidFill>
-                  <a:srgbClr val="FFFFFF"/>
-                </a:solidFill>
-                <a:latin typeface="Calibri"/>
-              </a:rPr>
-              <a:t>35 анкет</a:t>
-            </a:r>
-          </a:p>
-        </p:txBody>
-      </p:sp>
-      <p:sp>
-        <p:nvSpPr>
-          <p:cNvPr id="19" name="TextBox 18"/>
-          <p:cNvSpPr txBox="1"/>
-          <p:nvPr/>
-        </p:nvSpPr>
-        <p:spPr>
-          <a:xfrm>
-            <a:off x="8321040" y="2423160"/>
-            <a:ext cx="3246120" cy="411480"/>
-          </a:xfrm>
-          <a:prstGeom prst="rect">
-            <a:avLst/>
-          </a:prstGeom>
-          <a:noFill/>
-        </p:spPr>
-        <p:txBody>
-          <a:bodyPr wrap="square" anchor="t"/>
-          <a:lstStyle/>
-          <a:p>
-            <a:pPr algn="l"/>
-            <a:r>
-              <a:rPr sz="1200" b="0">
-                <a:solidFill>
-                  <a:srgbClr val="DDDDDD"/>
-                </a:solidFill>
-                <a:latin typeface="Calibri"/>
-              </a:rPr>
-              <a:t>склад 25  ·  транспорт 10</a:t>
+              <a:t>коммерция, офис, смежные службы</a:t>
             </a:r>
           </a:p>
         </p:txBody>
       </p:sp>
       <p:graphicFrame>
         <p:nvGraphicFramePr>
-          <p:cNvPr id="20" name="Table 19"/>
+          <p:cNvPr id="15" name="Table 14"/>
           <p:cNvGraphicFramePr>
             <a:graphicFrameLocks noGrp="1"/>
           </p:cNvGraphicFramePr>
           <p:nvPr/>
         </p:nvGraphicFramePr>
         <p:xfrm>
-          <a:off x="502920" y="2971800"/>
-          <a:ext cx="11201400" cy="2880360"/>
+          <a:off x="502920" y="3017520"/>
+          <a:ext cx="11201400" cy="2834640"/>
         </p:xfrm>
         <a:graphic>
           <a:graphicData uri="http://schemas.openxmlformats.org/drawingml/2006/table">
@@ -3900,13 +3716,12 @@
                 <a:tableStyleId>{5C22544A-7EE6-4342-B048-85BDC9FD1C3A}</a:tableStyleId>
               </a:tblPr>
               <a:tblGrid>
-                <a:gridCol w="2926080"/>
-                <a:gridCol w="1005840"/>
-                <a:gridCol w="2926080"/>
-                <a:gridCol w="1005840"/>
-                <a:gridCol w="3337560"/>
+                <a:gridCol w="4023360"/>
+                <a:gridCol w="1280160"/>
+                <a:gridCol w="4389120"/>
+                <a:gridCol w="1508760"/>
               </a:tblGrid>
-              <a:tr h="480060">
+              <a:tr h="472440">
                 <a:tc>
                   <a:txBody>
                     <a:bodyPr/>
@@ -3920,7 +3735,7 @@
                           </a:solidFill>
                           <a:latin typeface="Calibri"/>
                         </a:rPr>
-                        <a:t>Офис, отдел (укрупнённо)</a:t>
+                        <a:t>Отдел (укрупнённо)</a:t>
                       </a:r>
                     </a:p>
                   </a:txBody>
@@ -3966,7 +3781,7 @@
                           </a:solidFill>
                           <a:latin typeface="Calibri"/>
                         </a:rPr>
-                        <a:t>СиТЛ, отдел</a:t>
+                        <a:t>Город</a:t>
                       </a:r>
                     </a:p>
                   </a:txBody>
@@ -3999,31 +3814,8 @@
                     </a:solidFill>
                   </a:tcPr>
                 </a:tc>
-                <a:tc>
-                  <a:txBody>
-                    <a:bodyPr/>
-                    <a:lstStyle/>
-                    <a:p>
-                      <a:pPr algn="ctr"/>
-                      <a:r>
-                        <a:rPr sz="1100" b="1">
-                          <a:solidFill>
-                            <a:srgbClr val="FFFFFF"/>
-                          </a:solidFill>
-                          <a:latin typeface="Calibri"/>
-                        </a:rPr>
-                        <a:t>Города (оба потока)</a:t>
-                      </a:r>
-                    </a:p>
-                  </a:txBody>
-                  <a:tcPr anchor="ctr">
-                    <a:solidFill>
-                      <a:srgbClr val="2F2F2F"/>
-                    </a:solidFill>
-                  </a:tcPr>
-                </a:tc>
               </a:tr>
-              <a:tr h="480060">
+              <a:tr h="472440">
                 <a:tc>
                   <a:txBody>
                     <a:bodyPr/>
@@ -4083,7 +3875,7 @@
                           </a:solidFill>
                           <a:latin typeface="Calibri"/>
                         </a:rPr>
-                        <a:t>Складская логистика</a:t>
+                        <a:t>Тюмень</a:t>
                       </a:r>
                     </a:p>
                   </a:txBody>
@@ -4106,7 +3898,7 @@
                           </a:solidFill>
                           <a:latin typeface="Calibri"/>
                         </a:rPr>
-                        <a:t>25</a:t>
+                        <a:t>37</a:t>
                       </a:r>
                     </a:p>
                   </a:txBody>
@@ -4116,12 +3908,14 @@
                     </a:solidFill>
                   </a:tcPr>
                 </a:tc>
-                <a:tc>
-                  <a:txBody>
-                    <a:bodyPr/>
-                    <a:lstStyle/>
-                    <a:p>
-                      <a:pPr algn="ctr"/>
+              </a:tr>
+              <a:tr h="472440">
+                <a:tc>
+                  <a:txBody>
+                    <a:bodyPr/>
+                    <a:lstStyle/>
+                    <a:p>
+                      <a:pPr algn="l"/>
                       <a:r>
                         <a:rPr sz="1100" b="0">
                           <a:solidFill>
@@ -4129,7 +3923,101 @@
                           </a:solidFill>
                           <a:latin typeface="Calibri"/>
                         </a:rPr>
-                        <a:t>Тюмень 49</a:t>
+                        <a:t>Маркетинг</a:t>
+                      </a:r>
+                    </a:p>
+                  </a:txBody>
+                  <a:tcPr anchor="ctr">
+                    <a:solidFill>
+                      <a:srgbClr val="FFFFFF"/>
+                    </a:solidFill>
+                  </a:tcPr>
+                </a:tc>
+                <a:tc>
+                  <a:txBody>
+                    <a:bodyPr/>
+                    <a:lstStyle/>
+                    <a:p>
+                      <a:pPr algn="ctr"/>
+                      <a:r>
+                        <a:rPr sz="1100" b="0">
+                          <a:solidFill>
+                            <a:srgbClr val="333333"/>
+                          </a:solidFill>
+                          <a:latin typeface="Calibri"/>
+                        </a:rPr>
+                        <a:t>5</a:t>
+                      </a:r>
+                    </a:p>
+                  </a:txBody>
+                  <a:tcPr anchor="ctr">
+                    <a:solidFill>
+                      <a:srgbClr val="FFFFFF"/>
+                    </a:solidFill>
+                  </a:tcPr>
+                </a:tc>
+                <a:tc>
+                  <a:txBody>
+                    <a:bodyPr/>
+                    <a:lstStyle/>
+                    <a:p>
+                      <a:pPr algn="ctr"/>
+                      <a:r>
+                        <a:rPr sz="1100" b="0">
+                          <a:solidFill>
+                            <a:srgbClr val="333333"/>
+                          </a:solidFill>
+                          <a:latin typeface="Calibri"/>
+                        </a:rPr>
+                        <a:t>Омск</a:t>
+                      </a:r>
+                    </a:p>
+                  </a:txBody>
+                  <a:tcPr anchor="ctr">
+                    <a:solidFill>
+                      <a:srgbClr val="FFFFFF"/>
+                    </a:solidFill>
+                  </a:tcPr>
+                </a:tc>
+                <a:tc>
+                  <a:txBody>
+                    <a:bodyPr/>
+                    <a:lstStyle/>
+                    <a:p>
+                      <a:pPr algn="ctr"/>
+                      <a:r>
+                        <a:rPr sz="1100" b="0">
+                          <a:solidFill>
+                            <a:srgbClr val="333333"/>
+                          </a:solidFill>
+                          <a:latin typeface="Calibri"/>
+                        </a:rPr>
+                        <a:t>11</a:t>
+                      </a:r>
+                    </a:p>
+                  </a:txBody>
+                  <a:tcPr anchor="ctr">
+                    <a:solidFill>
+                      <a:srgbClr val="FFFFFF"/>
+                    </a:solidFill>
+                  </a:tcPr>
+                </a:tc>
+              </a:tr>
+              <a:tr h="472440">
+                <a:tc>
+                  <a:txBody>
+                    <a:bodyPr/>
+                    <a:lstStyle/>
+                    <a:p>
+                      <a:pPr algn="l"/>
+                      <a:r>
+                        <a:rPr sz="1100" b="0">
+                          <a:solidFill>
+                            <a:srgbClr val="333333"/>
+                          </a:solidFill>
+                          <a:latin typeface="Calibri"/>
+                        </a:rPr>
+                        <a:t>Бухгалтерия</a:t>
                       </a:r>
                     </a:p>
                   </a:txBody>
@@ -4139,8 +4027,77 @@
                     </a:solidFill>
                   </a:tcPr>
                 </a:tc>
+                <a:tc>
+                  <a:txBody>
+                    <a:bodyPr/>
+                    <a:lstStyle/>
+                    <a:p>
+                      <a:pPr algn="ctr"/>
+                      <a:r>
+                        <a:rPr sz="1100" b="0">
+                          <a:solidFill>
+                            <a:srgbClr val="333333"/>
+                          </a:solidFill>
+                          <a:latin typeface="Calibri"/>
+                        </a:rPr>
+                        <a:t>5</a:t>
+                      </a:r>
+                    </a:p>
+                  </a:txBody>
+                  <a:tcPr anchor="ctr">
+                    <a:solidFill>
+                      <a:srgbClr val="F7F7F7"/>
+                    </a:solidFill>
+                  </a:tcPr>
+                </a:tc>
+                <a:tc>
+                  <a:txBody>
+                    <a:bodyPr/>
+                    <a:lstStyle/>
+                    <a:p>
+                      <a:pPr algn="ctr"/>
+                      <a:r>
+                        <a:rPr sz="1100" b="0">
+                          <a:solidFill>
+                            <a:srgbClr val="333333"/>
+                          </a:solidFill>
+                          <a:latin typeface="Calibri"/>
+                        </a:rPr>
+                        <a:t>Сургут</a:t>
+                      </a:r>
+                    </a:p>
+                  </a:txBody>
+                  <a:tcPr anchor="ctr">
+                    <a:solidFill>
+                      <a:srgbClr val="F7F7F7"/>
+                    </a:solidFill>
+                  </a:tcPr>
+                </a:tc>
+                <a:tc>
+                  <a:txBody>
+                    <a:bodyPr/>
+                    <a:lstStyle/>
+                    <a:p>
+                      <a:pPr algn="ctr"/>
+                      <a:r>
+                        <a:rPr sz="1100" b="0">
+                          <a:solidFill>
+                            <a:srgbClr val="333333"/>
+                          </a:solidFill>
+                          <a:latin typeface="Calibri"/>
+                        </a:rPr>
+                        <a:t>6</a:t>
+                      </a:r>
+                    </a:p>
+                  </a:txBody>
+                  <a:tcPr anchor="ctr">
+                    <a:solidFill>
+                      <a:srgbClr val="F7F7F7"/>
+                    </a:solidFill>
+                  </a:tcPr>
+                </a:tc>
               </a:tr>
-              <a:tr h="480060">
+              <a:tr h="472440">
                 <a:tc>
                   <a:txBody>
                     <a:bodyPr/>
@@ -4154,7 +4111,7 @@
                           </a:solidFill>
                           <a:latin typeface="Calibri"/>
                         </a:rPr>
-                        <a:t>Маркетинг</a:t>
+                        <a:t>ОУТЗ</a:t>
                       </a:r>
                     </a:p>
                   </a:txBody>
@@ -4177,7 +4134,7 @@
                           </a:solidFill>
                           <a:latin typeface="Calibri"/>
                         </a:rPr>
-                        <a:t>5</a:t>
+                        <a:t>4</a:t>
                       </a:r>
                     </a:p>
                   </a:txBody>
@@ -4200,7 +4157,7 @@
                           </a:solidFill>
                           <a:latin typeface="Calibri"/>
                         </a:rPr>
-                        <a:t>Транспортная логистика</a:t>
+                        <a:t>Ханты-Мансийск</a:t>
                       </a:r>
                     </a:p>
                   </a:txBody>
@@ -4223,7 +4180,7 @@
                           </a:solidFill>
                           <a:latin typeface="Calibri"/>
                         </a:rPr>
-                        <a:t>10</a:t>
+                        <a:t>6</a:t>
                       </a:r>
                     </a:p>
                   </a:txBody>
@@ -4233,12 +4190,14 @@
                     </a:solidFill>
                   </a:tcPr>
                 </a:tc>
-                <a:tc>
-                  <a:txBody>
-                    <a:bodyPr/>
-                    <a:lstStyle/>
-                    <a:p>
-                      <a:pPr algn="ctr"/>
+              </a:tr>
+              <a:tr h="472440">
+                <a:tc>
+                  <a:txBody>
+                    <a:bodyPr/>
+                    <a:lstStyle/>
+                    <a:p>
+                      <a:pPr algn="l"/>
                       <a:r>
                         <a:rPr sz="1100" b="0">
                           <a:solidFill>
@@ -4246,24 +4205,22 @@
                           </a:solidFill>
                           <a:latin typeface="Calibri"/>
                         </a:rPr>
-                        <a:t>Сургут 15</a:t>
-                      </a:r>
-                    </a:p>
-                  </a:txBody>
-                  <a:tcPr anchor="ctr">
-                    <a:solidFill>
-                      <a:srgbClr val="FFFFFF"/>
-                    </a:solidFill>
-                  </a:tcPr>
-                </a:tc>
-              </a:tr>
-              <a:tr h="480060">
-                <a:tc>
-                  <a:txBody>
-                    <a:bodyPr/>
-                    <a:lstStyle/>
-                    <a:p>
-                      <a:pPr algn="l"/>
+                        <a:t>АУП / СБ / HR / прочее</a:t>
+                      </a:r>
+                    </a:p>
+                  </a:txBody>
+                  <a:tcPr anchor="ctr">
+                    <a:solidFill>
+                      <a:srgbClr val="F7F7F7"/>
+                    </a:solidFill>
+                  </a:tcPr>
+                </a:tc>
+                <a:tc>
+                  <a:txBody>
+                    <a:bodyPr/>
+                    <a:lstStyle/>
+                    <a:p>
+                      <a:pPr algn="ctr"/>
                       <a:r>
                         <a:rPr sz="1100" b="0">
                           <a:solidFill>
@@ -4271,7 +4228,7 @@
                           </a:solidFill>
                           <a:latin typeface="Calibri"/>
                         </a:rPr>
-                        <a:t>Бухгалтерия</a:t>
+                        <a:t>3 / 3 / 1 / 6</a:t>
                       </a:r>
                     </a:p>
                   </a:txBody>
@@ -4294,7 +4251,7 @@
                           </a:solidFill>
                           <a:latin typeface="Calibri"/>
                         </a:rPr>
-                        <a:t>5</a:t>
+                        <a:t>Курган / Н. Уренгой / Нижневартовск</a:t>
                       </a:r>
                     </a:p>
                   </a:txBody>
@@ -4310,34 +4267,6 @@
                     <a:lstStyle/>
                     <a:p>
                       <a:pPr algn="ctr"/>
-                    </a:p>
-                  </a:txBody>
-                  <a:tcPr anchor="ctr">
-                    <a:solidFill>
-                      <a:srgbClr val="F7F7F7"/>
-                    </a:solidFill>
-                  </a:tcPr>
-                </a:tc>
-                <a:tc>
-                  <a:txBody>
-                    <a:bodyPr/>
-                    <a:lstStyle/>
-                    <a:p>
-                      <a:pPr algn="ctr"/>
-                    </a:p>
-                  </a:txBody>
-                  <a:tcPr anchor="ctr">
-                    <a:solidFill>
-                      <a:srgbClr val="F7F7F7"/>
-                    </a:solidFill>
-                  </a:tcPr>
-                </a:tc>
-                <a:tc>
-                  <a:txBody>
-                    <a:bodyPr/>
-                    <a:lstStyle/>
-                    <a:p>
-                      <a:pPr algn="ctr"/>
                       <a:r>
                         <a:rPr sz="1100" b="0">
                           <a:solidFill>
@@ -4345,205 +4274,7 @@
                           </a:solidFill>
                           <a:latin typeface="Calibri"/>
                         </a:rPr>
-                        <a:t>Омск 15</a:t>
-                      </a:r>
-                    </a:p>
-                  </a:txBody>
-                  <a:tcPr anchor="ctr">
-                    <a:solidFill>
-                      <a:srgbClr val="F7F7F7"/>
-                    </a:solidFill>
-                  </a:tcPr>
-                </a:tc>
-              </a:tr>
-              <a:tr h="480060">
-                <a:tc>
-                  <a:txBody>
-                    <a:bodyPr/>
-                    <a:lstStyle/>
-                    <a:p>
-                      <a:pPr algn="l"/>
-                      <a:r>
-                        <a:rPr sz="1100" b="0">
-                          <a:solidFill>
-                            <a:srgbClr val="333333"/>
-                          </a:solidFill>
-                          <a:latin typeface="Calibri"/>
-                        </a:rPr>
-                        <a:t>ОУТЗ</a:t>
-                      </a:r>
-                    </a:p>
-                  </a:txBody>
-                  <a:tcPr anchor="ctr">
-                    <a:solidFill>
-                      <a:srgbClr val="FFFFFF"/>
-                    </a:solidFill>
-                  </a:tcPr>
-                </a:tc>
-                <a:tc>
-                  <a:txBody>
-                    <a:bodyPr/>
-                    <a:lstStyle/>
-                    <a:p>
-                      <a:pPr algn="ctr"/>
-                      <a:r>
-                        <a:rPr sz="1100" b="0">
-                          <a:solidFill>
-                            <a:srgbClr val="333333"/>
-                          </a:solidFill>
-                          <a:latin typeface="Calibri"/>
-                        </a:rPr>
-                        <a:t>4</a:t>
-                      </a:r>
-                    </a:p>
-                  </a:txBody>
-                  <a:tcPr anchor="ctr">
-                    <a:solidFill>
-                      <a:srgbClr val="FFFFFF"/>
-                    </a:solidFill>
-                  </a:tcPr>
-                </a:tc>
-                <a:tc>
-                  <a:txBody>
-                    <a:bodyPr/>
-                    <a:lstStyle/>
-                    <a:p>
-                      <a:pPr algn="ctr"/>
-                    </a:p>
-                  </a:txBody>
-                  <a:tcPr anchor="ctr">
-                    <a:solidFill>
-                      <a:srgbClr val="FFFFFF"/>
-                    </a:solidFill>
-                  </a:tcPr>
-                </a:tc>
-                <a:tc>
-                  <a:txBody>
-                    <a:bodyPr/>
-                    <a:lstStyle/>
-                    <a:p>
-                      <a:pPr algn="ctr"/>
-                    </a:p>
-                  </a:txBody>
-                  <a:tcPr anchor="ctr">
-                    <a:solidFill>
-                      <a:srgbClr val="FFFFFF"/>
-                    </a:solidFill>
-                  </a:tcPr>
-                </a:tc>
-                <a:tc>
-                  <a:txBody>
-                    <a:bodyPr/>
-                    <a:lstStyle/>
-                    <a:p>
-                      <a:pPr algn="ctr"/>
-                      <a:r>
-                        <a:rPr sz="1100" b="0">
-                          <a:solidFill>
-                            <a:srgbClr val="333333"/>
-                          </a:solidFill>
-                          <a:latin typeface="Calibri"/>
-                        </a:rPr>
-                        <a:t>Ханты-Мансийск 6 / Н. Уренгой 7</a:t>
-                      </a:r>
-                    </a:p>
-                  </a:txBody>
-                  <a:tcPr anchor="ctr">
-                    <a:solidFill>
-                      <a:srgbClr val="FFFFFF"/>
-                    </a:solidFill>
-                  </a:tcPr>
-                </a:tc>
-              </a:tr>
-              <a:tr h="480060">
-                <a:tc>
-                  <a:txBody>
-                    <a:bodyPr/>
-                    <a:lstStyle/>
-                    <a:p>
-                      <a:pPr algn="l"/>
-                      <a:r>
-                        <a:rPr sz="1100" b="0">
-                          <a:solidFill>
-                            <a:srgbClr val="333333"/>
-                          </a:solidFill>
-                          <a:latin typeface="Calibri"/>
-                        </a:rPr>
-                        <a:t>АУП / СБ / HR / прочее</a:t>
-                      </a:r>
-                    </a:p>
-                  </a:txBody>
-                  <a:tcPr anchor="ctr">
-                    <a:solidFill>
-                      <a:srgbClr val="F7F7F7"/>
-                    </a:solidFill>
-                  </a:tcPr>
-                </a:tc>
-                <a:tc>
-                  <a:txBody>
-                    <a:bodyPr/>
-                    <a:lstStyle/>
-                    <a:p>
-                      <a:pPr algn="ctr"/>
-                      <a:r>
-                        <a:rPr sz="1100" b="0">
-                          <a:solidFill>
-                            <a:srgbClr val="333333"/>
-                          </a:solidFill>
-                          <a:latin typeface="Calibri"/>
-                        </a:rPr>
-                        <a:t>3 / 3 / 1 / 6</a:t>
-                      </a:r>
-                    </a:p>
-                  </a:txBody>
-                  <a:tcPr anchor="ctr">
-                    <a:solidFill>
-                      <a:srgbClr val="F7F7F7"/>
-                    </a:solidFill>
-                  </a:tcPr>
-                </a:tc>
-                <a:tc>
-                  <a:txBody>
-                    <a:bodyPr/>
-                    <a:lstStyle/>
-                    <a:p>
-                      <a:pPr algn="ctr"/>
-                    </a:p>
-                  </a:txBody>
-                  <a:tcPr anchor="ctr">
-                    <a:solidFill>
-                      <a:srgbClr val="F7F7F7"/>
-                    </a:solidFill>
-                  </a:tcPr>
-                </a:tc>
-                <a:tc>
-                  <a:txBody>
-                    <a:bodyPr/>
-                    <a:lstStyle/>
-                    <a:p>
-                      <a:pPr algn="ctr"/>
-                    </a:p>
-                  </a:txBody>
-                  <a:tcPr anchor="ctr">
-                    <a:solidFill>
-                      <a:srgbClr val="F7F7F7"/>
-                    </a:solidFill>
-                  </a:tcPr>
-                </a:tc>
-                <a:tc>
-                  <a:txBody>
-                    <a:bodyPr/>
-                    <a:lstStyle/>
-                    <a:p>
-                      <a:pPr algn="ctr"/>
-                      <a:r>
-                        <a:rPr sz="1100" b="0">
-                          <a:solidFill>
-                            <a:srgbClr val="333333"/>
-                          </a:solidFill>
-                          <a:latin typeface="Calibri"/>
-                        </a:rPr>
-                        <a:t>Курган 4 / Нижневартовск 6</a:t>
+                        <a:t>4 / 2 / 1</a:t>
                       </a:r>
                     </a:p>
                   </a:txBody>
@@ -4628,7 +4359,7 @@
                 </a:solidFill>
                 <a:latin typeface="Calibri"/>
               </a:rPr>
-              <a:t>Общий рейтинг по направлениям</a:t>
+              <a:t>Анкетирование 2026 — СиТЛ</a:t>
             </a:r>
           </a:p>
         </p:txBody>
@@ -4661,7 +4392,7 @@
                 </a:solidFill>
                 <a:latin typeface="Calibri"/>
               </a:rPr>
-              <a:t>KPI как в 2025: среднее всех оценок 0–10 внутри направления, переведённое в % от 10. Общую «смесь» офис+СиТЛ не считаем.</a:t>
+              <a:t>Опрос проведён 10–21 августа 2026. В расчёт взяты только полностью пройденные анкеты.</a:t>
             </a:r>
           </a:p>
         </p:txBody>
@@ -4674,8 +4405,8 @@
         </p:nvSpPr>
         <p:spPr>
           <a:xfrm>
-            <a:off x="640080" y="1280160"/>
-            <a:ext cx="5212080" cy="1783080"/>
+            <a:off x="502920" y="1280160"/>
+            <a:ext cx="5486400" cy="1554480"/>
           </a:xfrm>
           <a:prstGeom prst="roundRect">
             <a:avLst/>
@@ -4717,8 +4448,8 @@
         </p:nvSpPr>
         <p:spPr>
           <a:xfrm>
-            <a:off x="640080" y="1280160"/>
-            <a:ext cx="90000" cy="1783080"/>
+            <a:off x="502920" y="1280160"/>
+            <a:ext cx="90000" cy="1554480"/>
           </a:xfrm>
           <a:prstGeom prst="rect">
             <a:avLst/>
@@ -4760,8 +4491,8 @@
         </p:nvSpPr>
         <p:spPr>
           <a:xfrm>
-            <a:off x="868680" y="1389888"/>
-            <a:ext cx="4846320" cy="320040"/>
+            <a:off x="731520" y="1389888"/>
+            <a:ext cx="5120640" cy="320040"/>
           </a:xfrm>
           <a:prstGeom prst="rect">
             <a:avLst/>
@@ -4780,7 +4511,7 @@
                 </a:solidFill>
                 <a:latin typeface="Calibri"/>
               </a:rPr>
-              <a:t>Офис / коммерция</a:t>
+              <a:t>Явка СиТЛ</a:t>
             </a:r>
           </a:p>
         </p:txBody>
@@ -4793,8 +4524,8 @@
         </p:nvSpPr>
         <p:spPr>
           <a:xfrm>
-            <a:off x="868680" y="1664208"/>
-            <a:ext cx="4846320" cy="640080"/>
+            <a:off x="731520" y="1664208"/>
+            <a:ext cx="5120640" cy="640080"/>
           </a:xfrm>
           <a:prstGeom prst="rect">
             <a:avLst/>
@@ -4813,7 +4544,7 @@
                 </a:solidFill>
                 <a:latin typeface="Calibri"/>
               </a:rPr>
-              <a:t>88,0%</a:t>
+              <a:t>35 из 167</a:t>
             </a:r>
           </a:p>
         </p:txBody>
@@ -4826,8 +4557,8 @@
         </p:nvSpPr>
         <p:spPr>
           <a:xfrm>
-            <a:off x="868680" y="2331720"/>
-            <a:ext cx="4846320" cy="411480"/>
+            <a:off x="731520" y="2331720"/>
+            <a:ext cx="5120640" cy="411480"/>
           </a:xfrm>
           <a:prstGeom prst="rect">
             <a:avLst/>
@@ -4846,7 +4577,7 @@
                 </a:solidFill>
                 <a:latin typeface="Calibri"/>
               </a:rPr>
-              <a:t>среднее 8,80 из 10  ·  9 шкал  ·  n = 67</a:t>
+              <a:t>21,0% сотрудников направления</a:t>
             </a:r>
           </a:p>
         </p:txBody>
@@ -4859,8 +4590,8 @@
         </p:nvSpPr>
         <p:spPr>
           <a:xfrm>
-            <a:off x="6309360" y="1280160"/>
-            <a:ext cx="5212080" cy="1783080"/>
+            <a:off x="6172200" y="1280160"/>
+            <a:ext cx="5440680" cy="1554480"/>
           </a:xfrm>
           <a:prstGeom prst="roundRect">
             <a:avLst/>
@@ -4902,8 +4633,8 @@
         </p:nvSpPr>
         <p:spPr>
           <a:xfrm>
-            <a:off x="6309360" y="1280160"/>
-            <a:ext cx="90000" cy="1783080"/>
+            <a:off x="6172200" y="1280160"/>
+            <a:ext cx="90000" cy="1554480"/>
           </a:xfrm>
           <a:prstGeom prst="rect">
             <a:avLst/>
@@ -4945,8 +4676,8 @@
         </p:nvSpPr>
         <p:spPr>
           <a:xfrm>
-            <a:off x="6537960" y="1389888"/>
-            <a:ext cx="4846320" cy="320040"/>
+            <a:off x="6400800" y="1389888"/>
+            <a:ext cx="5074920" cy="320040"/>
           </a:xfrm>
           <a:prstGeom prst="rect">
             <a:avLst/>
@@ -4965,7 +4696,7 @@
                 </a:solidFill>
                 <a:latin typeface="Calibri"/>
               </a:rPr>
-              <a:t>СиТЛ</a:t>
+              <a:t>Численность СиТЛ</a:t>
             </a:r>
           </a:p>
         </p:txBody>
@@ -4978,8 +4709,8 @@
         </p:nvSpPr>
         <p:spPr>
           <a:xfrm>
-            <a:off x="6537960" y="1664208"/>
-            <a:ext cx="4846320" cy="640080"/>
+            <a:off x="6400800" y="1664208"/>
+            <a:ext cx="5074920" cy="640080"/>
           </a:xfrm>
           <a:prstGeom prst="rect">
             <a:avLst/>
@@ -4998,7 +4729,7 @@
                 </a:solidFill>
                 <a:latin typeface="Calibri"/>
               </a:rPr>
-              <a:t>77,1%</a:t>
+              <a:t>167</a:t>
             </a:r>
           </a:p>
         </p:txBody>
@@ -5011,8 +4742,8 @@
         </p:nvSpPr>
         <p:spPr>
           <a:xfrm>
-            <a:off x="6537960" y="2331720"/>
-            <a:ext cx="4846320" cy="411480"/>
+            <a:off x="6400800" y="2331720"/>
+            <a:ext cx="5074920" cy="411480"/>
           </a:xfrm>
           <a:prstGeom prst="rect">
             <a:avLst/>
@@ -5031,114 +4762,549 @@
                 </a:solidFill>
                 <a:latin typeface="Calibri"/>
               </a:rPr>
-              <a:t>среднее 7,71 из 10  ·  10 шкал  ·  n = 35</a:t>
-            </a:r>
-          </a:p>
-        </p:txBody>
-      </p:sp>
-      <p:sp>
-        <p:nvSpPr>
-          <p:cNvPr id="15" name="TextBox 14"/>
-          <p:cNvSpPr txBox="1"/>
+              <a:t>складская и транспортная логистика</a:t>
+            </a:r>
+          </a:p>
+        </p:txBody>
+      </p:sp>
+      <p:graphicFrame>
+        <p:nvGraphicFramePr>
+          <p:cNvPr id="15" name="Table 14"/>
+          <p:cNvGraphicFramePr>
+            <a:graphicFrameLocks noGrp="1"/>
+          </p:cNvGraphicFramePr>
           <p:nvPr/>
-        </p:nvSpPr>
-        <p:spPr>
-          <a:xfrm>
-            <a:off x="640080" y="3246120"/>
-            <a:ext cx="10972800" cy="2606040"/>
-          </a:xfrm>
-          <a:prstGeom prst="rect">
-            <a:avLst/>
-          </a:prstGeom>
-          <a:noFill/>
-        </p:spPr>
-        <p:txBody>
-          <a:bodyPr wrap="square">
-            <a:spAutoFit/>
-          </a:bodyPr>
-          <a:lstStyle/>
-          <a:p>
-            <a:pPr algn="l">
-              <a:spcAft>
-                <a:spcPts val="800"/>
-              </a:spcAft>
-            </a:pPr>
-            <a:r>
-              <a:rPr sz="1500" b="1">
-                <a:solidFill>
-                  <a:srgbClr val="333333"/>
-                </a:solidFill>
-                <a:latin typeface="Calibri"/>
-              </a:rPr>
-              <a:t>Как читать эти цифры</a:t>
-            </a:r>
-          </a:p>
-          <a:p>
-            <a:pPr algn="l">
-              <a:spcAft>
-                <a:spcPts val="800"/>
-              </a:spcAft>
-            </a:pPr>
-            <a:r>
-              <a:rPr sz="1500" b="0">
-                <a:solidFill>
-                  <a:srgbClr val="333333"/>
-                </a:solidFill>
-                <a:latin typeface="Calibri"/>
-              </a:rPr>
-              <a:t>• 88,0% и 77,1% — это не сравнение «кто лучше»: у направлений разные вопросы. У СиТЛ в шкалы входят склад, СИЗ и рабочее место.</a:t>
-            </a:r>
-          </a:p>
-          <a:p>
-            <a:pPr algn="l">
-              <a:spcAft>
-                <a:spcPts val="800"/>
-              </a:spcAft>
-            </a:pPr>
-            <a:r>
-              <a:rPr sz="1500" b="0">
-                <a:solidFill>
-                  <a:srgbClr val="333333"/>
-                </a:solidFill>
-                <a:latin typeface="Calibri"/>
-              </a:rPr>
-              <a:t>• С 76,5% за 2025 сравнивать один-в-один тоже нельзя: тогда оценивали выбранные «важные условия», сейчас — фиксированный набор шкал.</a:t>
-            </a:r>
-          </a:p>
-          <a:p>
-            <a:pPr algn="l">
-              <a:spcAft>
-                <a:spcPts val="800"/>
-              </a:spcAft>
-            </a:pPr>
-            <a:r>
-              <a:rPr sz="1500" b="0">
-                <a:solidFill>
-                  <a:srgbClr val="333333"/>
-                </a:solidFill>
-                <a:latin typeface="Calibri"/>
-              </a:rPr>
-              <a:t>• Логика та же, что год назад: среднее всех баллов / 10. Для офиса 8,80 → 88,0%. Для СиТЛ 7,71 → 77,1%.</a:t>
-            </a:r>
-          </a:p>
-          <a:p>
-            <a:pPr algn="l">
-              <a:spcAft>
-                <a:spcPts val="800"/>
-              </a:spcAft>
-            </a:pPr>
-            <a:r>
-              <a:rPr sz="1500" b="0">
-                <a:solidFill>
-                  <a:srgbClr val="333333"/>
-                </a:solidFill>
-                <a:latin typeface="Calibri"/>
-              </a:rPr>
-              <a:t>• В 2025 цель +10 п.п. к рейтингу не была достигнута. В 2026 явка 31,2% против 36% — цель «повысить участие» тоже пока не взята.</a:t>
-            </a:r>
-          </a:p>
-        </p:txBody>
-      </p:sp>
+        </p:nvGraphicFramePr>
+        <p:xfrm>
+          <a:off x="502920" y="3017520"/>
+          <a:ext cx="11201400" cy="2834640"/>
+        </p:xfrm>
+        <a:graphic>
+          <a:graphicData uri="http://schemas.openxmlformats.org/drawingml/2006/table">
+            <a:tbl>
+              <a:tblPr firstRow="1" bandRow="1">
+                <a:tableStyleId>{5C22544A-7EE6-4342-B048-85BDC9FD1C3A}</a:tableStyleId>
+              </a:tblPr>
+              <a:tblGrid>
+                <a:gridCol w="4023360"/>
+                <a:gridCol w="1280160"/>
+                <a:gridCol w="4389120"/>
+                <a:gridCol w="1508760"/>
+              </a:tblGrid>
+              <a:tr h="472440">
+                <a:tc>
+                  <a:txBody>
+                    <a:bodyPr/>
+                    <a:lstStyle/>
+                    <a:p>
+                      <a:pPr algn="l"/>
+                      <a:r>
+                        <a:rPr sz="1100" b="1">
+                          <a:solidFill>
+                            <a:srgbClr val="FFFFFF"/>
+                          </a:solidFill>
+                          <a:latin typeface="Calibri"/>
+                        </a:rPr>
+                        <a:t>Отдел</a:t>
+                      </a:r>
+                    </a:p>
+                  </a:txBody>
+                  <a:tcPr anchor="ctr">
+                    <a:solidFill>
+                      <a:srgbClr val="2F2F2F"/>
+                    </a:solidFill>
+                  </a:tcPr>
+                </a:tc>
+                <a:tc>
+                  <a:txBody>
+                    <a:bodyPr/>
+                    <a:lstStyle/>
+                    <a:p>
+                      <a:pPr algn="ctr"/>
+                      <a:r>
+                        <a:rPr sz="1100" b="1">
+                          <a:solidFill>
+                            <a:srgbClr val="FFFFFF"/>
+                          </a:solidFill>
+                          <a:latin typeface="Calibri"/>
+                        </a:rPr>
+                        <a:t>N</a:t>
+                      </a:r>
+                    </a:p>
+                  </a:txBody>
+                  <a:tcPr anchor="ctr">
+                    <a:solidFill>
+                      <a:srgbClr val="2F2F2F"/>
+                    </a:solidFill>
+                  </a:tcPr>
+                </a:tc>
+                <a:tc>
+                  <a:txBody>
+                    <a:bodyPr/>
+                    <a:lstStyle/>
+                    <a:p>
+                      <a:pPr algn="ctr"/>
+                      <a:r>
+                        <a:rPr sz="1100" b="1">
+                          <a:solidFill>
+                            <a:srgbClr val="FFFFFF"/>
+                          </a:solidFill>
+                          <a:latin typeface="Calibri"/>
+                        </a:rPr>
+                        <a:t>Город</a:t>
+                      </a:r>
+                    </a:p>
+                  </a:txBody>
+                  <a:tcPr anchor="ctr">
+                    <a:solidFill>
+                      <a:srgbClr val="2F2F2F"/>
+                    </a:solidFill>
+                  </a:tcPr>
+                </a:tc>
+                <a:tc>
+                  <a:txBody>
+                    <a:bodyPr/>
+                    <a:lstStyle/>
+                    <a:p>
+                      <a:pPr algn="ctr"/>
+                      <a:r>
+                        <a:rPr sz="1100" b="1">
+                          <a:solidFill>
+                            <a:srgbClr val="FFFFFF"/>
+                          </a:solidFill>
+                          <a:latin typeface="Calibri"/>
+                        </a:rPr>
+                        <a:t>N</a:t>
+                      </a:r>
+                    </a:p>
+                  </a:txBody>
+                  <a:tcPr anchor="ctr">
+                    <a:solidFill>
+                      <a:srgbClr val="2F2F2F"/>
+                    </a:solidFill>
+                  </a:tcPr>
+                </a:tc>
+              </a:tr>
+              <a:tr h="472440">
+                <a:tc>
+                  <a:txBody>
+                    <a:bodyPr/>
+                    <a:lstStyle/>
+                    <a:p>
+                      <a:pPr algn="l"/>
+                      <a:r>
+                        <a:rPr sz="1100" b="0">
+                          <a:solidFill>
+                            <a:srgbClr val="333333"/>
+                          </a:solidFill>
+                          <a:latin typeface="Calibri"/>
+                        </a:rPr>
+                        <a:t>Складская логистика</a:t>
+                      </a:r>
+                    </a:p>
+                  </a:txBody>
+                  <a:tcPr anchor="ctr">
+                    <a:solidFill>
+                      <a:srgbClr val="F7F7F7"/>
+                    </a:solidFill>
+                  </a:tcPr>
+                </a:tc>
+                <a:tc>
+                  <a:txBody>
+                    <a:bodyPr/>
+                    <a:lstStyle/>
+                    <a:p>
+                      <a:pPr algn="ctr"/>
+                      <a:r>
+                        <a:rPr sz="1100" b="0">
+                          <a:solidFill>
+                            <a:srgbClr val="333333"/>
+                          </a:solidFill>
+                          <a:latin typeface="Calibri"/>
+                        </a:rPr>
+                        <a:t>25</a:t>
+                      </a:r>
+                    </a:p>
+                  </a:txBody>
+                  <a:tcPr anchor="ctr">
+                    <a:solidFill>
+                      <a:srgbClr val="F7F7F7"/>
+                    </a:solidFill>
+                  </a:tcPr>
+                </a:tc>
+                <a:tc>
+                  <a:txBody>
+                    <a:bodyPr/>
+                    <a:lstStyle/>
+                    <a:p>
+                      <a:pPr algn="ctr"/>
+                      <a:r>
+                        <a:rPr sz="1100" b="0">
+                          <a:solidFill>
+                            <a:srgbClr val="333333"/>
+                          </a:solidFill>
+                          <a:latin typeface="Calibri"/>
+                        </a:rPr>
+                        <a:t>Тюмень</a:t>
+                      </a:r>
+                    </a:p>
+                  </a:txBody>
+                  <a:tcPr anchor="ctr">
+                    <a:solidFill>
+                      <a:srgbClr val="F7F7F7"/>
+                    </a:solidFill>
+                  </a:tcPr>
+                </a:tc>
+                <a:tc>
+                  <a:txBody>
+                    <a:bodyPr/>
+                    <a:lstStyle/>
+                    <a:p>
+                      <a:pPr algn="ctr"/>
+                      <a:r>
+                        <a:rPr sz="1100" b="0">
+                          <a:solidFill>
+                            <a:srgbClr val="333333"/>
+                          </a:solidFill>
+                          <a:latin typeface="Calibri"/>
+                        </a:rPr>
+                        <a:t>12</a:t>
+                      </a:r>
+                    </a:p>
+                  </a:txBody>
+                  <a:tcPr anchor="ctr">
+                    <a:solidFill>
+                      <a:srgbClr val="F7F7F7"/>
+                    </a:solidFill>
+                  </a:tcPr>
+                </a:tc>
+              </a:tr>
+              <a:tr h="472440">
+                <a:tc>
+                  <a:txBody>
+                    <a:bodyPr/>
+                    <a:lstStyle/>
+                    <a:p>
+                      <a:pPr algn="l"/>
+                      <a:r>
+                        <a:rPr sz="1100" b="0">
+                          <a:solidFill>
+                            <a:srgbClr val="333333"/>
+                          </a:solidFill>
+                          <a:latin typeface="Calibri"/>
+                        </a:rPr>
+                        <a:t>Транспортная логистика</a:t>
+                      </a:r>
+                    </a:p>
+                  </a:txBody>
+                  <a:tcPr anchor="ctr">
+                    <a:solidFill>
+                      <a:srgbClr val="FFFFFF"/>
+                    </a:solidFill>
+                  </a:tcPr>
+                </a:tc>
+                <a:tc>
+                  <a:txBody>
+                    <a:bodyPr/>
+                    <a:lstStyle/>
+                    <a:p>
+                      <a:pPr algn="ctr"/>
+                      <a:r>
+                        <a:rPr sz="1100" b="0">
+                          <a:solidFill>
+                            <a:srgbClr val="333333"/>
+                          </a:solidFill>
+                          <a:latin typeface="Calibri"/>
+                        </a:rPr>
+                        <a:t>10</a:t>
+                      </a:r>
+                    </a:p>
+                  </a:txBody>
+                  <a:tcPr anchor="ctr">
+                    <a:solidFill>
+                      <a:srgbClr val="FFFFFF"/>
+                    </a:solidFill>
+                  </a:tcPr>
+                </a:tc>
+                <a:tc>
+                  <a:txBody>
+                    <a:bodyPr/>
+                    <a:lstStyle/>
+                    <a:p>
+                      <a:pPr algn="ctr"/>
+                      <a:r>
+                        <a:rPr sz="1100" b="0">
+                          <a:solidFill>
+                            <a:srgbClr val="333333"/>
+                          </a:solidFill>
+                          <a:latin typeface="Calibri"/>
+                        </a:rPr>
+                        <a:t>Сургут</a:t>
+                      </a:r>
+                    </a:p>
+                  </a:txBody>
+                  <a:tcPr anchor="ctr">
+                    <a:solidFill>
+                      <a:srgbClr val="FFFFFF"/>
+                    </a:solidFill>
+                  </a:tcPr>
+                </a:tc>
+                <a:tc>
+                  <a:txBody>
+                    <a:bodyPr/>
+                    <a:lstStyle/>
+                    <a:p>
+                      <a:pPr algn="ctr"/>
+                      <a:r>
+                        <a:rPr sz="1100" b="0">
+                          <a:solidFill>
+                            <a:srgbClr val="333333"/>
+                          </a:solidFill>
+                          <a:latin typeface="Calibri"/>
+                        </a:rPr>
+                        <a:t>9</a:t>
+                      </a:r>
+                    </a:p>
+                  </a:txBody>
+                  <a:tcPr anchor="ctr">
+                    <a:solidFill>
+                      <a:srgbClr val="FFFFFF"/>
+                    </a:solidFill>
+                  </a:tcPr>
+                </a:tc>
+              </a:tr>
+              <a:tr h="472440">
+                <a:tc>
+                  <a:txBody>
+                    <a:bodyPr/>
+                    <a:lstStyle/>
+                    <a:p>
+                      <a:pPr algn="l"/>
+                    </a:p>
+                  </a:txBody>
+                  <a:tcPr anchor="ctr">
+                    <a:solidFill>
+                      <a:srgbClr val="F7F7F7"/>
+                    </a:solidFill>
+                  </a:tcPr>
+                </a:tc>
+                <a:tc>
+                  <a:txBody>
+                    <a:bodyPr/>
+                    <a:lstStyle/>
+                    <a:p>
+                      <a:pPr algn="ctr"/>
+                    </a:p>
+                  </a:txBody>
+                  <a:tcPr anchor="ctr">
+                    <a:solidFill>
+                      <a:srgbClr val="F7F7F7"/>
+                    </a:solidFill>
+                  </a:tcPr>
+                </a:tc>
+                <a:tc>
+                  <a:txBody>
+                    <a:bodyPr/>
+                    <a:lstStyle/>
+                    <a:p>
+                      <a:pPr algn="ctr"/>
+                      <a:r>
+                        <a:rPr sz="1100" b="0">
+                          <a:solidFill>
+                            <a:srgbClr val="333333"/>
+                          </a:solidFill>
+                          <a:latin typeface="Calibri"/>
+                        </a:rPr>
+                        <a:t>Нижневартовск</a:t>
+                      </a:r>
+                    </a:p>
+                  </a:txBody>
+                  <a:tcPr anchor="ctr">
+                    <a:solidFill>
+                      <a:srgbClr val="F7F7F7"/>
+                    </a:solidFill>
+                  </a:tcPr>
+                </a:tc>
+                <a:tc>
+                  <a:txBody>
+                    <a:bodyPr/>
+                    <a:lstStyle/>
+                    <a:p>
+                      <a:pPr algn="ctr"/>
+                      <a:r>
+                        <a:rPr sz="1100" b="0">
+                          <a:solidFill>
+                            <a:srgbClr val="333333"/>
+                          </a:solidFill>
+                          <a:latin typeface="Calibri"/>
+                        </a:rPr>
+                        <a:t>5</a:t>
+                      </a:r>
+                    </a:p>
+                  </a:txBody>
+                  <a:tcPr anchor="ctr">
+                    <a:solidFill>
+                      <a:srgbClr val="F7F7F7"/>
+                    </a:solidFill>
+                  </a:tcPr>
+                </a:tc>
+              </a:tr>
+              <a:tr h="472440">
+                <a:tc>
+                  <a:txBody>
+                    <a:bodyPr/>
+                    <a:lstStyle/>
+                    <a:p>
+                      <a:pPr algn="l"/>
+                    </a:p>
+                  </a:txBody>
+                  <a:tcPr anchor="ctr">
+                    <a:solidFill>
+                      <a:srgbClr val="FFFFFF"/>
+                    </a:solidFill>
+                  </a:tcPr>
+                </a:tc>
+                <a:tc>
+                  <a:txBody>
+                    <a:bodyPr/>
+                    <a:lstStyle/>
+                    <a:p>
+                      <a:pPr algn="ctr"/>
+                    </a:p>
+                  </a:txBody>
+                  <a:tcPr anchor="ctr">
+                    <a:solidFill>
+                      <a:srgbClr val="FFFFFF"/>
+                    </a:solidFill>
+                  </a:tcPr>
+                </a:tc>
+                <a:tc>
+                  <a:txBody>
+                    <a:bodyPr/>
+                    <a:lstStyle/>
+                    <a:p>
+                      <a:pPr algn="ctr"/>
+                      <a:r>
+                        <a:rPr sz="1100" b="0">
+                          <a:solidFill>
+                            <a:srgbClr val="333333"/>
+                          </a:solidFill>
+                          <a:latin typeface="Calibri"/>
+                        </a:rPr>
+                        <a:t>Новый Уренгой</a:t>
+                      </a:r>
+                    </a:p>
+                  </a:txBody>
+                  <a:tcPr anchor="ctr">
+                    <a:solidFill>
+                      <a:srgbClr val="FFFFFF"/>
+                    </a:solidFill>
+                  </a:tcPr>
+                </a:tc>
+                <a:tc>
+                  <a:txBody>
+                    <a:bodyPr/>
+                    <a:lstStyle/>
+                    <a:p>
+                      <a:pPr algn="ctr"/>
+                      <a:r>
+                        <a:rPr sz="1100" b="0">
+                          <a:solidFill>
+                            <a:srgbClr val="333333"/>
+                          </a:solidFill>
+                          <a:latin typeface="Calibri"/>
+                        </a:rPr>
+                        <a:t>5</a:t>
+                      </a:r>
+                    </a:p>
+                  </a:txBody>
+                  <a:tcPr anchor="ctr">
+                    <a:solidFill>
+                      <a:srgbClr val="FFFFFF"/>
+                    </a:solidFill>
+                  </a:tcPr>
+                </a:tc>
+              </a:tr>
+              <a:tr h="472440">
+                <a:tc>
+                  <a:txBody>
+                    <a:bodyPr/>
+                    <a:lstStyle/>
+                    <a:p>
+                      <a:pPr algn="l"/>
+                    </a:p>
+                  </a:txBody>
+                  <a:tcPr anchor="ctr">
+                    <a:solidFill>
+                      <a:srgbClr val="F7F7F7"/>
+                    </a:solidFill>
+                  </a:tcPr>
+                </a:tc>
+                <a:tc>
+                  <a:txBody>
+                    <a:bodyPr/>
+                    <a:lstStyle/>
+                    <a:p>
+                      <a:pPr algn="ctr"/>
+                    </a:p>
+                  </a:txBody>
+                  <a:tcPr anchor="ctr">
+                    <a:solidFill>
+                      <a:srgbClr val="F7F7F7"/>
+                    </a:solidFill>
+                  </a:tcPr>
+                </a:tc>
+                <a:tc>
+                  <a:txBody>
+                    <a:bodyPr/>
+                    <a:lstStyle/>
+                    <a:p>
+                      <a:pPr algn="ctr"/>
+                      <a:r>
+                        <a:rPr sz="1100" b="0">
+                          <a:solidFill>
+                            <a:srgbClr val="333333"/>
+                          </a:solidFill>
+                          <a:latin typeface="Calibri"/>
+                        </a:rPr>
+                        <a:t>Омск</a:t>
+                      </a:r>
+                    </a:p>
+                  </a:txBody>
+                  <a:tcPr anchor="ctr">
+                    <a:solidFill>
+                      <a:srgbClr val="F7F7F7"/>
+                    </a:solidFill>
+                  </a:tcPr>
+                </a:tc>
+                <a:tc>
+                  <a:txBody>
+                    <a:bodyPr/>
+                    <a:lstStyle/>
+                    <a:p>
+                      <a:pPr algn="ctr"/>
+                      <a:r>
+                        <a:rPr sz="1100" b="0">
+                          <a:solidFill>
+                            <a:srgbClr val="333333"/>
+                          </a:solidFill>
+                          <a:latin typeface="Calibri"/>
+                        </a:rPr>
+                        <a:t>4</a:t>
+                      </a:r>
+                    </a:p>
+                  </a:txBody>
+                  <a:tcPr anchor="ctr">
+                    <a:solidFill>
+                      <a:srgbClr val="F7F7F7"/>
+                    </a:solidFill>
+                  </a:tcPr>
+                </a:tc>
+              </a:tr>
+            </a:tbl>
+          </a:graphicData>
+        </a:graphic>
+      </p:graphicFrame>
     </p:spTree>
   </p:cSld>
   <p:clrMapOvr>
@@ -5209,7 +5375,7 @@
                 </a:solidFill>
                 <a:latin typeface="Calibri"/>
               </a:rPr>
-              <a:t>Офис / коммерция — оценки условий</a:t>
+              <a:t>Уровень вовлечённости</a:t>
             </a:r>
           </a:p>
         </p:txBody>
@@ -5222,8 +5388,8 @@
         </p:nvSpPr>
         <p:spPr>
           <a:xfrm>
-            <a:off x="1691640" y="658368"/>
-            <a:ext cx="9875520" cy="347472"/>
+            <a:off x="1691640" y="713232"/>
+            <a:ext cx="9875520" cy="411480"/>
           </a:xfrm>
           <a:prstGeom prst="rect">
             <a:avLst/>
@@ -5236,1089 +5402,113 @@
           <a:p>
             <a:pPr algn="l"/>
             <a:r>
-              <a:rPr sz="1300" b="0">
+              <a:rPr sz="1400" b="0">
                 <a:solidFill>
                   <a:srgbClr val="666666"/>
                 </a:solidFill>
                 <a:latin typeface="Calibri"/>
               </a:rPr>
-              <a:t>Сотрудники оценивали 9 условий от 0 до 10. Ниже — среднее и доля максимальных оценок (10), как в отчёте 2025.</a:t>
-            </a:r>
-          </a:p>
-        </p:txBody>
-      </p:sp>
-      <p:graphicFrame>
-        <p:nvGraphicFramePr>
-          <p:cNvPr id="5" name="Table 4"/>
-          <p:cNvGraphicFramePr>
-            <a:graphicFrameLocks noGrp="1"/>
-          </p:cNvGraphicFramePr>
+              <a:t>Оптовое направление КС и СиТЛ, 2026 год.</a:t>
+            </a:r>
+          </a:p>
+        </p:txBody>
+      </p:sp>
+      <p:sp>
+        <p:nvSpPr>
+          <p:cNvPr id="5" name="Rounded Rectangle 4"/>
+          <p:cNvSpPr/>
           <p:nvPr/>
-        </p:nvGraphicFramePr>
-        <p:xfrm>
-          <a:off x="411480" y="1051560"/>
-          <a:ext cx="7498080" cy="4709160"/>
-        </p:xfrm>
-        <a:graphic>
-          <a:graphicData uri="http://schemas.openxmlformats.org/drawingml/2006/table">
-            <a:tbl>
-              <a:tblPr firstRow="1" bandRow="1">
-                <a:tableStyleId>{5C22544A-7EE6-4342-B048-85BDC9FD1C3A}</a:tableStyleId>
-              </a:tblPr>
-              <a:tblGrid>
-                <a:gridCol w="4023360"/>
-                <a:gridCol w="1143000"/>
-                <a:gridCol w="1143000"/>
-                <a:gridCol w="1188720"/>
-              </a:tblGrid>
-              <a:tr h="428105">
-                <a:tc>
-                  <a:txBody>
-                    <a:bodyPr/>
-                    <a:lstStyle/>
-                    <a:p>
-                      <a:pPr algn="l"/>
-                      <a:r>
-                        <a:rPr sz="1100" b="1">
-                          <a:solidFill>
-                            <a:srgbClr val="FFFFFF"/>
-                          </a:solidFill>
-                          <a:latin typeface="Calibri"/>
-                        </a:rPr>
-                        <a:t>Условие</a:t>
-                      </a:r>
-                    </a:p>
-                  </a:txBody>
-                  <a:tcPr anchor="ctr">
-                    <a:solidFill>
-                      <a:srgbClr val="2F2F2F"/>
-                    </a:solidFill>
-                  </a:tcPr>
-                </a:tc>
-                <a:tc>
-                  <a:txBody>
-                    <a:bodyPr/>
-                    <a:lstStyle/>
-                    <a:p>
-                      <a:pPr algn="ctr"/>
-                      <a:r>
-                        <a:rPr sz="1100" b="1">
-                          <a:solidFill>
-                            <a:srgbClr val="FFFFFF"/>
-                          </a:solidFill>
-                          <a:latin typeface="Calibri"/>
-                        </a:rPr>
-                        <a:t>Среднее</a:t>
-                      </a:r>
-                    </a:p>
-                  </a:txBody>
-                  <a:tcPr anchor="ctr">
-                    <a:solidFill>
-                      <a:srgbClr val="2F2F2F"/>
-                    </a:solidFill>
-                  </a:tcPr>
-                </a:tc>
-                <a:tc>
-                  <a:txBody>
-                    <a:bodyPr/>
-                    <a:lstStyle/>
-                    <a:p>
-                      <a:pPr algn="ctr"/>
-                      <a:r>
-                        <a:rPr sz="1100" b="1">
-                          <a:solidFill>
-                            <a:srgbClr val="FFFFFF"/>
-                          </a:solidFill>
-                          <a:latin typeface="Calibri"/>
-                        </a:rPr>
-                        <a:t>% от 10</a:t>
-                      </a:r>
-                    </a:p>
-                  </a:txBody>
-                  <a:tcPr anchor="ctr">
-                    <a:solidFill>
-                      <a:srgbClr val="2F2F2F"/>
-                    </a:solidFill>
-                  </a:tcPr>
-                </a:tc>
-                <a:tc>
-                  <a:txBody>
-                    <a:bodyPr/>
-                    <a:lstStyle/>
-                    <a:p>
-                      <a:pPr algn="ctr"/>
-                      <a:r>
-                        <a:rPr sz="1100" b="1">
-                          <a:solidFill>
-                            <a:srgbClr val="FFFFFF"/>
-                          </a:solidFill>
-                          <a:latin typeface="Calibri"/>
-                        </a:rPr>
-                        <a:t>Доля «10»</a:t>
-                      </a:r>
-                    </a:p>
-                  </a:txBody>
-                  <a:tcPr anchor="ctr">
-                    <a:solidFill>
-                      <a:srgbClr val="2F2F2F"/>
-                    </a:solidFill>
-                  </a:tcPr>
-                </a:tc>
-              </a:tr>
-              <a:tr h="428105">
-                <a:tc>
-                  <a:txBody>
-                    <a:bodyPr/>
-                    <a:lstStyle/>
-                    <a:p>
-                      <a:pPr algn="l"/>
-                      <a:r>
-                        <a:rPr sz="1100" b="0">
-                          <a:solidFill>
-                            <a:srgbClr val="333333"/>
-                          </a:solidFill>
-                          <a:latin typeface="Calibri"/>
-                        </a:rPr>
-                        <a:t>Легкость обращения к руководителю</a:t>
-                      </a:r>
-                    </a:p>
-                  </a:txBody>
-                  <a:tcPr anchor="ctr">
-                    <a:solidFill>
-                      <a:srgbClr val="F7F7F7"/>
-                    </a:solidFill>
-                  </a:tcPr>
-                </a:tc>
-                <a:tc>
-                  <a:txBody>
-                    <a:bodyPr/>
-                    <a:lstStyle/>
-                    <a:p>
-                      <a:pPr algn="ctr"/>
-                      <a:r>
-                        <a:rPr sz="1100" b="0">
-                          <a:solidFill>
-                            <a:srgbClr val="333333"/>
-                          </a:solidFill>
-                          <a:latin typeface="Calibri"/>
-                        </a:rPr>
-                        <a:t>9,45</a:t>
-                      </a:r>
-                    </a:p>
-                  </a:txBody>
-                  <a:tcPr anchor="ctr">
-                    <a:solidFill>
-                      <a:srgbClr val="F7F7F7"/>
-                    </a:solidFill>
-                  </a:tcPr>
-                </a:tc>
-                <a:tc>
-                  <a:txBody>
-                    <a:bodyPr/>
-                    <a:lstStyle/>
-                    <a:p>
-                      <a:pPr algn="ctr"/>
-                      <a:r>
-                        <a:rPr sz="1100" b="0">
-                          <a:solidFill>
-                            <a:srgbClr val="333333"/>
-                          </a:solidFill>
-                          <a:latin typeface="Calibri"/>
-                        </a:rPr>
-                        <a:t>94,5%</a:t>
-                      </a:r>
-                    </a:p>
-                  </a:txBody>
-                  <a:tcPr anchor="ctr">
-                    <a:solidFill>
-                      <a:srgbClr val="F7F7F7"/>
-                    </a:solidFill>
-                  </a:tcPr>
-                </a:tc>
-                <a:tc>
-                  <a:txBody>
-                    <a:bodyPr/>
-                    <a:lstStyle/>
-                    <a:p>
-                      <a:pPr algn="ctr"/>
-                      <a:r>
-                        <a:rPr sz="1100" b="0">
-                          <a:solidFill>
-                            <a:srgbClr val="333333"/>
-                          </a:solidFill>
-                          <a:latin typeface="Calibri"/>
-                        </a:rPr>
-                        <a:t>75%</a:t>
-                      </a:r>
-                    </a:p>
-                  </a:txBody>
-                  <a:tcPr anchor="ctr">
-                    <a:solidFill>
-                      <a:srgbClr val="F7F7F7"/>
-                    </a:solidFill>
-                  </a:tcPr>
-                </a:tc>
-              </a:tr>
-              <a:tr h="428105">
-                <a:tc>
-                  <a:txBody>
-                    <a:bodyPr/>
-                    <a:lstStyle/>
-                    <a:p>
-                      <a:pPr algn="l"/>
-                      <a:r>
-                        <a:rPr sz="1100" b="0">
-                          <a:solidFill>
-                            <a:srgbClr val="333333"/>
-                          </a:solidFill>
-                          <a:latin typeface="Calibri"/>
-                        </a:rPr>
-                        <a:t>Комфорт работы с руководителем</a:t>
-                      </a:r>
-                    </a:p>
-                  </a:txBody>
-                  <a:tcPr anchor="ctr">
-                    <a:solidFill>
-                      <a:srgbClr val="FFFFFF"/>
-                    </a:solidFill>
-                  </a:tcPr>
-                </a:tc>
-                <a:tc>
-                  <a:txBody>
-                    <a:bodyPr/>
-                    <a:lstStyle/>
-                    <a:p>
-                      <a:pPr algn="ctr"/>
-                      <a:r>
-                        <a:rPr sz="1100" b="0">
-                          <a:solidFill>
-                            <a:srgbClr val="333333"/>
-                          </a:solidFill>
-                          <a:latin typeface="Calibri"/>
-                        </a:rPr>
-                        <a:t>9,37</a:t>
-                      </a:r>
-                    </a:p>
-                  </a:txBody>
-                  <a:tcPr anchor="ctr">
-                    <a:solidFill>
-                      <a:srgbClr val="FFFFFF"/>
-                    </a:solidFill>
-                  </a:tcPr>
-                </a:tc>
-                <a:tc>
-                  <a:txBody>
-                    <a:bodyPr/>
-                    <a:lstStyle/>
-                    <a:p>
-                      <a:pPr algn="ctr"/>
-                      <a:r>
-                        <a:rPr sz="1100" b="0">
-                          <a:solidFill>
-                            <a:srgbClr val="333333"/>
-                          </a:solidFill>
-                          <a:latin typeface="Calibri"/>
-                        </a:rPr>
-                        <a:t>93,7%</a:t>
-                      </a:r>
-                    </a:p>
-                  </a:txBody>
-                  <a:tcPr anchor="ctr">
-                    <a:solidFill>
-                      <a:srgbClr val="FFFFFF"/>
-                    </a:solidFill>
-                  </a:tcPr>
-                </a:tc>
-                <a:tc>
-                  <a:txBody>
-                    <a:bodyPr/>
-                    <a:lstStyle/>
-                    <a:p>
-                      <a:pPr algn="ctr"/>
-                      <a:r>
-                        <a:rPr sz="1100" b="0">
-                          <a:solidFill>
-                            <a:srgbClr val="333333"/>
-                          </a:solidFill>
-                          <a:latin typeface="Calibri"/>
-                        </a:rPr>
-                        <a:t>73%</a:t>
-                      </a:r>
-                    </a:p>
-                  </a:txBody>
-                  <a:tcPr anchor="ctr">
-                    <a:solidFill>
-                      <a:srgbClr val="FFFFFF"/>
-                    </a:solidFill>
-                  </a:tcPr>
-                </a:tc>
-              </a:tr>
-              <a:tr h="428105">
-                <a:tc>
-                  <a:txBody>
-                    <a:bodyPr/>
-                    <a:lstStyle/>
-                    <a:p>
-                      <a:pPr algn="l"/>
-                      <a:r>
-                        <a:rPr sz="1100" b="0">
-                          <a:solidFill>
-                            <a:srgbClr val="333333"/>
-                          </a:solidFill>
-                          <a:latin typeface="Calibri"/>
-                        </a:rPr>
-                        <a:t>Качество обратной связи руководителя</a:t>
-                      </a:r>
-                    </a:p>
-                  </a:txBody>
-                  <a:tcPr anchor="ctr">
-                    <a:solidFill>
-                      <a:srgbClr val="F7F7F7"/>
-                    </a:solidFill>
-                  </a:tcPr>
-                </a:tc>
-                <a:tc>
-                  <a:txBody>
-                    <a:bodyPr/>
-                    <a:lstStyle/>
-                    <a:p>
-                      <a:pPr algn="ctr"/>
-                      <a:r>
-                        <a:rPr sz="1100" b="0">
-                          <a:solidFill>
-                            <a:srgbClr val="333333"/>
-                          </a:solidFill>
-                          <a:latin typeface="Calibri"/>
-                        </a:rPr>
-                        <a:t>9,24</a:t>
-                      </a:r>
-                    </a:p>
-                  </a:txBody>
-                  <a:tcPr anchor="ctr">
-                    <a:solidFill>
-                      <a:srgbClr val="F7F7F7"/>
-                    </a:solidFill>
-                  </a:tcPr>
-                </a:tc>
-                <a:tc>
-                  <a:txBody>
-                    <a:bodyPr/>
-                    <a:lstStyle/>
-                    <a:p>
-                      <a:pPr algn="ctr"/>
-                      <a:r>
-                        <a:rPr sz="1100" b="0">
-                          <a:solidFill>
-                            <a:srgbClr val="333333"/>
-                          </a:solidFill>
-                          <a:latin typeface="Calibri"/>
-                        </a:rPr>
-                        <a:t>92,4%</a:t>
-                      </a:r>
-                    </a:p>
-                  </a:txBody>
-                  <a:tcPr anchor="ctr">
-                    <a:solidFill>
-                      <a:srgbClr val="F7F7F7"/>
-                    </a:solidFill>
-                  </a:tcPr>
-                </a:tc>
-                <a:tc>
-                  <a:txBody>
-                    <a:bodyPr/>
-                    <a:lstStyle/>
-                    <a:p>
-                      <a:pPr algn="ctr"/>
-                      <a:r>
-                        <a:rPr sz="1100" b="0">
-                          <a:solidFill>
-                            <a:srgbClr val="333333"/>
-                          </a:solidFill>
-                          <a:latin typeface="Calibri"/>
-                        </a:rPr>
-                        <a:t>57%</a:t>
-                      </a:r>
-                    </a:p>
-                  </a:txBody>
-                  <a:tcPr anchor="ctr">
-                    <a:solidFill>
-                      <a:srgbClr val="F7F7F7"/>
-                    </a:solidFill>
-                  </a:tcPr>
-                </a:tc>
-              </a:tr>
-              <a:tr h="428105">
-                <a:tc>
-                  <a:txBody>
-                    <a:bodyPr/>
-                    <a:lstStyle/>
-                    <a:p>
-                      <a:pPr algn="l"/>
-                      <a:r>
-                        <a:rPr sz="1100" b="0">
-                          <a:solidFill>
-                            <a:srgbClr val="333333"/>
-                          </a:solidFill>
-                          <a:latin typeface="Calibri"/>
-                        </a:rPr>
-                        <a:t>Взаимодействие внутри отдела</a:t>
-                      </a:r>
-                    </a:p>
-                  </a:txBody>
-                  <a:tcPr anchor="ctr">
-                    <a:solidFill>
-                      <a:srgbClr val="FFFFFF"/>
-                    </a:solidFill>
-                  </a:tcPr>
-                </a:tc>
-                <a:tc>
-                  <a:txBody>
-                    <a:bodyPr/>
-                    <a:lstStyle/>
-                    <a:p>
-                      <a:pPr algn="ctr"/>
-                      <a:r>
-                        <a:rPr sz="1100" b="0">
-                          <a:solidFill>
-                            <a:srgbClr val="333333"/>
-                          </a:solidFill>
-                          <a:latin typeface="Calibri"/>
-                        </a:rPr>
-                        <a:t>9,18</a:t>
-                      </a:r>
-                    </a:p>
-                  </a:txBody>
-                  <a:tcPr anchor="ctr">
-                    <a:solidFill>
-                      <a:srgbClr val="FFFFFF"/>
-                    </a:solidFill>
-                  </a:tcPr>
-                </a:tc>
-                <a:tc>
-                  <a:txBody>
-                    <a:bodyPr/>
-                    <a:lstStyle/>
-                    <a:p>
-                      <a:pPr algn="ctr"/>
-                      <a:r>
-                        <a:rPr sz="1100" b="0">
-                          <a:solidFill>
-                            <a:srgbClr val="333333"/>
-                          </a:solidFill>
-                          <a:latin typeface="Calibri"/>
-                        </a:rPr>
-                        <a:t>91,8%</a:t>
-                      </a:r>
-                    </a:p>
-                  </a:txBody>
-                  <a:tcPr anchor="ctr">
-                    <a:solidFill>
-                      <a:srgbClr val="FFFFFF"/>
-                    </a:solidFill>
-                  </a:tcPr>
-                </a:tc>
-                <a:tc>
-                  <a:txBody>
-                    <a:bodyPr/>
-                    <a:lstStyle/>
-                    <a:p>
-                      <a:pPr algn="ctr"/>
-                      <a:r>
-                        <a:rPr sz="1100" b="0">
-                          <a:solidFill>
-                            <a:srgbClr val="333333"/>
-                          </a:solidFill>
-                          <a:latin typeface="Calibri"/>
-                        </a:rPr>
-                        <a:t>61%</a:t>
-                      </a:r>
-                    </a:p>
-                  </a:txBody>
-                  <a:tcPr anchor="ctr">
-                    <a:solidFill>
-                      <a:srgbClr val="FFFFFF"/>
-                    </a:solidFill>
-                  </a:tcPr>
-                </a:tc>
-              </a:tr>
-              <a:tr h="428105">
-                <a:tc>
-                  <a:txBody>
-                    <a:bodyPr/>
-                    <a:lstStyle/>
-                    <a:p>
-                      <a:pPr algn="l"/>
-                      <a:r>
-                        <a:rPr sz="1100" b="0">
-                          <a:solidFill>
-                            <a:srgbClr val="333333"/>
-                          </a:solidFill>
-                          <a:latin typeface="Calibri"/>
-                        </a:rPr>
-                        <a:t>Уровень загрузки</a:t>
-                      </a:r>
-                    </a:p>
-                  </a:txBody>
-                  <a:tcPr anchor="ctr">
-                    <a:solidFill>
-                      <a:srgbClr val="F7F7F7"/>
-                    </a:solidFill>
-                  </a:tcPr>
-                </a:tc>
-                <a:tc>
-                  <a:txBody>
-                    <a:bodyPr/>
-                    <a:lstStyle/>
-                    <a:p>
-                      <a:pPr algn="ctr"/>
-                      <a:r>
-                        <a:rPr sz="1100" b="0">
-                          <a:solidFill>
-                            <a:srgbClr val="333333"/>
-                          </a:solidFill>
-                          <a:latin typeface="Calibri"/>
-                        </a:rPr>
-                        <a:t>9,10</a:t>
-                      </a:r>
-                    </a:p>
-                  </a:txBody>
-                  <a:tcPr anchor="ctr">
-                    <a:solidFill>
-                      <a:srgbClr val="F7F7F7"/>
-                    </a:solidFill>
-                  </a:tcPr>
-                </a:tc>
-                <a:tc>
-                  <a:txBody>
-                    <a:bodyPr/>
-                    <a:lstStyle/>
-                    <a:p>
-                      <a:pPr algn="ctr"/>
-                      <a:r>
-                        <a:rPr sz="1100" b="0">
-                          <a:solidFill>
-                            <a:srgbClr val="333333"/>
-                          </a:solidFill>
-                          <a:latin typeface="Calibri"/>
-                        </a:rPr>
-                        <a:t>91,0%</a:t>
-                      </a:r>
-                    </a:p>
-                  </a:txBody>
-                  <a:tcPr anchor="ctr">
-                    <a:solidFill>
-                      <a:srgbClr val="F7F7F7"/>
-                    </a:solidFill>
-                  </a:tcPr>
-                </a:tc>
-                <a:tc>
-                  <a:txBody>
-                    <a:bodyPr/>
-                    <a:lstStyle/>
-                    <a:p>
-                      <a:pPr algn="ctr"/>
-                      <a:r>
-                        <a:rPr sz="1100" b="0">
-                          <a:solidFill>
-                            <a:srgbClr val="333333"/>
-                          </a:solidFill>
-                          <a:latin typeface="Calibri"/>
-                        </a:rPr>
-                        <a:t>49%</a:t>
-                      </a:r>
-                    </a:p>
-                  </a:txBody>
-                  <a:tcPr anchor="ctr">
-                    <a:solidFill>
-                      <a:srgbClr val="F7F7F7"/>
-                    </a:solidFill>
-                  </a:tcPr>
-                </a:tc>
-              </a:tr>
-              <a:tr h="428105">
-                <a:tc>
-                  <a:txBody>
-                    <a:bodyPr/>
-                    <a:lstStyle/>
-                    <a:p>
-                      <a:pPr algn="l"/>
-                      <a:r>
-                        <a:rPr sz="1100" b="0">
-                          <a:solidFill>
-                            <a:srgbClr val="333333"/>
-                          </a:solidFill>
-                          <a:latin typeface="Calibri"/>
-                        </a:rPr>
-                        <a:t>Удовлетворённость задачами и проектами</a:t>
-                      </a:r>
-                    </a:p>
-                  </a:txBody>
-                  <a:tcPr anchor="ctr">
-                    <a:solidFill>
-                      <a:srgbClr val="FFFFFF"/>
-                    </a:solidFill>
-                  </a:tcPr>
-                </a:tc>
-                <a:tc>
-                  <a:txBody>
-                    <a:bodyPr/>
-                    <a:lstStyle/>
-                    <a:p>
-                      <a:pPr algn="ctr"/>
-                      <a:r>
-                        <a:rPr sz="1100" b="0">
-                          <a:solidFill>
-                            <a:srgbClr val="333333"/>
-                          </a:solidFill>
-                          <a:latin typeface="Calibri"/>
-                        </a:rPr>
-                        <a:t>8,54</a:t>
-                      </a:r>
-                    </a:p>
-                  </a:txBody>
-                  <a:tcPr anchor="ctr">
-                    <a:solidFill>
-                      <a:srgbClr val="FFFFFF"/>
-                    </a:solidFill>
-                  </a:tcPr>
-                </a:tc>
-                <a:tc>
-                  <a:txBody>
-                    <a:bodyPr/>
-                    <a:lstStyle/>
-                    <a:p>
-                      <a:pPr algn="ctr"/>
-                      <a:r>
-                        <a:rPr sz="1100" b="0">
-                          <a:solidFill>
-                            <a:srgbClr val="333333"/>
-                          </a:solidFill>
-                          <a:latin typeface="Calibri"/>
-                        </a:rPr>
-                        <a:t>85,4%</a:t>
-                      </a:r>
-                    </a:p>
-                  </a:txBody>
-                  <a:tcPr anchor="ctr">
-                    <a:solidFill>
-                      <a:srgbClr val="FFFFFF"/>
-                    </a:solidFill>
-                  </a:tcPr>
-                </a:tc>
-                <a:tc>
-                  <a:txBody>
-                    <a:bodyPr/>
-                    <a:lstStyle/>
-                    <a:p>
-                      <a:pPr algn="ctr"/>
-                      <a:r>
-                        <a:rPr sz="1100" b="0">
-                          <a:solidFill>
-                            <a:srgbClr val="333333"/>
-                          </a:solidFill>
-                          <a:latin typeface="Calibri"/>
-                        </a:rPr>
-                        <a:t>39%</a:t>
-                      </a:r>
-                    </a:p>
-                  </a:txBody>
-                  <a:tcPr anchor="ctr">
-                    <a:solidFill>
-                      <a:srgbClr val="FFFFFF"/>
-                    </a:solidFill>
-                  </a:tcPr>
-                </a:tc>
-              </a:tr>
-              <a:tr h="428105">
-                <a:tc>
-                  <a:txBody>
-                    <a:bodyPr/>
-                    <a:lstStyle/>
-                    <a:p>
-                      <a:pPr algn="l"/>
-                      <a:r>
-                        <a:rPr sz="1100" b="0">
-                          <a:solidFill>
-                            <a:srgbClr val="333333"/>
-                          </a:solidFill>
-                          <a:latin typeface="Calibri"/>
-                        </a:rPr>
-                        <a:t>Удовлетворённость работой</a:t>
-                      </a:r>
-                    </a:p>
-                  </a:txBody>
-                  <a:tcPr anchor="ctr">
-                    <a:solidFill>
-                      <a:srgbClr val="F7F7F7"/>
-                    </a:solidFill>
-                  </a:tcPr>
-                </a:tc>
-                <a:tc>
-                  <a:txBody>
-                    <a:bodyPr/>
-                    <a:lstStyle/>
-                    <a:p>
-                      <a:pPr algn="ctr"/>
-                      <a:r>
-                        <a:rPr sz="1100" b="0">
-                          <a:solidFill>
-                            <a:srgbClr val="333333"/>
-                          </a:solidFill>
-                          <a:latin typeface="Calibri"/>
-                        </a:rPr>
-                        <a:t>8,49</a:t>
-                      </a:r>
-                    </a:p>
-                  </a:txBody>
-                  <a:tcPr anchor="ctr">
-                    <a:solidFill>
-                      <a:srgbClr val="F7F7F7"/>
-                    </a:solidFill>
-                  </a:tcPr>
-                </a:tc>
-                <a:tc>
-                  <a:txBody>
-                    <a:bodyPr/>
-                    <a:lstStyle/>
-                    <a:p>
-                      <a:pPr algn="ctr"/>
-                      <a:r>
-                        <a:rPr sz="1100" b="0">
-                          <a:solidFill>
-                            <a:srgbClr val="333333"/>
-                          </a:solidFill>
-                          <a:latin typeface="Calibri"/>
-                        </a:rPr>
-                        <a:t>84,9%</a:t>
-                      </a:r>
-                    </a:p>
-                  </a:txBody>
-                  <a:tcPr anchor="ctr">
-                    <a:solidFill>
-                      <a:srgbClr val="F7F7F7"/>
-                    </a:solidFill>
-                  </a:tcPr>
-                </a:tc>
-                <a:tc>
-                  <a:txBody>
-                    <a:bodyPr/>
-                    <a:lstStyle/>
-                    <a:p>
-                      <a:pPr algn="ctr"/>
-                      <a:r>
-                        <a:rPr sz="1100" b="0">
-                          <a:solidFill>
-                            <a:srgbClr val="333333"/>
-                          </a:solidFill>
-                          <a:latin typeface="Calibri"/>
-                        </a:rPr>
-                        <a:t>39%</a:t>
-                      </a:r>
-                    </a:p>
-                  </a:txBody>
-                  <a:tcPr anchor="ctr">
-                    <a:solidFill>
-                      <a:srgbClr val="F7F7F7"/>
-                    </a:solidFill>
-                  </a:tcPr>
-                </a:tc>
-              </a:tr>
-              <a:tr h="428105">
-                <a:tc>
-                  <a:txBody>
-                    <a:bodyPr/>
-                    <a:lstStyle/>
-                    <a:p>
-                      <a:pPr algn="l"/>
-                      <a:r>
-                        <a:rPr sz="1100" b="0">
-                          <a:solidFill>
-                            <a:srgbClr val="333333"/>
-                          </a:solidFill>
-                          <a:latin typeface="Calibri"/>
-                        </a:rPr>
-                        <a:t>Коммуникации между смежными отделами</a:t>
-                      </a:r>
-                    </a:p>
-                  </a:txBody>
-                  <a:tcPr anchor="ctr">
-                    <a:solidFill>
-                      <a:srgbClr val="FFFFFF"/>
-                    </a:solidFill>
-                  </a:tcPr>
-                </a:tc>
-                <a:tc>
-                  <a:txBody>
-                    <a:bodyPr/>
-                    <a:lstStyle/>
-                    <a:p>
-                      <a:pPr algn="ctr"/>
-                      <a:r>
-                        <a:rPr sz="1100" b="0">
-                          <a:solidFill>
-                            <a:srgbClr val="333333"/>
-                          </a:solidFill>
-                          <a:latin typeface="Calibri"/>
-                        </a:rPr>
-                        <a:t>8,07</a:t>
-                      </a:r>
-                    </a:p>
-                  </a:txBody>
-                  <a:tcPr anchor="ctr">
-                    <a:solidFill>
-                      <a:srgbClr val="FFFFFF"/>
-                    </a:solidFill>
-                  </a:tcPr>
-                </a:tc>
-                <a:tc>
-                  <a:txBody>
-                    <a:bodyPr/>
-                    <a:lstStyle/>
-                    <a:p>
-                      <a:pPr algn="ctr"/>
-                      <a:r>
-                        <a:rPr sz="1100" b="0">
-                          <a:solidFill>
-                            <a:srgbClr val="333333"/>
-                          </a:solidFill>
-                          <a:latin typeface="Calibri"/>
-                        </a:rPr>
-                        <a:t>80,7%</a:t>
-                      </a:r>
-                    </a:p>
-                  </a:txBody>
-                  <a:tcPr anchor="ctr">
-                    <a:solidFill>
-                      <a:srgbClr val="FFFFFF"/>
-                    </a:solidFill>
-                  </a:tcPr>
-                </a:tc>
-                <a:tc>
-                  <a:txBody>
-                    <a:bodyPr/>
-                    <a:lstStyle/>
-                    <a:p>
-                      <a:pPr algn="ctr"/>
-                      <a:r>
-                        <a:rPr sz="1100" b="0">
-                          <a:solidFill>
-                            <a:srgbClr val="333333"/>
-                          </a:solidFill>
-                          <a:latin typeface="Calibri"/>
-                        </a:rPr>
-                        <a:t>33%</a:t>
-                      </a:r>
-                    </a:p>
-                  </a:txBody>
-                  <a:tcPr anchor="ctr">
-                    <a:solidFill>
-                      <a:srgbClr val="FFFFFF"/>
-                    </a:solidFill>
-                  </a:tcPr>
-                </a:tc>
-              </a:tr>
-              <a:tr h="428105">
-                <a:tc>
-                  <a:txBody>
-                    <a:bodyPr/>
-                    <a:lstStyle/>
-                    <a:p>
-                      <a:pPr algn="l"/>
-                      <a:r>
-                        <a:rPr sz="1100" b="0">
-                          <a:solidFill>
-                            <a:srgbClr val="333333"/>
-                          </a:solidFill>
-                          <a:latin typeface="Calibri"/>
-                        </a:rPr>
-                        <a:t>Вознаграждение и мотивация vs вклад</a:t>
-                      </a:r>
-                    </a:p>
-                  </a:txBody>
-                  <a:tcPr anchor="ctr">
-                    <a:solidFill>
-                      <a:srgbClr val="F7F7F7"/>
-                    </a:solidFill>
-                  </a:tcPr>
-                </a:tc>
-                <a:tc>
-                  <a:txBody>
-                    <a:bodyPr/>
-                    <a:lstStyle/>
-                    <a:p>
-                      <a:pPr algn="ctr"/>
-                      <a:r>
-                        <a:rPr sz="1100" b="0">
-                          <a:solidFill>
-                            <a:srgbClr val="333333"/>
-                          </a:solidFill>
-                          <a:latin typeface="Calibri"/>
-                        </a:rPr>
-                        <a:t>7,72</a:t>
-                      </a:r>
-                    </a:p>
-                  </a:txBody>
-                  <a:tcPr anchor="ctr">
-                    <a:solidFill>
-                      <a:srgbClr val="F7F7F7"/>
-                    </a:solidFill>
-                  </a:tcPr>
-                </a:tc>
-                <a:tc>
-                  <a:txBody>
-                    <a:bodyPr/>
-                    <a:lstStyle/>
-                    <a:p>
-                      <a:pPr algn="ctr"/>
-                      <a:r>
-                        <a:rPr sz="1100" b="0">
-                          <a:solidFill>
-                            <a:srgbClr val="333333"/>
-                          </a:solidFill>
-                          <a:latin typeface="Calibri"/>
-                        </a:rPr>
-                        <a:t>77,2%</a:t>
-                      </a:r>
-                    </a:p>
-                  </a:txBody>
-                  <a:tcPr anchor="ctr">
-                    <a:solidFill>
-                      <a:srgbClr val="F7F7F7"/>
-                    </a:solidFill>
-                  </a:tcPr>
-                </a:tc>
-                <a:tc>
-                  <a:txBody>
-                    <a:bodyPr/>
-                    <a:lstStyle/>
-                    <a:p>
-                      <a:pPr algn="ctr"/>
-                      <a:r>
-                        <a:rPr sz="1100" b="0">
-                          <a:solidFill>
-                            <a:srgbClr val="333333"/>
-                          </a:solidFill>
-                          <a:latin typeface="Calibri"/>
-                        </a:rPr>
-                        <a:t>24%</a:t>
-                      </a:r>
-                    </a:p>
-                  </a:txBody>
-                  <a:tcPr anchor="ctr">
-                    <a:solidFill>
-                      <a:srgbClr val="F7F7F7"/>
-                    </a:solidFill>
-                  </a:tcPr>
-                </a:tc>
-              </a:tr>
-              <a:tr h="428110">
-                <a:tc>
-                  <a:txBody>
-                    <a:bodyPr/>
-                    <a:lstStyle/>
-                    <a:p>
-                      <a:pPr algn="l"/>
-                      <a:r>
-                        <a:rPr sz="1100" b="0">
-                          <a:solidFill>
-                            <a:srgbClr val="333333"/>
-                          </a:solidFill>
-                          <a:latin typeface="Calibri"/>
-                        </a:rPr>
-                        <a:t>ИТОГО KPI</a:t>
-                      </a:r>
-                    </a:p>
-                  </a:txBody>
-                  <a:tcPr anchor="ctr">
-                    <a:solidFill>
-                      <a:srgbClr val="FFFFFF"/>
-                    </a:solidFill>
-                  </a:tcPr>
-                </a:tc>
-                <a:tc>
-                  <a:txBody>
-                    <a:bodyPr/>
-                    <a:lstStyle/>
-                    <a:p>
-                      <a:pPr algn="ctr"/>
-                      <a:r>
-                        <a:rPr sz="1100" b="0">
-                          <a:solidFill>
-                            <a:srgbClr val="333333"/>
-                          </a:solidFill>
-                          <a:latin typeface="Calibri"/>
-                        </a:rPr>
-                        <a:t>8,80</a:t>
-                      </a:r>
-                    </a:p>
-                  </a:txBody>
-                  <a:tcPr anchor="ctr">
-                    <a:solidFill>
-                      <a:srgbClr val="FFFFFF"/>
-                    </a:solidFill>
-                  </a:tcPr>
-                </a:tc>
-                <a:tc>
-                  <a:txBody>
-                    <a:bodyPr/>
-                    <a:lstStyle/>
-                    <a:p>
-                      <a:pPr algn="ctr"/>
-                      <a:r>
-                        <a:rPr sz="1100" b="0">
-                          <a:solidFill>
-                            <a:srgbClr val="333333"/>
-                          </a:solidFill>
-                          <a:latin typeface="Calibri"/>
-                        </a:rPr>
-                        <a:t>88,0%</a:t>
-                      </a:r>
-                    </a:p>
-                  </a:txBody>
-                  <a:tcPr anchor="ctr">
-                    <a:solidFill>
-                      <a:srgbClr val="FFFFFF"/>
-                    </a:solidFill>
-                  </a:tcPr>
-                </a:tc>
-                <a:tc>
-                  <a:txBody>
-                    <a:bodyPr/>
-                    <a:lstStyle/>
-                    <a:p>
-                      <a:pPr algn="ctr"/>
-                      <a:r>
-                        <a:rPr sz="1100" b="0">
-                          <a:solidFill>
-                            <a:srgbClr val="333333"/>
-                          </a:solidFill>
-                          <a:latin typeface="Calibri"/>
-                        </a:rPr>
-                        <a:t>50%</a:t>
-                      </a:r>
-                    </a:p>
-                  </a:txBody>
-                  <a:tcPr anchor="ctr">
-                    <a:solidFill>
-                      <a:srgbClr val="FFFFFF"/>
-                    </a:solidFill>
-                  </a:tcPr>
-                </a:tc>
-              </a:tr>
-            </a:tbl>
-          </a:graphicData>
-        </a:graphic>
-      </p:graphicFrame>
-      <p:sp>
-        <p:nvSpPr>
-          <p:cNvPr id="6" name="TextBox 5"/>
+        </p:nvSpPr>
+        <p:spPr>
+          <a:xfrm>
+            <a:off x="640080" y="1280160"/>
+            <a:ext cx="5212080" cy="1874519"/>
+          </a:xfrm>
+          <a:prstGeom prst="roundRect">
+            <a:avLst/>
+          </a:prstGeom>
+          <a:solidFill>
+            <a:srgbClr val="2F2F2F"/>
+          </a:solidFill>
+          <a:ln>
+            <a:noFill/>
+          </a:ln>
+        </p:spPr>
+        <p:style>
+          <a:lnRef idx="1">
+            <a:schemeClr val="accent1"/>
+          </a:lnRef>
+          <a:fillRef idx="3">
+            <a:schemeClr val="accent1"/>
+          </a:fillRef>
+          <a:effectRef idx="2">
+            <a:schemeClr val="accent1"/>
+          </a:effectRef>
+          <a:fontRef idx="minor">
+            <a:schemeClr val="lt1"/>
+          </a:fontRef>
+        </p:style>
+        <p:txBody>
+          <a:bodyPr rtlCol="0" anchor="ctr"/>
+          <a:lstStyle/>
+          <a:p>
+            <a:pPr algn="ctr"/>
+          </a:p>
+        </p:txBody>
+      </p:sp>
+      <p:sp>
+        <p:nvSpPr>
+          <p:cNvPr id="6" name="Rectangle 5"/>
+          <p:cNvSpPr/>
+          <p:nvPr/>
+        </p:nvSpPr>
+        <p:spPr>
+          <a:xfrm>
+            <a:off x="640080" y="1280160"/>
+            <a:ext cx="90000" cy="1874519"/>
+          </a:xfrm>
+          <a:prstGeom prst="rect">
+            <a:avLst/>
+          </a:prstGeom>
+          <a:solidFill>
+            <a:srgbClr val="F5C242"/>
+          </a:solidFill>
+          <a:ln>
+            <a:noFill/>
+          </a:ln>
+        </p:spPr>
+        <p:style>
+          <a:lnRef idx="1">
+            <a:schemeClr val="accent1"/>
+          </a:lnRef>
+          <a:fillRef idx="3">
+            <a:schemeClr val="accent1"/>
+          </a:fillRef>
+          <a:effectRef idx="2">
+            <a:schemeClr val="accent1"/>
+          </a:effectRef>
+          <a:fontRef idx="minor">
+            <a:schemeClr val="lt1"/>
+          </a:fontRef>
+        </p:style>
+        <p:txBody>
+          <a:bodyPr rtlCol="0" anchor="ctr"/>
+          <a:lstStyle/>
+          <a:p>
+            <a:pPr algn="ctr"/>
+          </a:p>
+        </p:txBody>
+      </p:sp>
+      <p:sp>
+        <p:nvSpPr>
+          <p:cNvPr id="7" name="TextBox 6"/>
           <p:cNvSpPr txBox="1"/>
           <p:nvPr/>
         </p:nvSpPr>
         <p:spPr>
           <a:xfrm>
-            <a:off x="8046720" y="1051560"/>
-            <a:ext cx="3703320" cy="4709160"/>
+            <a:off x="868680" y="1389888"/>
+            <a:ext cx="4846320" cy="320040"/>
           </a:xfrm>
           <a:prstGeom prst="rect">
             <a:avLst/>
@@ -6326,6 +5516,290 @@
           <a:noFill/>
         </p:spPr>
         <p:txBody>
+          <a:bodyPr wrap="square" anchor="t"/>
+          <a:lstStyle/>
+          <a:p>
+            <a:pPr algn="l"/>
+            <a:r>
+              <a:rPr sz="1300" b="1">
+                <a:solidFill>
+                  <a:srgbClr val="F5C242"/>
+                </a:solidFill>
+                <a:latin typeface="Calibri"/>
+              </a:rPr>
+              <a:t>Вовлечённость</a:t>
+            </a:r>
+          </a:p>
+        </p:txBody>
+      </p:sp>
+      <p:sp>
+        <p:nvSpPr>
+          <p:cNvPr id="8" name="TextBox 7"/>
+          <p:cNvSpPr txBox="1"/>
+          <p:nvPr/>
+        </p:nvSpPr>
+        <p:spPr>
+          <a:xfrm>
+            <a:off x="868680" y="1664208"/>
+            <a:ext cx="4846320" cy="640080"/>
+          </a:xfrm>
+          <a:prstGeom prst="rect">
+            <a:avLst/>
+          </a:prstGeom>
+          <a:noFill/>
+        </p:spPr>
+        <p:txBody>
+          <a:bodyPr wrap="square" anchor="t"/>
+          <a:lstStyle/>
+          <a:p>
+            <a:pPr algn="l"/>
+            <a:r>
+              <a:rPr sz="3600" b="1">
+                <a:solidFill>
+                  <a:srgbClr val="FFFFFF"/>
+                </a:solidFill>
+                <a:latin typeface="Calibri"/>
+              </a:rPr>
+              <a:t>74%</a:t>
+            </a:r>
+          </a:p>
+        </p:txBody>
+      </p:sp>
+      <p:sp>
+        <p:nvSpPr>
+          <p:cNvPr id="9" name="TextBox 8"/>
+          <p:cNvSpPr txBox="1"/>
+          <p:nvPr/>
+        </p:nvSpPr>
+        <p:spPr>
+          <a:xfrm>
+            <a:off x="868680" y="2331720"/>
+            <a:ext cx="4846320" cy="411480"/>
+          </a:xfrm>
+          <a:prstGeom prst="rect">
+            <a:avLst/>
+          </a:prstGeom>
+          <a:noFill/>
+        </p:spPr>
+        <p:txBody>
+          <a:bodyPr wrap="square" anchor="t"/>
+          <a:lstStyle/>
+          <a:p>
+            <a:pPr algn="l"/>
+            <a:r>
+              <a:rPr sz="1200" b="0">
+                <a:solidFill>
+                  <a:srgbClr val="DDDDDD"/>
+                </a:solidFill>
+                <a:latin typeface="Calibri"/>
+              </a:rPr>
+              <a:t>7,40 из 10  ·  оптовое направление</a:t>
+            </a:r>
+          </a:p>
+        </p:txBody>
+      </p:sp>
+      <p:sp>
+        <p:nvSpPr>
+          <p:cNvPr id="10" name="Rounded Rectangle 9"/>
+          <p:cNvSpPr/>
+          <p:nvPr/>
+        </p:nvSpPr>
+        <p:spPr>
+          <a:xfrm>
+            <a:off x="6309360" y="1280160"/>
+            <a:ext cx="5212080" cy="1874519"/>
+          </a:xfrm>
+          <a:prstGeom prst="roundRect">
+            <a:avLst/>
+          </a:prstGeom>
+          <a:solidFill>
+            <a:srgbClr val="2F2F2F"/>
+          </a:solidFill>
+          <a:ln>
+            <a:noFill/>
+          </a:ln>
+        </p:spPr>
+        <p:style>
+          <a:lnRef idx="1">
+            <a:schemeClr val="accent1"/>
+          </a:lnRef>
+          <a:fillRef idx="3">
+            <a:schemeClr val="accent1"/>
+          </a:fillRef>
+          <a:effectRef idx="2">
+            <a:schemeClr val="accent1"/>
+          </a:effectRef>
+          <a:fontRef idx="minor">
+            <a:schemeClr val="lt1"/>
+          </a:fontRef>
+        </p:style>
+        <p:txBody>
+          <a:bodyPr rtlCol="0" anchor="ctr"/>
+          <a:lstStyle/>
+          <a:p>
+            <a:pPr algn="ctr"/>
+          </a:p>
+        </p:txBody>
+      </p:sp>
+      <p:sp>
+        <p:nvSpPr>
+          <p:cNvPr id="11" name="Rectangle 10"/>
+          <p:cNvSpPr/>
+          <p:nvPr/>
+        </p:nvSpPr>
+        <p:spPr>
+          <a:xfrm>
+            <a:off x="6309360" y="1280160"/>
+            <a:ext cx="90000" cy="1874519"/>
+          </a:xfrm>
+          <a:prstGeom prst="rect">
+            <a:avLst/>
+          </a:prstGeom>
+          <a:solidFill>
+            <a:srgbClr val="D4A017"/>
+          </a:solidFill>
+          <a:ln>
+            <a:noFill/>
+          </a:ln>
+        </p:spPr>
+        <p:style>
+          <a:lnRef idx="1">
+            <a:schemeClr val="accent1"/>
+          </a:lnRef>
+          <a:fillRef idx="3">
+            <a:schemeClr val="accent1"/>
+          </a:fillRef>
+          <a:effectRef idx="2">
+            <a:schemeClr val="accent1"/>
+          </a:effectRef>
+          <a:fontRef idx="minor">
+            <a:schemeClr val="lt1"/>
+          </a:fontRef>
+        </p:style>
+        <p:txBody>
+          <a:bodyPr rtlCol="0" anchor="ctr"/>
+          <a:lstStyle/>
+          <a:p>
+            <a:pPr algn="ctr"/>
+          </a:p>
+        </p:txBody>
+      </p:sp>
+      <p:sp>
+        <p:nvSpPr>
+          <p:cNvPr id="12" name="TextBox 11"/>
+          <p:cNvSpPr txBox="1"/>
+          <p:nvPr/>
+        </p:nvSpPr>
+        <p:spPr>
+          <a:xfrm>
+            <a:off x="6537960" y="1389888"/>
+            <a:ext cx="4846320" cy="320040"/>
+          </a:xfrm>
+          <a:prstGeom prst="rect">
+            <a:avLst/>
+          </a:prstGeom>
+          <a:noFill/>
+        </p:spPr>
+        <p:txBody>
+          <a:bodyPr wrap="square" anchor="t"/>
+          <a:lstStyle/>
+          <a:p>
+            <a:pPr algn="l"/>
+            <a:r>
+              <a:rPr sz="1300" b="1">
+                <a:solidFill>
+                  <a:srgbClr val="F5C242"/>
+                </a:solidFill>
+                <a:latin typeface="Calibri"/>
+              </a:rPr>
+              <a:t>Явка</a:t>
+            </a:r>
+          </a:p>
+        </p:txBody>
+      </p:sp>
+      <p:sp>
+        <p:nvSpPr>
+          <p:cNvPr id="13" name="TextBox 12"/>
+          <p:cNvSpPr txBox="1"/>
+          <p:nvPr/>
+        </p:nvSpPr>
+        <p:spPr>
+          <a:xfrm>
+            <a:off x="6537960" y="1664208"/>
+            <a:ext cx="4846320" cy="640080"/>
+          </a:xfrm>
+          <a:prstGeom prst="rect">
+            <a:avLst/>
+          </a:prstGeom>
+          <a:noFill/>
+        </p:spPr>
+        <p:txBody>
+          <a:bodyPr wrap="square" anchor="t"/>
+          <a:lstStyle/>
+          <a:p>
+            <a:pPr algn="l"/>
+            <a:r>
+              <a:rPr sz="3600" b="1">
+                <a:solidFill>
+                  <a:srgbClr val="FFFFFF"/>
+                </a:solidFill>
+                <a:latin typeface="Calibri"/>
+              </a:rPr>
+              <a:t>102 из 372</a:t>
+            </a:r>
+          </a:p>
+        </p:txBody>
+      </p:sp>
+      <p:sp>
+        <p:nvSpPr>
+          <p:cNvPr id="14" name="TextBox 13"/>
+          <p:cNvSpPr txBox="1"/>
+          <p:nvPr/>
+        </p:nvSpPr>
+        <p:spPr>
+          <a:xfrm>
+            <a:off x="6537960" y="2331720"/>
+            <a:ext cx="4846320" cy="411480"/>
+          </a:xfrm>
+          <a:prstGeom prst="rect">
+            <a:avLst/>
+          </a:prstGeom>
+          <a:noFill/>
+        </p:spPr>
+        <p:txBody>
+          <a:bodyPr wrap="square" anchor="t"/>
+          <a:lstStyle/>
+          <a:p>
+            <a:pPr algn="l"/>
+            <a:r>
+              <a:rPr sz="1200" b="0">
+                <a:solidFill>
+                  <a:srgbClr val="DDDDDD"/>
+                </a:solidFill>
+                <a:latin typeface="Calibri"/>
+              </a:rPr>
+              <a:t>КС 67 из 205  ·  СиТЛ 35 из 167</a:t>
+            </a:r>
+          </a:p>
+        </p:txBody>
+      </p:sp>
+      <p:sp>
+        <p:nvSpPr>
+          <p:cNvPr id="15" name="TextBox 14"/>
+          <p:cNvSpPr txBox="1"/>
+          <p:nvPr/>
+        </p:nvSpPr>
+        <p:spPr>
+          <a:xfrm>
+            <a:off x="640080" y="3383280"/>
+            <a:ext cx="10972800" cy="2468880"/>
+          </a:xfrm>
+          <a:prstGeom prst="rect">
+            <a:avLst/>
+          </a:prstGeom>
+          <a:noFill/>
+        </p:spPr>
+        <p:txBody>
           <a:bodyPr wrap="square">
             <a:spAutoFit/>
           </a:bodyPr>
@@ -6337,13 +5811,13 @@
               </a:spcAft>
             </a:pPr>
             <a:r>
-              <a:rPr sz="1400" b="1">
+              <a:rPr sz="1600" b="0">
                 <a:solidFill>
                   <a:srgbClr val="333333"/>
                 </a:solidFill>
                 <a:latin typeface="Calibri"/>
               </a:rPr>
-              <a:t>Сильные стороны</a:t>
+              <a:t>• Показатель демонстрирует стабильность к уровню 2025 года (76,5%), цель роста на 10 п.п. не достигнута.</a:t>
             </a:r>
           </a:p>
           <a:p>
@@ -6353,13 +5827,13 @@
               </a:spcAft>
             </a:pPr>
             <a:r>
-              <a:rPr sz="1400" b="0">
+              <a:rPr sz="1600" b="0">
                 <a:solidFill>
                   <a:srgbClr val="333333"/>
                 </a:solidFill>
                 <a:latin typeface="Calibri"/>
               </a:rPr>
-              <a:t>• Легко обратиться к руководителю — 9,45</a:t>
+              <a:t>• В опросе участвовали 102 сотрудника: 32,7% КС и 21,0% СиТЛ.</a:t>
             </a:r>
           </a:p>
           <a:p>
@@ -6369,141 +5843,13 @@
               </a:spcAft>
             </a:pPr>
             <a:r>
-              <a:rPr sz="1400" b="0">
+              <a:rPr sz="1600" b="0">
                 <a:solidFill>
                   <a:srgbClr val="333333"/>
                 </a:solidFill>
                 <a:latin typeface="Calibri"/>
               </a:rPr>
-              <a:t>• Комфорт с руководителем — 9,37</a:t>
-            </a:r>
-          </a:p>
-          <a:p>
-            <a:pPr algn="l">
-              <a:spcAft>
-                <a:spcPts val="800"/>
-              </a:spcAft>
-            </a:pPr>
-            <a:r>
-              <a:rPr sz="1400" b="0">
-                <a:solidFill>
-                  <a:srgbClr val="333333"/>
-                </a:solidFill>
-                <a:latin typeface="Calibri"/>
-              </a:rPr>
-              <a:t>• Обратная связь — 9,24</a:t>
-            </a:r>
-          </a:p>
-          <a:p>
-            <a:pPr algn="l">
-              <a:spcAft>
-                <a:spcPts val="800"/>
-              </a:spcAft>
-            </a:pPr>
-            <a:r>
-              <a:rPr sz="1400" b="0">
-                <a:solidFill>
-                  <a:srgbClr val="333333"/>
-                </a:solidFill>
-                <a:latin typeface="Calibri"/>
-              </a:rPr>
-              <a:t>• Отношения в отделе — 9,18</a:t>
-            </a:r>
-          </a:p>
-          <a:p>
-            <a:pPr algn="l">
-              <a:spcAft>
-                <a:spcPts val="800"/>
-              </a:spcAft>
-            </a:pPr>
-            <a:r>
-              <a:rPr sz="1400" b="0">
-                <a:solidFill>
-                  <a:srgbClr val="333333"/>
-                </a:solidFill>
-                <a:latin typeface="Calibri"/>
-              </a:rPr>
-              <a:t/>
-            </a:r>
-          </a:p>
-          <a:p>
-            <a:pPr algn="l">
-              <a:spcAft>
-                <a:spcPts val="800"/>
-              </a:spcAft>
-            </a:pPr>
-            <a:r>
-              <a:rPr sz="1400" b="0">
-                <a:solidFill>
-                  <a:srgbClr val="333333"/>
-                </a:solidFill>
-                <a:latin typeface="Calibri"/>
-              </a:rPr>
-              <a:t>Зоны внимания</a:t>
-            </a:r>
-          </a:p>
-          <a:p>
-            <a:pPr algn="l">
-              <a:spcAft>
-                <a:spcPts val="800"/>
-              </a:spcAft>
-            </a:pPr>
-            <a:r>
-              <a:rPr sz="1400" b="0">
-                <a:solidFill>
-                  <a:srgbClr val="333333"/>
-                </a:solidFill>
-                <a:latin typeface="Calibri"/>
-              </a:rPr>
-              <a:t>• Вознаграждение — 7,72 (77%)</a:t>
-            </a:r>
-          </a:p>
-          <a:p>
-            <a:pPr algn="l">
-              <a:spcAft>
-                <a:spcPts val="800"/>
-              </a:spcAft>
-            </a:pPr>
-            <a:r>
-              <a:rPr sz="1400" b="0">
-                <a:solidFill>
-                  <a:srgbClr val="333333"/>
-                </a:solidFill>
-                <a:latin typeface="Calibri"/>
-              </a:rPr>
-              <a:t>• Коммуникации между отделами — 8,07</a:t>
-            </a:r>
-          </a:p>
-          <a:p>
-            <a:pPr algn="l">
-              <a:spcAft>
-                <a:spcPts val="800"/>
-              </a:spcAft>
-            </a:pPr>
-            <a:r>
-              <a:rPr sz="1400" b="0">
-                <a:solidFill>
-                  <a:srgbClr val="333333"/>
-                </a:solidFill>
-                <a:latin typeface="Calibri"/>
-              </a:rPr>
-              <a:t>• Карьерный рост «нет» — 43% (29 из 67)</a:t>
-            </a:r>
-          </a:p>
-          <a:p>
-            <a:pPr algn="l">
-              <a:spcAft>
-                <a:spcPts val="800"/>
-              </a:spcAft>
-            </a:pPr>
-            <a:r>
-              <a:rPr sz="1400" b="0">
-                <a:solidFill>
-                  <a:srgbClr val="333333"/>
-                </a:solidFill>
-                <a:latin typeface="Calibri"/>
-              </a:rPr>
-              <a:t>• Нет инструментов — 12% (8 из 67)</a:t>
+              <a:t>• Дальше — оценки по вопросам каждого направления: набор шкал у КС и СиТЛ разный.</a:t>
             </a:r>
           </a:p>
         </p:txBody>
@@ -6578,7 +5924,7 @@
                 </a:solidFill>
                 <a:latin typeface="Calibri"/>
               </a:rPr>
-              <a:t>СиТЛ — оценки условий</a:t>
+              <a:t>КС — оценки условий</a:t>
             </a:r>
           </a:p>
         </p:txBody>
@@ -6611,7 +5957,7 @@
                 </a:solidFill>
                 <a:latin typeface="Calibri"/>
               </a:rPr>
-              <a:t>10 шкал 0–10. Вопрос про зарплату учтён один раз (п. 8). Дублирующий п. 18 в KPI не входит.</a:t>
+              <a:t>Сотрудники КС оценивали 9 условий от 0 до 10. База: 67 из 205.</a:t>
             </a:r>
           </a:p>
         </p:txBody>
@@ -6625,8 +5971,8 @@
           <p:nvPr/>
         </p:nvGraphicFramePr>
         <p:xfrm>
-          <a:off x="411480" y="1024128"/>
-          <a:ext cx="7498080" cy="4754880"/>
+          <a:off x="411480" y="1051560"/>
+          <a:ext cx="7498080" cy="4709160"/>
         </p:xfrm>
         <a:graphic>
           <a:graphicData uri="http://schemas.openxmlformats.org/drawingml/2006/table">
@@ -6640,7 +5986,7 @@
                 <a:gridCol w="1143000"/>
                 <a:gridCol w="1188720"/>
               </a:tblGrid>
-              <a:tr h="396240">
+              <a:tr h="428105">
                 <a:tc>
                   <a:txBody>
                     <a:bodyPr/>
@@ -6648,7 +5994,7 @@
                     <a:p>
                       <a:pPr algn="l"/>
                       <a:r>
-                        <a:rPr sz="1000" b="1">
+                        <a:rPr sz="1100" b="1">
                           <a:solidFill>
                             <a:srgbClr val="FFFFFF"/>
                           </a:solidFill>
@@ -6671,7 +6017,7 @@
                     <a:p>
                       <a:pPr algn="ctr"/>
                       <a:r>
-                        <a:rPr sz="1000" b="1">
+                        <a:rPr sz="1100" b="1">
                           <a:solidFill>
                             <a:srgbClr val="FFFFFF"/>
                           </a:solidFill>
@@ -6694,7 +6040,7 @@
                     <a:p>
                       <a:pPr algn="ctr"/>
                       <a:r>
-                        <a:rPr sz="1000" b="1">
+                        <a:rPr sz="1100" b="1">
                           <a:solidFill>
                             <a:srgbClr val="FFFFFF"/>
                           </a:solidFill>
@@ -6717,7 +6063,7 @@
                     <a:p>
                       <a:pPr algn="ctr"/>
                       <a:r>
-                        <a:rPr sz="1000" b="1">
+                        <a:rPr sz="1100" b="1">
                           <a:solidFill>
                             <a:srgbClr val="FFFFFF"/>
                           </a:solidFill>
@@ -6734,7 +6080,7 @@
                   </a:tcPr>
                 </a:tc>
               </a:tr>
-              <a:tr h="396240">
+              <a:tr h="428105">
                 <a:tc>
                   <a:txBody>
                     <a:bodyPr/>
@@ -6742,7 +6088,7 @@
                     <a:p>
                       <a:pPr algn="l"/>
                       <a:r>
-                        <a:rPr sz="1000" b="0">
+                        <a:rPr sz="1100" b="0">
                           <a:solidFill>
                             <a:srgbClr val="333333"/>
                           </a:solidFill>
@@ -6765,7 +6111,853 @@
                     <a:p>
                       <a:pPr algn="ctr"/>
                       <a:r>
-                        <a:rPr sz="1000" b="0">
+                        <a:rPr sz="1100" b="0">
+                          <a:solidFill>
+                            <a:srgbClr val="333333"/>
+                          </a:solidFill>
+                          <a:latin typeface="Calibri"/>
+                        </a:rPr>
+                        <a:t>9,45</a:t>
+                      </a:r>
+                    </a:p>
+                  </a:txBody>
+                  <a:tcPr anchor="ctr">
+                    <a:solidFill>
+                      <a:srgbClr val="F7F7F7"/>
+                    </a:solidFill>
+                  </a:tcPr>
+                </a:tc>
+                <a:tc>
+                  <a:txBody>
+                    <a:bodyPr/>
+                    <a:lstStyle/>
+                    <a:p>
+                      <a:pPr algn="ctr"/>
+                      <a:r>
+                        <a:rPr sz="1100" b="0">
+                          <a:solidFill>
+                            <a:srgbClr val="333333"/>
+                          </a:solidFill>
+                          <a:latin typeface="Calibri"/>
+                        </a:rPr>
+                        <a:t>94,5%</a:t>
+                      </a:r>
+                    </a:p>
+                  </a:txBody>
+                  <a:tcPr anchor="ctr">
+                    <a:solidFill>
+                      <a:srgbClr val="F7F7F7"/>
+                    </a:solidFill>
+                  </a:tcPr>
+                </a:tc>
+                <a:tc>
+                  <a:txBody>
+                    <a:bodyPr/>
+                    <a:lstStyle/>
+                    <a:p>
+                      <a:pPr algn="ctr"/>
+                      <a:r>
+                        <a:rPr sz="1100" b="0">
+                          <a:solidFill>
+                            <a:srgbClr val="333333"/>
+                          </a:solidFill>
+                          <a:latin typeface="Calibri"/>
+                        </a:rPr>
+                        <a:t>75%</a:t>
+                      </a:r>
+                    </a:p>
+                  </a:txBody>
+                  <a:tcPr anchor="ctr">
+                    <a:solidFill>
+                      <a:srgbClr val="F7F7F7"/>
+                    </a:solidFill>
+                  </a:tcPr>
+                </a:tc>
+              </a:tr>
+              <a:tr h="428105">
+                <a:tc>
+                  <a:txBody>
+                    <a:bodyPr/>
+                    <a:lstStyle/>
+                    <a:p>
+                      <a:pPr algn="l"/>
+                      <a:r>
+                        <a:rPr sz="1100" b="0">
+                          <a:solidFill>
+                            <a:srgbClr val="333333"/>
+                          </a:solidFill>
+                          <a:latin typeface="Calibri"/>
+                        </a:rPr>
+                        <a:t>Комфорт работы с руководителем</a:t>
+                      </a:r>
+                    </a:p>
+                  </a:txBody>
+                  <a:tcPr anchor="ctr">
+                    <a:solidFill>
+                      <a:srgbClr val="FFFFFF"/>
+                    </a:solidFill>
+                  </a:tcPr>
+                </a:tc>
+                <a:tc>
+                  <a:txBody>
+                    <a:bodyPr/>
+                    <a:lstStyle/>
+                    <a:p>
+                      <a:pPr algn="ctr"/>
+                      <a:r>
+                        <a:rPr sz="1100" b="0">
+                          <a:solidFill>
+                            <a:srgbClr val="333333"/>
+                          </a:solidFill>
+                          <a:latin typeface="Calibri"/>
+                        </a:rPr>
+                        <a:t>9,37</a:t>
+                      </a:r>
+                    </a:p>
+                  </a:txBody>
+                  <a:tcPr anchor="ctr">
+                    <a:solidFill>
+                      <a:srgbClr val="FFFFFF"/>
+                    </a:solidFill>
+                  </a:tcPr>
+                </a:tc>
+                <a:tc>
+                  <a:txBody>
+                    <a:bodyPr/>
+                    <a:lstStyle/>
+                    <a:p>
+                      <a:pPr algn="ctr"/>
+                      <a:r>
+                        <a:rPr sz="1100" b="0">
+                          <a:solidFill>
+                            <a:srgbClr val="333333"/>
+                          </a:solidFill>
+                          <a:latin typeface="Calibri"/>
+                        </a:rPr>
+                        <a:t>93,7%</a:t>
+                      </a:r>
+                    </a:p>
+                  </a:txBody>
+                  <a:tcPr anchor="ctr">
+                    <a:solidFill>
+                      <a:srgbClr val="FFFFFF"/>
+                    </a:solidFill>
+                  </a:tcPr>
+                </a:tc>
+                <a:tc>
+                  <a:txBody>
+                    <a:bodyPr/>
+                    <a:lstStyle/>
+                    <a:p>
+                      <a:pPr algn="ctr"/>
+                      <a:r>
+                        <a:rPr sz="1100" b="0">
+                          <a:solidFill>
+                            <a:srgbClr val="333333"/>
+                          </a:solidFill>
+                          <a:latin typeface="Calibri"/>
+                        </a:rPr>
+                        <a:t>73%</a:t>
+                      </a:r>
+                    </a:p>
+                  </a:txBody>
+                  <a:tcPr anchor="ctr">
+                    <a:solidFill>
+                      <a:srgbClr val="FFFFFF"/>
+                    </a:solidFill>
+                  </a:tcPr>
+                </a:tc>
+              </a:tr>
+              <a:tr h="428105">
+                <a:tc>
+                  <a:txBody>
+                    <a:bodyPr/>
+                    <a:lstStyle/>
+                    <a:p>
+                      <a:pPr algn="l"/>
+                      <a:r>
+                        <a:rPr sz="1100" b="0">
+                          <a:solidFill>
+                            <a:srgbClr val="333333"/>
+                          </a:solidFill>
+                          <a:latin typeface="Calibri"/>
+                        </a:rPr>
+                        <a:t>Качество обратной связи руководителя</a:t>
+                      </a:r>
+                    </a:p>
+                  </a:txBody>
+                  <a:tcPr anchor="ctr">
+                    <a:solidFill>
+                      <a:srgbClr val="F7F7F7"/>
+                    </a:solidFill>
+                  </a:tcPr>
+                </a:tc>
+                <a:tc>
+                  <a:txBody>
+                    <a:bodyPr/>
+                    <a:lstStyle/>
+                    <a:p>
+                      <a:pPr algn="ctr"/>
+                      <a:r>
+                        <a:rPr sz="1100" b="0">
+                          <a:solidFill>
+                            <a:srgbClr val="333333"/>
+                          </a:solidFill>
+                          <a:latin typeface="Calibri"/>
+                        </a:rPr>
+                        <a:t>9,24</a:t>
+                      </a:r>
+                    </a:p>
+                  </a:txBody>
+                  <a:tcPr anchor="ctr">
+                    <a:solidFill>
+                      <a:srgbClr val="F7F7F7"/>
+                    </a:solidFill>
+                  </a:tcPr>
+                </a:tc>
+                <a:tc>
+                  <a:txBody>
+                    <a:bodyPr/>
+                    <a:lstStyle/>
+                    <a:p>
+                      <a:pPr algn="ctr"/>
+                      <a:r>
+                        <a:rPr sz="1100" b="0">
+                          <a:solidFill>
+                            <a:srgbClr val="333333"/>
+                          </a:solidFill>
+                          <a:latin typeface="Calibri"/>
+                        </a:rPr>
+                        <a:t>92,4%</a:t>
+                      </a:r>
+                    </a:p>
+                  </a:txBody>
+                  <a:tcPr anchor="ctr">
+                    <a:solidFill>
+                      <a:srgbClr val="F7F7F7"/>
+                    </a:solidFill>
+                  </a:tcPr>
+                </a:tc>
+                <a:tc>
+                  <a:txBody>
+                    <a:bodyPr/>
+                    <a:lstStyle/>
+                    <a:p>
+                      <a:pPr algn="ctr"/>
+                      <a:r>
+                        <a:rPr sz="1100" b="0">
+                          <a:solidFill>
+                            <a:srgbClr val="333333"/>
+                          </a:solidFill>
+                          <a:latin typeface="Calibri"/>
+                        </a:rPr>
+                        <a:t>57%</a:t>
+                      </a:r>
+                    </a:p>
+                  </a:txBody>
+                  <a:tcPr anchor="ctr">
+                    <a:solidFill>
+                      <a:srgbClr val="F7F7F7"/>
+                    </a:solidFill>
+                  </a:tcPr>
+                </a:tc>
+              </a:tr>
+              <a:tr h="428105">
+                <a:tc>
+                  <a:txBody>
+                    <a:bodyPr/>
+                    <a:lstStyle/>
+                    <a:p>
+                      <a:pPr algn="l"/>
+                      <a:r>
+                        <a:rPr sz="1100" b="0">
+                          <a:solidFill>
+                            <a:srgbClr val="333333"/>
+                          </a:solidFill>
+                          <a:latin typeface="Calibri"/>
+                        </a:rPr>
+                        <a:t>Взаимодействие внутри отдела</a:t>
+                      </a:r>
+                    </a:p>
+                  </a:txBody>
+                  <a:tcPr anchor="ctr">
+                    <a:solidFill>
+                      <a:srgbClr val="FFFFFF"/>
+                    </a:solidFill>
+                  </a:tcPr>
+                </a:tc>
+                <a:tc>
+                  <a:txBody>
+                    <a:bodyPr/>
+                    <a:lstStyle/>
+                    <a:p>
+                      <a:pPr algn="ctr"/>
+                      <a:r>
+                        <a:rPr sz="1100" b="0">
+                          <a:solidFill>
+                            <a:srgbClr val="333333"/>
+                          </a:solidFill>
+                          <a:latin typeface="Calibri"/>
+                        </a:rPr>
+                        <a:t>9,18</a:t>
+                      </a:r>
+                    </a:p>
+                  </a:txBody>
+                  <a:tcPr anchor="ctr">
+                    <a:solidFill>
+                      <a:srgbClr val="FFFFFF"/>
+                    </a:solidFill>
+                  </a:tcPr>
+                </a:tc>
+                <a:tc>
+                  <a:txBody>
+                    <a:bodyPr/>
+                    <a:lstStyle/>
+                    <a:p>
+                      <a:pPr algn="ctr"/>
+                      <a:r>
+                        <a:rPr sz="1100" b="0">
+                          <a:solidFill>
+                            <a:srgbClr val="333333"/>
+                          </a:solidFill>
+                          <a:latin typeface="Calibri"/>
+                        </a:rPr>
+                        <a:t>91,8%</a:t>
+                      </a:r>
+                    </a:p>
+                  </a:txBody>
+                  <a:tcPr anchor="ctr">
+                    <a:solidFill>
+                      <a:srgbClr val="FFFFFF"/>
+                    </a:solidFill>
+                  </a:tcPr>
+                </a:tc>
+                <a:tc>
+                  <a:txBody>
+                    <a:bodyPr/>
+                    <a:lstStyle/>
+                    <a:p>
+                      <a:pPr algn="ctr"/>
+                      <a:r>
+                        <a:rPr sz="1100" b="0">
+                          <a:solidFill>
+                            <a:srgbClr val="333333"/>
+                          </a:solidFill>
+                          <a:latin typeface="Calibri"/>
+                        </a:rPr>
+                        <a:t>61%</a:t>
+                      </a:r>
+                    </a:p>
+                  </a:txBody>
+                  <a:tcPr anchor="ctr">
+                    <a:solidFill>
+                      <a:srgbClr val="FFFFFF"/>
+                    </a:solidFill>
+                  </a:tcPr>
+                </a:tc>
+              </a:tr>
+              <a:tr h="428105">
+                <a:tc>
+                  <a:txBody>
+                    <a:bodyPr/>
+                    <a:lstStyle/>
+                    <a:p>
+                      <a:pPr algn="l"/>
+                      <a:r>
+                        <a:rPr sz="1100" b="0">
+                          <a:solidFill>
+                            <a:srgbClr val="333333"/>
+                          </a:solidFill>
+                          <a:latin typeface="Calibri"/>
+                        </a:rPr>
+                        <a:t>Уровень загрузки</a:t>
+                      </a:r>
+                    </a:p>
+                  </a:txBody>
+                  <a:tcPr anchor="ctr">
+                    <a:solidFill>
+                      <a:srgbClr val="F7F7F7"/>
+                    </a:solidFill>
+                  </a:tcPr>
+                </a:tc>
+                <a:tc>
+                  <a:txBody>
+                    <a:bodyPr/>
+                    <a:lstStyle/>
+                    <a:p>
+                      <a:pPr algn="ctr"/>
+                      <a:r>
+                        <a:rPr sz="1100" b="0">
+                          <a:solidFill>
+                            <a:srgbClr val="333333"/>
+                          </a:solidFill>
+                          <a:latin typeface="Calibri"/>
+                        </a:rPr>
+                        <a:t>9,10</a:t>
+                      </a:r>
+                    </a:p>
+                  </a:txBody>
+                  <a:tcPr anchor="ctr">
+                    <a:solidFill>
+                      <a:srgbClr val="F7F7F7"/>
+                    </a:solidFill>
+                  </a:tcPr>
+                </a:tc>
+                <a:tc>
+                  <a:txBody>
+                    <a:bodyPr/>
+                    <a:lstStyle/>
+                    <a:p>
+                      <a:pPr algn="ctr"/>
+                      <a:r>
+                        <a:rPr sz="1100" b="0">
+                          <a:solidFill>
+                            <a:srgbClr val="333333"/>
+                          </a:solidFill>
+                          <a:latin typeface="Calibri"/>
+                        </a:rPr>
+                        <a:t>91,0%</a:t>
+                      </a:r>
+                    </a:p>
+                  </a:txBody>
+                  <a:tcPr anchor="ctr">
+                    <a:solidFill>
+                      <a:srgbClr val="F7F7F7"/>
+                    </a:solidFill>
+                  </a:tcPr>
+                </a:tc>
+                <a:tc>
+                  <a:txBody>
+                    <a:bodyPr/>
+                    <a:lstStyle/>
+                    <a:p>
+                      <a:pPr algn="ctr"/>
+                      <a:r>
+                        <a:rPr sz="1100" b="0">
+                          <a:solidFill>
+                            <a:srgbClr val="333333"/>
+                          </a:solidFill>
+                          <a:latin typeface="Calibri"/>
+                        </a:rPr>
+                        <a:t>49%</a:t>
+                      </a:r>
+                    </a:p>
+                  </a:txBody>
+                  <a:tcPr anchor="ctr">
+                    <a:solidFill>
+                      <a:srgbClr val="F7F7F7"/>
+                    </a:solidFill>
+                  </a:tcPr>
+                </a:tc>
+              </a:tr>
+              <a:tr h="428105">
+                <a:tc>
+                  <a:txBody>
+                    <a:bodyPr/>
+                    <a:lstStyle/>
+                    <a:p>
+                      <a:pPr algn="l"/>
+                      <a:r>
+                        <a:rPr sz="1100" b="0">
+                          <a:solidFill>
+                            <a:srgbClr val="333333"/>
+                          </a:solidFill>
+                          <a:latin typeface="Calibri"/>
+                        </a:rPr>
+                        <a:t>Удовлетворённость задачами и проектами</a:t>
+                      </a:r>
+                    </a:p>
+                  </a:txBody>
+                  <a:tcPr anchor="ctr">
+                    <a:solidFill>
+                      <a:srgbClr val="FFFFFF"/>
+                    </a:solidFill>
+                  </a:tcPr>
+                </a:tc>
+                <a:tc>
+                  <a:txBody>
+                    <a:bodyPr/>
+                    <a:lstStyle/>
+                    <a:p>
+                      <a:pPr algn="ctr"/>
+                      <a:r>
+                        <a:rPr sz="1100" b="0">
+                          <a:solidFill>
+                            <a:srgbClr val="333333"/>
+                          </a:solidFill>
+                          <a:latin typeface="Calibri"/>
+                        </a:rPr>
+                        <a:t>8,54</a:t>
+                      </a:r>
+                    </a:p>
+                  </a:txBody>
+                  <a:tcPr anchor="ctr">
+                    <a:solidFill>
+                      <a:srgbClr val="FFFFFF"/>
+                    </a:solidFill>
+                  </a:tcPr>
+                </a:tc>
+                <a:tc>
+                  <a:txBody>
+                    <a:bodyPr/>
+                    <a:lstStyle/>
+                    <a:p>
+                      <a:pPr algn="ctr"/>
+                      <a:r>
+                        <a:rPr sz="1100" b="0">
+                          <a:solidFill>
+                            <a:srgbClr val="333333"/>
+                          </a:solidFill>
+                          <a:latin typeface="Calibri"/>
+                        </a:rPr>
+                        <a:t>85,4%</a:t>
+                      </a:r>
+                    </a:p>
+                  </a:txBody>
+                  <a:tcPr anchor="ctr">
+                    <a:solidFill>
+                      <a:srgbClr val="FFFFFF"/>
+                    </a:solidFill>
+                  </a:tcPr>
+                </a:tc>
+                <a:tc>
+                  <a:txBody>
+                    <a:bodyPr/>
+                    <a:lstStyle/>
+                    <a:p>
+                      <a:pPr algn="ctr"/>
+                      <a:r>
+                        <a:rPr sz="1100" b="0">
+                          <a:solidFill>
+                            <a:srgbClr val="333333"/>
+                          </a:solidFill>
+                          <a:latin typeface="Calibri"/>
+                        </a:rPr>
+                        <a:t>39%</a:t>
+                      </a:r>
+                    </a:p>
+                  </a:txBody>
+                  <a:tcPr anchor="ctr">
+                    <a:solidFill>
+                      <a:srgbClr val="FFFFFF"/>
+                    </a:solidFill>
+                  </a:tcPr>
+                </a:tc>
+              </a:tr>
+              <a:tr h="428105">
+                <a:tc>
+                  <a:txBody>
+                    <a:bodyPr/>
+                    <a:lstStyle/>
+                    <a:p>
+                      <a:pPr algn="l"/>
+                      <a:r>
+                        <a:rPr sz="1100" b="0">
+                          <a:solidFill>
+                            <a:srgbClr val="333333"/>
+                          </a:solidFill>
+                          <a:latin typeface="Calibri"/>
+                        </a:rPr>
+                        <a:t>Удовлетворённость работой</a:t>
+                      </a:r>
+                    </a:p>
+                  </a:txBody>
+                  <a:tcPr anchor="ctr">
+                    <a:solidFill>
+                      <a:srgbClr val="F7F7F7"/>
+                    </a:solidFill>
+                  </a:tcPr>
+                </a:tc>
+                <a:tc>
+                  <a:txBody>
+                    <a:bodyPr/>
+                    <a:lstStyle/>
+                    <a:p>
+                      <a:pPr algn="ctr"/>
+                      <a:r>
+                        <a:rPr sz="1100" b="0">
+                          <a:solidFill>
+                            <a:srgbClr val="333333"/>
+                          </a:solidFill>
+                          <a:latin typeface="Calibri"/>
+                        </a:rPr>
+                        <a:t>8,49</a:t>
+                      </a:r>
+                    </a:p>
+                  </a:txBody>
+                  <a:tcPr anchor="ctr">
+                    <a:solidFill>
+                      <a:srgbClr val="F7F7F7"/>
+                    </a:solidFill>
+                  </a:tcPr>
+                </a:tc>
+                <a:tc>
+                  <a:txBody>
+                    <a:bodyPr/>
+                    <a:lstStyle/>
+                    <a:p>
+                      <a:pPr algn="ctr"/>
+                      <a:r>
+                        <a:rPr sz="1100" b="0">
+                          <a:solidFill>
+                            <a:srgbClr val="333333"/>
+                          </a:solidFill>
+                          <a:latin typeface="Calibri"/>
+                        </a:rPr>
+                        <a:t>84,9%</a:t>
+                      </a:r>
+                    </a:p>
+                  </a:txBody>
+                  <a:tcPr anchor="ctr">
+                    <a:solidFill>
+                      <a:srgbClr val="F7F7F7"/>
+                    </a:solidFill>
+                  </a:tcPr>
+                </a:tc>
+                <a:tc>
+                  <a:txBody>
+                    <a:bodyPr/>
+                    <a:lstStyle/>
+                    <a:p>
+                      <a:pPr algn="ctr"/>
+                      <a:r>
+                        <a:rPr sz="1100" b="0">
+                          <a:solidFill>
+                            <a:srgbClr val="333333"/>
+                          </a:solidFill>
+                          <a:latin typeface="Calibri"/>
+                        </a:rPr>
+                        <a:t>39%</a:t>
+                      </a:r>
+                    </a:p>
+                  </a:txBody>
+                  <a:tcPr anchor="ctr">
+                    <a:solidFill>
+                      <a:srgbClr val="F7F7F7"/>
+                    </a:solidFill>
+                  </a:tcPr>
+                </a:tc>
+              </a:tr>
+              <a:tr h="428105">
+                <a:tc>
+                  <a:txBody>
+                    <a:bodyPr/>
+                    <a:lstStyle/>
+                    <a:p>
+                      <a:pPr algn="l"/>
+                      <a:r>
+                        <a:rPr sz="1100" b="0">
+                          <a:solidFill>
+                            <a:srgbClr val="333333"/>
+                          </a:solidFill>
+                          <a:latin typeface="Calibri"/>
+                        </a:rPr>
+                        <a:t>Коммуникации между смежными отделами</a:t>
+                      </a:r>
+                    </a:p>
+                  </a:txBody>
+                  <a:tcPr anchor="ctr">
+                    <a:solidFill>
+                      <a:srgbClr val="FFFFFF"/>
+                    </a:solidFill>
+                  </a:tcPr>
+                </a:tc>
+                <a:tc>
+                  <a:txBody>
+                    <a:bodyPr/>
+                    <a:lstStyle/>
+                    <a:p>
+                      <a:pPr algn="ctr"/>
+                      <a:r>
+                        <a:rPr sz="1100" b="0">
+                          <a:solidFill>
+                            <a:srgbClr val="333333"/>
+                          </a:solidFill>
+                          <a:latin typeface="Calibri"/>
+                        </a:rPr>
+                        <a:t>8,07</a:t>
+                      </a:r>
+                    </a:p>
+                  </a:txBody>
+                  <a:tcPr anchor="ctr">
+                    <a:solidFill>
+                      <a:srgbClr val="FFFFFF"/>
+                    </a:solidFill>
+                  </a:tcPr>
+                </a:tc>
+                <a:tc>
+                  <a:txBody>
+                    <a:bodyPr/>
+                    <a:lstStyle/>
+                    <a:p>
+                      <a:pPr algn="ctr"/>
+                      <a:r>
+                        <a:rPr sz="1100" b="0">
+                          <a:solidFill>
+                            <a:srgbClr val="333333"/>
+                          </a:solidFill>
+                          <a:latin typeface="Calibri"/>
+                        </a:rPr>
+                        <a:t>80,7%</a:t>
+                      </a:r>
+                    </a:p>
+                  </a:txBody>
+                  <a:tcPr anchor="ctr">
+                    <a:solidFill>
+                      <a:srgbClr val="FFFFFF"/>
+                    </a:solidFill>
+                  </a:tcPr>
+                </a:tc>
+                <a:tc>
+                  <a:txBody>
+                    <a:bodyPr/>
+                    <a:lstStyle/>
+                    <a:p>
+                      <a:pPr algn="ctr"/>
+                      <a:r>
+                        <a:rPr sz="1100" b="0">
+                          <a:solidFill>
+                            <a:srgbClr val="333333"/>
+                          </a:solidFill>
+                          <a:latin typeface="Calibri"/>
+                        </a:rPr>
+                        <a:t>33%</a:t>
+                      </a:r>
+                    </a:p>
+                  </a:txBody>
+                  <a:tcPr anchor="ctr">
+                    <a:solidFill>
+                      <a:srgbClr val="FFFFFF"/>
+                    </a:solidFill>
+                  </a:tcPr>
+                </a:tc>
+              </a:tr>
+              <a:tr h="428105">
+                <a:tc>
+                  <a:txBody>
+                    <a:bodyPr/>
+                    <a:lstStyle/>
+                    <a:p>
+                      <a:pPr algn="l"/>
+                      <a:r>
+                        <a:rPr sz="1100" b="0">
+                          <a:solidFill>
+                            <a:srgbClr val="333333"/>
+                          </a:solidFill>
+                          <a:latin typeface="Calibri"/>
+                        </a:rPr>
+                        <a:t>Вознаграждение и мотивация vs вклад</a:t>
+                      </a:r>
+                    </a:p>
+                  </a:txBody>
+                  <a:tcPr anchor="ctr">
+                    <a:solidFill>
+                      <a:srgbClr val="F7F7F7"/>
+                    </a:solidFill>
+                  </a:tcPr>
+                </a:tc>
+                <a:tc>
+                  <a:txBody>
+                    <a:bodyPr/>
+                    <a:lstStyle/>
+                    <a:p>
+                      <a:pPr algn="ctr"/>
+                      <a:r>
+                        <a:rPr sz="1100" b="0">
+                          <a:solidFill>
+                            <a:srgbClr val="333333"/>
+                          </a:solidFill>
+                          <a:latin typeface="Calibri"/>
+                        </a:rPr>
+                        <a:t>7,72</a:t>
+                      </a:r>
+                    </a:p>
+                  </a:txBody>
+                  <a:tcPr anchor="ctr">
+                    <a:solidFill>
+                      <a:srgbClr val="F7F7F7"/>
+                    </a:solidFill>
+                  </a:tcPr>
+                </a:tc>
+                <a:tc>
+                  <a:txBody>
+                    <a:bodyPr/>
+                    <a:lstStyle/>
+                    <a:p>
+                      <a:pPr algn="ctr"/>
+                      <a:r>
+                        <a:rPr sz="1100" b="0">
+                          <a:solidFill>
+                            <a:srgbClr val="333333"/>
+                          </a:solidFill>
+                          <a:latin typeface="Calibri"/>
+                        </a:rPr>
+                        <a:t>77,2%</a:t>
+                      </a:r>
+                    </a:p>
+                  </a:txBody>
+                  <a:tcPr anchor="ctr">
+                    <a:solidFill>
+                      <a:srgbClr val="F7F7F7"/>
+                    </a:solidFill>
+                  </a:tcPr>
+                </a:tc>
+                <a:tc>
+                  <a:txBody>
+                    <a:bodyPr/>
+                    <a:lstStyle/>
+                    <a:p>
+                      <a:pPr algn="ctr"/>
+                      <a:r>
+                        <a:rPr sz="1100" b="0">
+                          <a:solidFill>
+                            <a:srgbClr val="333333"/>
+                          </a:solidFill>
+                          <a:latin typeface="Calibri"/>
+                        </a:rPr>
+                        <a:t>24%</a:t>
+                      </a:r>
+                    </a:p>
+                  </a:txBody>
+                  <a:tcPr anchor="ctr">
+                    <a:solidFill>
+                      <a:srgbClr val="F7F7F7"/>
+                    </a:solidFill>
+                  </a:tcPr>
+                </a:tc>
+              </a:tr>
+              <a:tr h="428110">
+                <a:tc>
+                  <a:txBody>
+                    <a:bodyPr/>
+                    <a:lstStyle/>
+                    <a:p>
+                      <a:pPr algn="l"/>
+                      <a:r>
+                        <a:rPr sz="1100" b="0">
+                          <a:solidFill>
+                            <a:srgbClr val="333333"/>
+                          </a:solidFill>
+                          <a:latin typeface="Calibri"/>
+                        </a:rPr>
+                        <a:t>Среднее по шкалам</a:t>
+                      </a:r>
+                    </a:p>
+                  </a:txBody>
+                  <a:tcPr anchor="ctr">
+                    <a:solidFill>
+                      <a:srgbClr val="FFFFFF"/>
+                    </a:solidFill>
+                  </a:tcPr>
+                </a:tc>
+                <a:tc>
+                  <a:txBody>
+                    <a:bodyPr/>
+                    <a:lstStyle/>
+                    <a:p>
+                      <a:pPr algn="ctr"/>
+                      <a:r>
+                        <a:rPr sz="1100" b="0">
                           <a:solidFill>
                             <a:srgbClr val="333333"/>
                           </a:solidFill>
@@ -6777,18 +6969,18 @@
                   </a:txBody>
                   <a:tcPr anchor="ctr">
                     <a:solidFill>
-                      <a:srgbClr val="F7F7F7"/>
-                    </a:solidFill>
-                  </a:tcPr>
-                </a:tc>
-                <a:tc>
-                  <a:txBody>
-                    <a:bodyPr/>
-                    <a:lstStyle/>
-                    <a:p>
-                      <a:pPr algn="ctr"/>
-                      <a:r>
-                        <a:rPr sz="1000" b="0">
+                      <a:srgbClr val="FFFFFF"/>
+                    </a:solidFill>
+                  </a:tcPr>
+                </a:tc>
+                <a:tc>
+                  <a:txBody>
+                    <a:bodyPr/>
+                    <a:lstStyle/>
+                    <a:p>
+                      <a:pPr algn="ctr"/>
+                      <a:r>
+                        <a:rPr sz="1100" b="0">
                           <a:solidFill>
                             <a:srgbClr val="333333"/>
                           </a:solidFill>
@@ -6800,54 +6992,6 @@
                   </a:txBody>
                   <a:tcPr anchor="ctr">
                     <a:solidFill>
-                      <a:srgbClr val="F7F7F7"/>
-                    </a:solidFill>
-                  </a:tcPr>
-                </a:tc>
-                <a:tc>
-                  <a:txBody>
-                    <a:bodyPr/>
-                    <a:lstStyle/>
-                    <a:p>
-                      <a:pPr algn="ctr"/>
-                      <a:r>
-                        <a:rPr sz="1000" b="0">
-                          <a:solidFill>
-                            <a:srgbClr val="333333"/>
-                          </a:solidFill>
-                          <a:latin typeface="Calibri"/>
-                        </a:rPr>
-                        <a:t>66%</a:t>
-                      </a:r>
-                    </a:p>
-                  </a:txBody>
-                  <a:tcPr anchor="ctr">
-                    <a:solidFill>
-                      <a:srgbClr val="F7F7F7"/>
-                    </a:solidFill>
-                  </a:tcPr>
-                </a:tc>
-              </a:tr>
-              <a:tr h="396240">
-                <a:tc>
-                  <a:txBody>
-                    <a:bodyPr/>
-                    <a:lstStyle/>
-                    <a:p>
-                      <a:pPr algn="l"/>
-                      <a:r>
-                        <a:rPr sz="1000" b="0">
-                          <a:solidFill>
-                            <a:srgbClr val="333333"/>
-                          </a:solidFill>
-                          <a:latin typeface="Calibri"/>
-                        </a:rPr>
-                        <a:t>Комфорт работы с руководителем</a:t>
-                      </a:r>
-                    </a:p>
-                  </a:txBody>
-                  <a:tcPr anchor="ctr">
-                    <a:solidFill>
                       <a:srgbClr val="FFFFFF"/>
                     </a:solidFill>
                   </a:tcPr>
@@ -6859,911 +7003,19 @@
                     <a:p>
                       <a:pPr algn="ctr"/>
                       <a:r>
-                        <a:rPr sz="1000" b="0">
-                          <a:solidFill>
-                            <a:srgbClr val="333333"/>
-                          </a:solidFill>
-                          <a:latin typeface="Calibri"/>
-                        </a:rPr>
-                        <a:t>8,51</a:t>
+                        <a:rPr sz="1100" b="0">
+                          <a:solidFill>
+                            <a:srgbClr val="333333"/>
+                          </a:solidFill>
+                          <a:latin typeface="Calibri"/>
+                        </a:rPr>
+                        <a:t>50%</a:t>
                       </a:r>
                     </a:p>
                   </a:txBody>
                   <a:tcPr anchor="ctr">
                     <a:solidFill>
                       <a:srgbClr val="FFFFFF"/>
-                    </a:solidFill>
-                  </a:tcPr>
-                </a:tc>
-                <a:tc>
-                  <a:txBody>
-                    <a:bodyPr/>
-                    <a:lstStyle/>
-                    <a:p>
-                      <a:pPr algn="ctr"/>
-                      <a:r>
-                        <a:rPr sz="1000" b="0">
-                          <a:solidFill>
-                            <a:srgbClr val="333333"/>
-                          </a:solidFill>
-                          <a:latin typeface="Calibri"/>
-                        </a:rPr>
-                        <a:t>85,1%</a:t>
-                      </a:r>
-                    </a:p>
-                  </a:txBody>
-                  <a:tcPr anchor="ctr">
-                    <a:solidFill>
-                      <a:srgbClr val="FFFFFF"/>
-                    </a:solidFill>
-                  </a:tcPr>
-                </a:tc>
-                <a:tc>
-                  <a:txBody>
-                    <a:bodyPr/>
-                    <a:lstStyle/>
-                    <a:p>
-                      <a:pPr algn="ctr"/>
-                      <a:r>
-                        <a:rPr sz="1000" b="0">
-                          <a:solidFill>
-                            <a:srgbClr val="333333"/>
-                          </a:solidFill>
-                          <a:latin typeface="Calibri"/>
-                        </a:rPr>
-                        <a:t>60%</a:t>
-                      </a:r>
-                    </a:p>
-                  </a:txBody>
-                  <a:tcPr anchor="ctr">
-                    <a:solidFill>
-                      <a:srgbClr val="FFFFFF"/>
-                    </a:solidFill>
-                  </a:tcPr>
-                </a:tc>
-              </a:tr>
-              <a:tr h="396240">
-                <a:tc>
-                  <a:txBody>
-                    <a:bodyPr/>
-                    <a:lstStyle/>
-                    <a:p>
-                      <a:pPr algn="l"/>
-                      <a:r>
-                        <a:rPr sz="1000" b="0">
-                          <a:solidFill>
-                            <a:srgbClr val="333333"/>
-                          </a:solidFill>
-                          <a:latin typeface="Calibri"/>
-                        </a:rPr>
-                        <a:t>Уровень загрузки</a:t>
-                      </a:r>
-                    </a:p>
-                  </a:txBody>
-                  <a:tcPr anchor="ctr">
-                    <a:solidFill>
-                      <a:srgbClr val="F7F7F7"/>
-                    </a:solidFill>
-                  </a:tcPr>
-                </a:tc>
-                <a:tc>
-                  <a:txBody>
-                    <a:bodyPr/>
-                    <a:lstStyle/>
-                    <a:p>
-                      <a:pPr algn="ctr"/>
-                      <a:r>
-                        <a:rPr sz="1000" b="0">
-                          <a:solidFill>
-                            <a:srgbClr val="333333"/>
-                          </a:solidFill>
-                          <a:latin typeface="Calibri"/>
-                        </a:rPr>
-                        <a:t>8,46</a:t>
-                      </a:r>
-                    </a:p>
-                  </a:txBody>
-                  <a:tcPr anchor="ctr">
-                    <a:solidFill>
-                      <a:srgbClr val="F7F7F7"/>
-                    </a:solidFill>
-                  </a:tcPr>
-                </a:tc>
-                <a:tc>
-                  <a:txBody>
-                    <a:bodyPr/>
-                    <a:lstStyle/>
-                    <a:p>
-                      <a:pPr algn="ctr"/>
-                      <a:r>
-                        <a:rPr sz="1000" b="0">
-                          <a:solidFill>
-                            <a:srgbClr val="333333"/>
-                          </a:solidFill>
-                          <a:latin typeface="Calibri"/>
-                        </a:rPr>
-                        <a:t>84,6%</a:t>
-                      </a:r>
-                    </a:p>
-                  </a:txBody>
-                  <a:tcPr anchor="ctr">
-                    <a:solidFill>
-                      <a:srgbClr val="F7F7F7"/>
-                    </a:solidFill>
-                  </a:tcPr>
-                </a:tc>
-                <a:tc>
-                  <a:txBody>
-                    <a:bodyPr/>
-                    <a:lstStyle/>
-                    <a:p>
-                      <a:pPr algn="ctr"/>
-                      <a:r>
-                        <a:rPr sz="1000" b="0">
-                          <a:solidFill>
-                            <a:srgbClr val="333333"/>
-                          </a:solidFill>
-                          <a:latin typeface="Calibri"/>
-                        </a:rPr>
-                        <a:t>51%</a:t>
-                      </a:r>
-                    </a:p>
-                  </a:txBody>
-                  <a:tcPr anchor="ctr">
-                    <a:solidFill>
-                      <a:srgbClr val="F7F7F7"/>
-                    </a:solidFill>
-                  </a:tcPr>
-                </a:tc>
-              </a:tr>
-              <a:tr h="396240">
-                <a:tc>
-                  <a:txBody>
-                    <a:bodyPr/>
-                    <a:lstStyle/>
-                    <a:p>
-                      <a:pPr algn="l"/>
-                      <a:r>
-                        <a:rPr sz="1000" b="0">
-                          <a:solidFill>
-                            <a:srgbClr val="333333"/>
-                          </a:solidFill>
-                          <a:latin typeface="Calibri"/>
-                        </a:rPr>
-                        <a:t>Взаимодействие внутри отдела</a:t>
-                      </a:r>
-                    </a:p>
-                  </a:txBody>
-                  <a:tcPr anchor="ctr">
-                    <a:solidFill>
-                      <a:srgbClr val="FFFFFF"/>
-                    </a:solidFill>
-                  </a:tcPr>
-                </a:tc>
-                <a:tc>
-                  <a:txBody>
-                    <a:bodyPr/>
-                    <a:lstStyle/>
-                    <a:p>
-                      <a:pPr algn="ctr"/>
-                      <a:r>
-                        <a:rPr sz="1000" b="0">
-                          <a:solidFill>
-                            <a:srgbClr val="333333"/>
-                          </a:solidFill>
-                          <a:latin typeface="Calibri"/>
-                        </a:rPr>
-                        <a:t>8,20</a:t>
-                      </a:r>
-                    </a:p>
-                  </a:txBody>
-                  <a:tcPr anchor="ctr">
-                    <a:solidFill>
-                      <a:srgbClr val="FFFFFF"/>
-                    </a:solidFill>
-                  </a:tcPr>
-                </a:tc>
-                <a:tc>
-                  <a:txBody>
-                    <a:bodyPr/>
-                    <a:lstStyle/>
-                    <a:p>
-                      <a:pPr algn="ctr"/>
-                      <a:r>
-                        <a:rPr sz="1000" b="0">
-                          <a:solidFill>
-                            <a:srgbClr val="333333"/>
-                          </a:solidFill>
-                          <a:latin typeface="Calibri"/>
-                        </a:rPr>
-                        <a:t>82,0%</a:t>
-                      </a:r>
-                    </a:p>
-                  </a:txBody>
-                  <a:tcPr anchor="ctr">
-                    <a:solidFill>
-                      <a:srgbClr val="FFFFFF"/>
-                    </a:solidFill>
-                  </a:tcPr>
-                </a:tc>
-                <a:tc>
-                  <a:txBody>
-                    <a:bodyPr/>
-                    <a:lstStyle/>
-                    <a:p>
-                      <a:pPr algn="ctr"/>
-                      <a:r>
-                        <a:rPr sz="1000" b="0">
-                          <a:solidFill>
-                            <a:srgbClr val="333333"/>
-                          </a:solidFill>
-                          <a:latin typeface="Calibri"/>
-                        </a:rPr>
-                        <a:t>51%</a:t>
-                      </a:r>
-                    </a:p>
-                  </a:txBody>
-                  <a:tcPr anchor="ctr">
-                    <a:solidFill>
-                      <a:srgbClr val="FFFFFF"/>
-                    </a:solidFill>
-                  </a:tcPr>
-                </a:tc>
-              </a:tr>
-              <a:tr h="396240">
-                <a:tc>
-                  <a:txBody>
-                    <a:bodyPr/>
-                    <a:lstStyle/>
-                    <a:p>
-                      <a:pPr algn="l"/>
-                      <a:r>
-                        <a:rPr sz="1000" b="0">
-                          <a:solidFill>
-                            <a:srgbClr val="333333"/>
-                          </a:solidFill>
-                          <a:latin typeface="Calibri"/>
-                        </a:rPr>
-                        <a:t>Взаимодействие внутри филиала</a:t>
-                      </a:r>
-                    </a:p>
-                  </a:txBody>
-                  <a:tcPr anchor="ctr">
-                    <a:solidFill>
-                      <a:srgbClr val="F7F7F7"/>
-                    </a:solidFill>
-                  </a:tcPr>
-                </a:tc>
-                <a:tc>
-                  <a:txBody>
-                    <a:bodyPr/>
-                    <a:lstStyle/>
-                    <a:p>
-                      <a:pPr algn="ctr"/>
-                      <a:r>
-                        <a:rPr sz="1000" b="0">
-                          <a:solidFill>
-                            <a:srgbClr val="333333"/>
-                          </a:solidFill>
-                          <a:latin typeface="Calibri"/>
-                        </a:rPr>
-                        <a:t>7,89</a:t>
-                      </a:r>
-                    </a:p>
-                  </a:txBody>
-                  <a:tcPr anchor="ctr">
-                    <a:solidFill>
-                      <a:srgbClr val="F7F7F7"/>
-                    </a:solidFill>
-                  </a:tcPr>
-                </a:tc>
-                <a:tc>
-                  <a:txBody>
-                    <a:bodyPr/>
-                    <a:lstStyle/>
-                    <a:p>
-                      <a:pPr algn="ctr"/>
-                      <a:r>
-                        <a:rPr sz="1000" b="0">
-                          <a:solidFill>
-                            <a:srgbClr val="333333"/>
-                          </a:solidFill>
-                          <a:latin typeface="Calibri"/>
-                        </a:rPr>
-                        <a:t>78,9%</a:t>
-                      </a:r>
-                    </a:p>
-                  </a:txBody>
-                  <a:tcPr anchor="ctr">
-                    <a:solidFill>
-                      <a:srgbClr val="F7F7F7"/>
-                    </a:solidFill>
-                  </a:tcPr>
-                </a:tc>
-                <a:tc>
-                  <a:txBody>
-                    <a:bodyPr/>
-                    <a:lstStyle/>
-                    <a:p>
-                      <a:pPr algn="ctr"/>
-                      <a:r>
-                        <a:rPr sz="1000" b="0">
-                          <a:solidFill>
-                            <a:srgbClr val="333333"/>
-                          </a:solidFill>
-                          <a:latin typeface="Calibri"/>
-                        </a:rPr>
-                        <a:t>49%</a:t>
-                      </a:r>
-                    </a:p>
-                  </a:txBody>
-                  <a:tcPr anchor="ctr">
-                    <a:solidFill>
-                      <a:srgbClr val="F7F7F7"/>
-                    </a:solidFill>
-                  </a:tcPr>
-                </a:tc>
-              </a:tr>
-              <a:tr h="396240">
-                <a:tc>
-                  <a:txBody>
-                    <a:bodyPr/>
-                    <a:lstStyle/>
-                    <a:p>
-                      <a:pPr algn="l"/>
-                      <a:r>
-                        <a:rPr sz="1000" b="0">
-                          <a:solidFill>
-                            <a:srgbClr val="333333"/>
-                          </a:solidFill>
-                          <a:latin typeface="Calibri"/>
-                        </a:rPr>
-                        <a:t>Удовлетворённость работой</a:t>
-                      </a:r>
-                    </a:p>
-                  </a:txBody>
-                  <a:tcPr anchor="ctr">
-                    <a:solidFill>
-                      <a:srgbClr val="FFFFFF"/>
-                    </a:solidFill>
-                  </a:tcPr>
-                </a:tc>
-                <a:tc>
-                  <a:txBody>
-                    <a:bodyPr/>
-                    <a:lstStyle/>
-                    <a:p>
-                      <a:pPr algn="ctr"/>
-                      <a:r>
-                        <a:rPr sz="1000" b="0">
-                          <a:solidFill>
-                            <a:srgbClr val="333333"/>
-                          </a:solidFill>
-                          <a:latin typeface="Calibri"/>
-                        </a:rPr>
-                        <a:t>7,51</a:t>
-                      </a:r>
-                    </a:p>
-                  </a:txBody>
-                  <a:tcPr anchor="ctr">
-                    <a:solidFill>
-                      <a:srgbClr val="FFFFFF"/>
-                    </a:solidFill>
-                  </a:tcPr>
-                </a:tc>
-                <a:tc>
-                  <a:txBody>
-                    <a:bodyPr/>
-                    <a:lstStyle/>
-                    <a:p>
-                      <a:pPr algn="ctr"/>
-                      <a:r>
-                        <a:rPr sz="1000" b="0">
-                          <a:solidFill>
-                            <a:srgbClr val="333333"/>
-                          </a:solidFill>
-                          <a:latin typeface="Calibri"/>
-                        </a:rPr>
-                        <a:t>75,1%</a:t>
-                      </a:r>
-                    </a:p>
-                  </a:txBody>
-                  <a:tcPr anchor="ctr">
-                    <a:solidFill>
-                      <a:srgbClr val="FFFFFF"/>
-                    </a:solidFill>
-                  </a:tcPr>
-                </a:tc>
-                <a:tc>
-                  <a:txBody>
-                    <a:bodyPr/>
-                    <a:lstStyle/>
-                    <a:p>
-                      <a:pPr algn="ctr"/>
-                      <a:r>
-                        <a:rPr sz="1000" b="0">
-                          <a:solidFill>
-                            <a:srgbClr val="333333"/>
-                          </a:solidFill>
-                          <a:latin typeface="Calibri"/>
-                        </a:rPr>
-                        <a:t>26%</a:t>
-                      </a:r>
-                    </a:p>
-                  </a:txBody>
-                  <a:tcPr anchor="ctr">
-                    <a:solidFill>
-                      <a:srgbClr val="FFFFFF"/>
-                    </a:solidFill>
-                  </a:tcPr>
-                </a:tc>
-              </a:tr>
-              <a:tr h="396240">
-                <a:tc>
-                  <a:txBody>
-                    <a:bodyPr/>
-                    <a:lstStyle/>
-                    <a:p>
-                      <a:pPr algn="l"/>
-                      <a:r>
-                        <a:rPr sz="1000" b="0">
-                          <a:solidFill>
-                            <a:srgbClr val="333333"/>
-                          </a:solidFill>
-                          <a:latin typeface="Calibri"/>
-                        </a:rPr>
-                        <a:t>Удобство и безопасность рабочего места</a:t>
-                      </a:r>
-                    </a:p>
-                  </a:txBody>
-                  <a:tcPr anchor="ctr">
-                    <a:solidFill>
-                      <a:srgbClr val="F7F7F7"/>
-                    </a:solidFill>
-                  </a:tcPr>
-                </a:tc>
-                <a:tc>
-                  <a:txBody>
-                    <a:bodyPr/>
-                    <a:lstStyle/>
-                    <a:p>
-                      <a:pPr algn="ctr"/>
-                      <a:r>
-                        <a:rPr sz="1000" b="0">
-                          <a:solidFill>
-                            <a:srgbClr val="333333"/>
-                          </a:solidFill>
-                          <a:latin typeface="Calibri"/>
-                        </a:rPr>
-                        <a:t>7,49</a:t>
-                      </a:r>
-                    </a:p>
-                  </a:txBody>
-                  <a:tcPr anchor="ctr">
-                    <a:solidFill>
-                      <a:srgbClr val="F7F7F7"/>
-                    </a:solidFill>
-                  </a:tcPr>
-                </a:tc>
-                <a:tc>
-                  <a:txBody>
-                    <a:bodyPr/>
-                    <a:lstStyle/>
-                    <a:p>
-                      <a:pPr algn="ctr"/>
-                      <a:r>
-                        <a:rPr sz="1000" b="0">
-                          <a:solidFill>
-                            <a:srgbClr val="333333"/>
-                          </a:solidFill>
-                          <a:latin typeface="Calibri"/>
-                        </a:rPr>
-                        <a:t>74,9%</a:t>
-                      </a:r>
-                    </a:p>
-                  </a:txBody>
-                  <a:tcPr anchor="ctr">
-                    <a:solidFill>
-                      <a:srgbClr val="F7F7F7"/>
-                    </a:solidFill>
-                  </a:tcPr>
-                </a:tc>
-                <a:tc>
-                  <a:txBody>
-                    <a:bodyPr/>
-                    <a:lstStyle/>
-                    <a:p>
-                      <a:pPr algn="ctr"/>
-                      <a:r>
-                        <a:rPr sz="1000" b="0">
-                          <a:solidFill>
-                            <a:srgbClr val="333333"/>
-                          </a:solidFill>
-                          <a:latin typeface="Calibri"/>
-                        </a:rPr>
-                        <a:t>43%</a:t>
-                      </a:r>
-                    </a:p>
-                  </a:txBody>
-                  <a:tcPr anchor="ctr">
-                    <a:solidFill>
-                      <a:srgbClr val="F7F7F7"/>
-                    </a:solidFill>
-                  </a:tcPr>
-                </a:tc>
-              </a:tr>
-              <a:tr h="396240">
-                <a:tc>
-                  <a:txBody>
-                    <a:bodyPr/>
-                    <a:lstStyle/>
-                    <a:p>
-                      <a:pPr algn="l"/>
-                      <a:r>
-                        <a:rPr sz="1000" b="0">
-                          <a:solidFill>
-                            <a:srgbClr val="333333"/>
-                          </a:solidFill>
-                          <a:latin typeface="Calibri"/>
-                        </a:rPr>
-                        <a:t>Спецодежда и СИЗ</a:t>
-                      </a:r>
-                    </a:p>
-                  </a:txBody>
-                  <a:tcPr anchor="ctr">
-                    <a:solidFill>
-                      <a:srgbClr val="FFFFFF"/>
-                    </a:solidFill>
-                  </a:tcPr>
-                </a:tc>
-                <a:tc>
-                  <a:txBody>
-                    <a:bodyPr/>
-                    <a:lstStyle/>
-                    <a:p>
-                      <a:pPr algn="ctr"/>
-                      <a:r>
-                        <a:rPr sz="1000" b="0">
-                          <a:solidFill>
-                            <a:srgbClr val="333333"/>
-                          </a:solidFill>
-                          <a:latin typeface="Calibri"/>
-                        </a:rPr>
-                        <a:t>7,11</a:t>
-                      </a:r>
-                    </a:p>
-                  </a:txBody>
-                  <a:tcPr anchor="ctr">
-                    <a:solidFill>
-                      <a:srgbClr val="FFFFFF"/>
-                    </a:solidFill>
-                  </a:tcPr>
-                </a:tc>
-                <a:tc>
-                  <a:txBody>
-                    <a:bodyPr/>
-                    <a:lstStyle/>
-                    <a:p>
-                      <a:pPr algn="ctr"/>
-                      <a:r>
-                        <a:rPr sz="1000" b="0">
-                          <a:solidFill>
-                            <a:srgbClr val="333333"/>
-                          </a:solidFill>
-                          <a:latin typeface="Calibri"/>
-                        </a:rPr>
-                        <a:t>71,1%</a:t>
-                      </a:r>
-                    </a:p>
-                  </a:txBody>
-                  <a:tcPr anchor="ctr">
-                    <a:solidFill>
-                      <a:srgbClr val="FFFFFF"/>
-                    </a:solidFill>
-                  </a:tcPr>
-                </a:tc>
-                <a:tc>
-                  <a:txBody>
-                    <a:bodyPr/>
-                    <a:lstStyle/>
-                    <a:p>
-                      <a:pPr algn="ctr"/>
-                      <a:r>
-                        <a:rPr sz="1000" b="0">
-                          <a:solidFill>
-                            <a:srgbClr val="333333"/>
-                          </a:solidFill>
-                          <a:latin typeface="Calibri"/>
-                        </a:rPr>
-                        <a:t>40%</a:t>
-                      </a:r>
-                    </a:p>
-                  </a:txBody>
-                  <a:tcPr anchor="ctr">
-                    <a:solidFill>
-                      <a:srgbClr val="FFFFFF"/>
-                    </a:solidFill>
-                  </a:tcPr>
-                </a:tc>
-              </a:tr>
-              <a:tr h="396240">
-                <a:tc>
-                  <a:txBody>
-                    <a:bodyPr/>
-                    <a:lstStyle/>
-                    <a:p>
-                      <a:pPr algn="l"/>
-                      <a:r>
-                        <a:rPr sz="1000" b="0">
-                          <a:solidFill>
-                            <a:srgbClr val="333333"/>
-                          </a:solidFill>
-                          <a:latin typeface="Calibri"/>
-                        </a:rPr>
-                        <a:t>Вознаграждение и мотивация vs вклад</a:t>
-                      </a:r>
-                    </a:p>
-                  </a:txBody>
-                  <a:tcPr anchor="ctr">
-                    <a:solidFill>
-                      <a:srgbClr val="F7F7F7"/>
-                    </a:solidFill>
-                  </a:tcPr>
-                </a:tc>
-                <a:tc>
-                  <a:txBody>
-                    <a:bodyPr/>
-                    <a:lstStyle/>
-                    <a:p>
-                      <a:pPr algn="ctr"/>
-                      <a:r>
-                        <a:rPr sz="1000" b="0">
-                          <a:solidFill>
-                            <a:srgbClr val="333333"/>
-                          </a:solidFill>
-                          <a:latin typeface="Calibri"/>
-                        </a:rPr>
-                        <a:t>6,69</a:t>
-                      </a:r>
-                    </a:p>
-                  </a:txBody>
-                  <a:tcPr anchor="ctr">
-                    <a:solidFill>
-                      <a:srgbClr val="F7F7F7"/>
-                    </a:solidFill>
-                  </a:tcPr>
-                </a:tc>
-                <a:tc>
-                  <a:txBody>
-                    <a:bodyPr/>
-                    <a:lstStyle/>
-                    <a:p>
-                      <a:pPr algn="ctr"/>
-                      <a:r>
-                        <a:rPr sz="1000" b="0">
-                          <a:solidFill>
-                            <a:srgbClr val="333333"/>
-                          </a:solidFill>
-                          <a:latin typeface="Calibri"/>
-                        </a:rPr>
-                        <a:t>66,9%</a:t>
-                      </a:r>
-                    </a:p>
-                  </a:txBody>
-                  <a:tcPr anchor="ctr">
-                    <a:solidFill>
-                      <a:srgbClr val="F7F7F7"/>
-                    </a:solidFill>
-                  </a:tcPr>
-                </a:tc>
-                <a:tc>
-                  <a:txBody>
-                    <a:bodyPr/>
-                    <a:lstStyle/>
-                    <a:p>
-                      <a:pPr algn="ctr"/>
-                      <a:r>
-                        <a:rPr sz="1000" b="0">
-                          <a:solidFill>
-                            <a:srgbClr val="333333"/>
-                          </a:solidFill>
-                          <a:latin typeface="Calibri"/>
-                        </a:rPr>
-                        <a:t>23%</a:t>
-                      </a:r>
-                    </a:p>
-                  </a:txBody>
-                  <a:tcPr anchor="ctr">
-                    <a:solidFill>
-                      <a:srgbClr val="F7F7F7"/>
-                    </a:solidFill>
-                  </a:tcPr>
-                </a:tc>
-              </a:tr>
-              <a:tr h="396240">
-                <a:tc>
-                  <a:txBody>
-                    <a:bodyPr/>
-                    <a:lstStyle/>
-                    <a:p>
-                      <a:pPr algn="l"/>
-                      <a:r>
-                        <a:rPr sz="1000" b="0">
-                          <a:solidFill>
-                            <a:srgbClr val="333333"/>
-                          </a:solidFill>
-                          <a:latin typeface="Calibri"/>
-                        </a:rPr>
-                        <a:t>Состояние склада / автомобилей</a:t>
-                      </a:r>
-                    </a:p>
-                  </a:txBody>
-                  <a:tcPr anchor="ctr">
-                    <a:solidFill>
-                      <a:srgbClr val="FFFFFF"/>
-                    </a:solidFill>
-                  </a:tcPr>
-                </a:tc>
-                <a:tc>
-                  <a:txBody>
-                    <a:bodyPr/>
-                    <a:lstStyle/>
-                    <a:p>
-                      <a:pPr algn="ctr"/>
-                      <a:r>
-                        <a:rPr sz="1000" b="0">
-                          <a:solidFill>
-                            <a:srgbClr val="333333"/>
-                          </a:solidFill>
-                          <a:latin typeface="Calibri"/>
-                        </a:rPr>
-                        <a:t>6,43</a:t>
-                      </a:r>
-                    </a:p>
-                  </a:txBody>
-                  <a:tcPr anchor="ctr">
-                    <a:solidFill>
-                      <a:srgbClr val="FFFFFF"/>
-                    </a:solidFill>
-                  </a:tcPr>
-                </a:tc>
-                <a:tc>
-                  <a:txBody>
-                    <a:bodyPr/>
-                    <a:lstStyle/>
-                    <a:p>
-                      <a:pPr algn="ctr"/>
-                      <a:r>
-                        <a:rPr sz="1000" b="0">
-                          <a:solidFill>
-                            <a:srgbClr val="333333"/>
-                          </a:solidFill>
-                          <a:latin typeface="Calibri"/>
-                        </a:rPr>
-                        <a:t>64,3%</a:t>
-                      </a:r>
-                    </a:p>
-                  </a:txBody>
-                  <a:tcPr anchor="ctr">
-                    <a:solidFill>
-                      <a:srgbClr val="FFFFFF"/>
-                    </a:solidFill>
-                  </a:tcPr>
-                </a:tc>
-                <a:tc>
-                  <a:txBody>
-                    <a:bodyPr/>
-                    <a:lstStyle/>
-                    <a:p>
-                      <a:pPr algn="ctr"/>
-                      <a:r>
-                        <a:rPr sz="1000" b="0">
-                          <a:solidFill>
-                            <a:srgbClr val="333333"/>
-                          </a:solidFill>
-                          <a:latin typeface="Calibri"/>
-                        </a:rPr>
-                        <a:t>20%</a:t>
-                      </a:r>
-                    </a:p>
-                  </a:txBody>
-                  <a:tcPr anchor="ctr">
-                    <a:solidFill>
-                      <a:srgbClr val="FFFFFF"/>
-                    </a:solidFill>
-                  </a:tcPr>
-                </a:tc>
-              </a:tr>
-              <a:tr h="396240">
-                <a:tc>
-                  <a:txBody>
-                    <a:bodyPr/>
-                    <a:lstStyle/>
-                    <a:p>
-                      <a:pPr algn="l"/>
-                      <a:r>
-                        <a:rPr sz="1000" b="0">
-                          <a:solidFill>
-                            <a:srgbClr val="333333"/>
-                          </a:solidFill>
-                          <a:latin typeface="Calibri"/>
-                        </a:rPr>
-                        <a:t>ИТОГО KPI</a:t>
-                      </a:r>
-                    </a:p>
-                  </a:txBody>
-                  <a:tcPr anchor="ctr">
-                    <a:solidFill>
-                      <a:srgbClr val="F7F7F7"/>
-                    </a:solidFill>
-                  </a:tcPr>
-                </a:tc>
-                <a:tc>
-                  <a:txBody>
-                    <a:bodyPr/>
-                    <a:lstStyle/>
-                    <a:p>
-                      <a:pPr algn="ctr"/>
-                      <a:r>
-                        <a:rPr sz="1000" b="0">
-                          <a:solidFill>
-                            <a:srgbClr val="333333"/>
-                          </a:solidFill>
-                          <a:latin typeface="Calibri"/>
-                        </a:rPr>
-                        <a:t>7,71</a:t>
-                      </a:r>
-                    </a:p>
-                  </a:txBody>
-                  <a:tcPr anchor="ctr">
-                    <a:solidFill>
-                      <a:srgbClr val="F7F7F7"/>
-                    </a:solidFill>
-                  </a:tcPr>
-                </a:tc>
-                <a:tc>
-                  <a:txBody>
-                    <a:bodyPr/>
-                    <a:lstStyle/>
-                    <a:p>
-                      <a:pPr algn="ctr"/>
-                      <a:r>
-                        <a:rPr sz="1000" b="0">
-                          <a:solidFill>
-                            <a:srgbClr val="333333"/>
-                          </a:solidFill>
-                          <a:latin typeface="Calibri"/>
-                        </a:rPr>
-                        <a:t>77,1%</a:t>
-                      </a:r>
-                    </a:p>
-                  </a:txBody>
-                  <a:tcPr anchor="ctr">
-                    <a:solidFill>
-                      <a:srgbClr val="F7F7F7"/>
-                    </a:solidFill>
-                  </a:tcPr>
-                </a:tc>
-                <a:tc>
-                  <a:txBody>
-                    <a:bodyPr/>
-                    <a:lstStyle/>
-                    <a:p>
-                      <a:pPr algn="ctr"/>
-                      <a:r>
-                        <a:rPr sz="1000" b="0">
-                          <a:solidFill>
-                            <a:srgbClr val="333333"/>
-                          </a:solidFill>
-                          <a:latin typeface="Calibri"/>
-                        </a:rPr>
-                        <a:t>43%</a:t>
-                      </a:r>
-                    </a:p>
-                  </a:txBody>
-                  <a:tcPr anchor="ctr">
-                    <a:solidFill>
-                      <a:srgbClr val="F7F7F7"/>
                     </a:solidFill>
                   </a:tcPr>
                 </a:tc>
@@ -7780,8 +7032,8 @@
         </p:nvSpPr>
         <p:spPr>
           <a:xfrm>
-            <a:off x="8046720" y="1024128"/>
-            <a:ext cx="3703320" cy="4754880"/>
+            <a:off x="8046720" y="1051560"/>
+            <a:ext cx="3703320" cy="4709160"/>
           </a:xfrm>
           <a:prstGeom prst="rect">
             <a:avLst/>
@@ -7822,7 +7074,7 @@
                 </a:solidFill>
                 <a:latin typeface="Calibri"/>
               </a:rPr>
-              <a:t>• Легко обратиться к руководителю — 8,80</a:t>
+              <a:t>• Легко обратиться к руководителю — 9,45</a:t>
             </a:r>
           </a:p>
           <a:p>
@@ -7838,7 +7090,7 @@
                 </a:solidFill>
                 <a:latin typeface="Calibri"/>
               </a:rPr>
-              <a:t>• Комфорт с руководителем — 8,51</a:t>
+              <a:t>• Комфорт с руководителем — 9,37</a:t>
             </a:r>
           </a:p>
           <a:p>
@@ -7854,7 +7106,7 @@
                 </a:solidFill>
                 <a:latin typeface="Calibri"/>
               </a:rPr>
-              <a:t>• Загрузка — 8,46</a:t>
+              <a:t>• Обратная связь — 9,24</a:t>
             </a:r>
           </a:p>
           <a:p>
@@ -7870,7 +7122,7 @@
                 </a:solidFill>
                 <a:latin typeface="Calibri"/>
               </a:rPr>
-              <a:t>• Отношения в отделе — 8,20</a:t>
+              <a:t>• Отношения в отделе — 9,18</a:t>
             </a:r>
           </a:p>
           <a:p>
@@ -7918,7 +7170,7 @@
                 </a:solidFill>
                 <a:latin typeface="Calibri"/>
               </a:rPr>
-              <a:t>• Склад / автомобили — 6,43</a:t>
+              <a:t>• Вознаграждение — 7,72</a:t>
             </a:r>
           </a:p>
           <a:p>
@@ -7934,7 +7186,7 @@
                 </a:solidFill>
                 <a:latin typeface="Calibri"/>
               </a:rPr>
-              <a:t>• Вознаграждение — 6,69</a:t>
+              <a:t>• Коммуникации между отделами — 8,07</a:t>
             </a:r>
           </a:p>
           <a:p>
@@ -7950,7 +7202,7 @@
                 </a:solidFill>
                 <a:latin typeface="Calibri"/>
               </a:rPr>
-              <a:t>• СИЗ и спецодежда — 7,11</a:t>
+              <a:t>• Карьерный рост «нет» — 43% (29 из 67)</a:t>
             </a:r>
           </a:p>
           <a:p>
@@ -7966,23 +7218,7 @@
                 </a:solidFill>
                 <a:latin typeface="Calibri"/>
               </a:rPr>
-              <a:t>• Рабочее место — 7,49</a:t>
-            </a:r>
-          </a:p>
-          <a:p>
-            <a:pPr algn="l">
-              <a:spcAft>
-                <a:spcPts val="800"/>
-              </a:spcAft>
-            </a:pPr>
-            <a:r>
-              <a:rPr sz="1400" b="0">
-                <a:solidFill>
-                  <a:srgbClr val="333333"/>
-                </a:solidFill>
-                <a:latin typeface="Calibri"/>
-              </a:rPr>
-              <a:t>• Идеи не учитывают — 29% (10 из 35)</a:t>
+              <a:t>• Нет инструментов — 12% (8 из 67)</a:t>
             </a:r>
           </a:p>
         </p:txBody>
@@ -8057,7 +7293,7 @@
                 </a:solidFill>
                 <a:latin typeface="Calibri"/>
               </a:rPr>
-              <a:t>Общий вывод</a:t>
+              <a:t>СиТЛ — оценки условий</a:t>
             </a:r>
           </a:p>
         </p:txBody>
@@ -8070,8 +7306,8 @@
         </p:nvSpPr>
         <p:spPr>
           <a:xfrm>
-            <a:off x="548640" y="868680"/>
-            <a:ext cx="11064240" cy="4937760"/>
+            <a:off x="1691640" y="658368"/>
+            <a:ext cx="9875520" cy="347472"/>
           </a:xfrm>
           <a:prstGeom prst="rect">
             <a:avLst/>
@@ -8079,6 +7315,1195 @@
           <a:noFill/>
         </p:spPr>
         <p:txBody>
+          <a:bodyPr wrap="square" anchor="t"/>
+          <a:lstStyle/>
+          <a:p>
+            <a:pPr algn="l"/>
+            <a:r>
+              <a:rPr sz="1300" b="0">
+                <a:solidFill>
+                  <a:srgbClr val="666666"/>
+                </a:solidFill>
+                <a:latin typeface="Calibri"/>
+              </a:rPr>
+              <a:t>Сотрудники СиТЛ оценивали 10 условий от 0 до 10. База: 35 из 167. Вознаграждение — п. 8.</a:t>
+            </a:r>
+          </a:p>
+        </p:txBody>
+      </p:sp>
+      <p:graphicFrame>
+        <p:nvGraphicFramePr>
+          <p:cNvPr id="5" name="Table 4"/>
+          <p:cNvGraphicFramePr>
+            <a:graphicFrameLocks noGrp="1"/>
+          </p:cNvGraphicFramePr>
+          <p:nvPr/>
+        </p:nvGraphicFramePr>
+        <p:xfrm>
+          <a:off x="411480" y="1024128"/>
+          <a:ext cx="7498080" cy="4754880"/>
+        </p:xfrm>
+        <a:graphic>
+          <a:graphicData uri="http://schemas.openxmlformats.org/drawingml/2006/table">
+            <a:tbl>
+              <a:tblPr firstRow="1" bandRow="1">
+                <a:tableStyleId>{5C22544A-7EE6-4342-B048-85BDC9FD1C3A}</a:tableStyleId>
+              </a:tblPr>
+              <a:tblGrid>
+                <a:gridCol w="4023360"/>
+                <a:gridCol w="1143000"/>
+                <a:gridCol w="1143000"/>
+                <a:gridCol w="1188720"/>
+              </a:tblGrid>
+              <a:tr h="396240">
+                <a:tc>
+                  <a:txBody>
+                    <a:bodyPr/>
+                    <a:lstStyle/>
+                    <a:p>
+                      <a:pPr algn="l"/>
+                      <a:r>
+                        <a:rPr sz="1000" b="1">
+                          <a:solidFill>
+                            <a:srgbClr val="FFFFFF"/>
+                          </a:solidFill>
+                          <a:latin typeface="Calibri"/>
+                        </a:rPr>
+                        <a:t>Условие</a:t>
+                      </a:r>
+                    </a:p>
+                  </a:txBody>
+                  <a:tcPr anchor="ctr">
+                    <a:solidFill>
+                      <a:srgbClr val="2F2F2F"/>
+                    </a:solidFill>
+                  </a:tcPr>
+                </a:tc>
+                <a:tc>
+                  <a:txBody>
+                    <a:bodyPr/>
+                    <a:lstStyle/>
+                    <a:p>
+                      <a:pPr algn="ctr"/>
+                      <a:r>
+                        <a:rPr sz="1000" b="1">
+                          <a:solidFill>
+                            <a:srgbClr val="FFFFFF"/>
+                          </a:solidFill>
+                          <a:latin typeface="Calibri"/>
+                        </a:rPr>
+                        <a:t>Среднее</a:t>
+                      </a:r>
+                    </a:p>
+                  </a:txBody>
+                  <a:tcPr anchor="ctr">
+                    <a:solidFill>
+                      <a:srgbClr val="2F2F2F"/>
+                    </a:solidFill>
+                  </a:tcPr>
+                </a:tc>
+                <a:tc>
+                  <a:txBody>
+                    <a:bodyPr/>
+                    <a:lstStyle/>
+                    <a:p>
+                      <a:pPr algn="ctr"/>
+                      <a:r>
+                        <a:rPr sz="1000" b="1">
+                          <a:solidFill>
+                            <a:srgbClr val="FFFFFF"/>
+                          </a:solidFill>
+                          <a:latin typeface="Calibri"/>
+                        </a:rPr>
+                        <a:t>% от 10</a:t>
+                      </a:r>
+                    </a:p>
+                  </a:txBody>
+                  <a:tcPr anchor="ctr">
+                    <a:solidFill>
+                      <a:srgbClr val="2F2F2F"/>
+                    </a:solidFill>
+                  </a:tcPr>
+                </a:tc>
+                <a:tc>
+                  <a:txBody>
+                    <a:bodyPr/>
+                    <a:lstStyle/>
+                    <a:p>
+                      <a:pPr algn="ctr"/>
+                      <a:r>
+                        <a:rPr sz="1000" b="1">
+                          <a:solidFill>
+                            <a:srgbClr val="FFFFFF"/>
+                          </a:solidFill>
+                          <a:latin typeface="Calibri"/>
+                        </a:rPr>
+                        <a:t>Доля «10»</a:t>
+                      </a:r>
+                    </a:p>
+                  </a:txBody>
+                  <a:tcPr anchor="ctr">
+                    <a:solidFill>
+                      <a:srgbClr val="2F2F2F"/>
+                    </a:solidFill>
+                  </a:tcPr>
+                </a:tc>
+              </a:tr>
+              <a:tr h="396240">
+                <a:tc>
+                  <a:txBody>
+                    <a:bodyPr/>
+                    <a:lstStyle/>
+                    <a:p>
+                      <a:pPr algn="l"/>
+                      <a:r>
+                        <a:rPr sz="1000" b="0">
+                          <a:solidFill>
+                            <a:srgbClr val="333333"/>
+                          </a:solidFill>
+                          <a:latin typeface="Calibri"/>
+                        </a:rPr>
+                        <a:t>Легкость обращения к руководителю</a:t>
+                      </a:r>
+                    </a:p>
+                  </a:txBody>
+                  <a:tcPr anchor="ctr">
+                    <a:solidFill>
+                      <a:srgbClr val="F7F7F7"/>
+                    </a:solidFill>
+                  </a:tcPr>
+                </a:tc>
+                <a:tc>
+                  <a:txBody>
+                    <a:bodyPr/>
+                    <a:lstStyle/>
+                    <a:p>
+                      <a:pPr algn="ctr"/>
+                      <a:r>
+                        <a:rPr sz="1000" b="0">
+                          <a:solidFill>
+                            <a:srgbClr val="333333"/>
+                          </a:solidFill>
+                          <a:latin typeface="Calibri"/>
+                        </a:rPr>
+                        <a:t>8,80</a:t>
+                      </a:r>
+                    </a:p>
+                  </a:txBody>
+                  <a:tcPr anchor="ctr">
+                    <a:solidFill>
+                      <a:srgbClr val="F7F7F7"/>
+                    </a:solidFill>
+                  </a:tcPr>
+                </a:tc>
+                <a:tc>
+                  <a:txBody>
+                    <a:bodyPr/>
+                    <a:lstStyle/>
+                    <a:p>
+                      <a:pPr algn="ctr"/>
+                      <a:r>
+                        <a:rPr sz="1000" b="0">
+                          <a:solidFill>
+                            <a:srgbClr val="333333"/>
+                          </a:solidFill>
+                          <a:latin typeface="Calibri"/>
+                        </a:rPr>
+                        <a:t>88,0%</a:t>
+                      </a:r>
+                    </a:p>
+                  </a:txBody>
+                  <a:tcPr anchor="ctr">
+                    <a:solidFill>
+                      <a:srgbClr val="F7F7F7"/>
+                    </a:solidFill>
+                  </a:tcPr>
+                </a:tc>
+                <a:tc>
+                  <a:txBody>
+                    <a:bodyPr/>
+                    <a:lstStyle/>
+                    <a:p>
+                      <a:pPr algn="ctr"/>
+                      <a:r>
+                        <a:rPr sz="1000" b="0">
+                          <a:solidFill>
+                            <a:srgbClr val="333333"/>
+                          </a:solidFill>
+                          <a:latin typeface="Calibri"/>
+                        </a:rPr>
+                        <a:t>66%</a:t>
+                      </a:r>
+                    </a:p>
+                  </a:txBody>
+                  <a:tcPr anchor="ctr">
+                    <a:solidFill>
+                      <a:srgbClr val="F7F7F7"/>
+                    </a:solidFill>
+                  </a:tcPr>
+                </a:tc>
+              </a:tr>
+              <a:tr h="396240">
+                <a:tc>
+                  <a:txBody>
+                    <a:bodyPr/>
+                    <a:lstStyle/>
+                    <a:p>
+                      <a:pPr algn="l"/>
+                      <a:r>
+                        <a:rPr sz="1000" b="0">
+                          <a:solidFill>
+                            <a:srgbClr val="333333"/>
+                          </a:solidFill>
+                          <a:latin typeface="Calibri"/>
+                        </a:rPr>
+                        <a:t>Комфорт работы с руководителем</a:t>
+                      </a:r>
+                    </a:p>
+                  </a:txBody>
+                  <a:tcPr anchor="ctr">
+                    <a:solidFill>
+                      <a:srgbClr val="FFFFFF"/>
+                    </a:solidFill>
+                  </a:tcPr>
+                </a:tc>
+                <a:tc>
+                  <a:txBody>
+                    <a:bodyPr/>
+                    <a:lstStyle/>
+                    <a:p>
+                      <a:pPr algn="ctr"/>
+                      <a:r>
+                        <a:rPr sz="1000" b="0">
+                          <a:solidFill>
+                            <a:srgbClr val="333333"/>
+                          </a:solidFill>
+                          <a:latin typeface="Calibri"/>
+                        </a:rPr>
+                        <a:t>8,51</a:t>
+                      </a:r>
+                    </a:p>
+                  </a:txBody>
+                  <a:tcPr anchor="ctr">
+                    <a:solidFill>
+                      <a:srgbClr val="FFFFFF"/>
+                    </a:solidFill>
+                  </a:tcPr>
+                </a:tc>
+                <a:tc>
+                  <a:txBody>
+                    <a:bodyPr/>
+                    <a:lstStyle/>
+                    <a:p>
+                      <a:pPr algn="ctr"/>
+                      <a:r>
+                        <a:rPr sz="1000" b="0">
+                          <a:solidFill>
+                            <a:srgbClr val="333333"/>
+                          </a:solidFill>
+                          <a:latin typeface="Calibri"/>
+                        </a:rPr>
+                        <a:t>85,1%</a:t>
+                      </a:r>
+                    </a:p>
+                  </a:txBody>
+                  <a:tcPr anchor="ctr">
+                    <a:solidFill>
+                      <a:srgbClr val="FFFFFF"/>
+                    </a:solidFill>
+                  </a:tcPr>
+                </a:tc>
+                <a:tc>
+                  <a:txBody>
+                    <a:bodyPr/>
+                    <a:lstStyle/>
+                    <a:p>
+                      <a:pPr algn="ctr"/>
+                      <a:r>
+                        <a:rPr sz="1000" b="0">
+                          <a:solidFill>
+                            <a:srgbClr val="333333"/>
+                          </a:solidFill>
+                          <a:latin typeface="Calibri"/>
+                        </a:rPr>
+                        <a:t>60%</a:t>
+                      </a:r>
+                    </a:p>
+                  </a:txBody>
+                  <a:tcPr anchor="ctr">
+                    <a:solidFill>
+                      <a:srgbClr val="FFFFFF"/>
+                    </a:solidFill>
+                  </a:tcPr>
+                </a:tc>
+              </a:tr>
+              <a:tr h="396240">
+                <a:tc>
+                  <a:txBody>
+                    <a:bodyPr/>
+                    <a:lstStyle/>
+                    <a:p>
+                      <a:pPr algn="l"/>
+                      <a:r>
+                        <a:rPr sz="1000" b="0">
+                          <a:solidFill>
+                            <a:srgbClr val="333333"/>
+                          </a:solidFill>
+                          <a:latin typeface="Calibri"/>
+                        </a:rPr>
+                        <a:t>Уровень загрузки</a:t>
+                      </a:r>
+                    </a:p>
+                  </a:txBody>
+                  <a:tcPr anchor="ctr">
+                    <a:solidFill>
+                      <a:srgbClr val="F7F7F7"/>
+                    </a:solidFill>
+                  </a:tcPr>
+                </a:tc>
+                <a:tc>
+                  <a:txBody>
+                    <a:bodyPr/>
+                    <a:lstStyle/>
+                    <a:p>
+                      <a:pPr algn="ctr"/>
+                      <a:r>
+                        <a:rPr sz="1000" b="0">
+                          <a:solidFill>
+                            <a:srgbClr val="333333"/>
+                          </a:solidFill>
+                          <a:latin typeface="Calibri"/>
+                        </a:rPr>
+                        <a:t>8,46</a:t>
+                      </a:r>
+                    </a:p>
+                  </a:txBody>
+                  <a:tcPr anchor="ctr">
+                    <a:solidFill>
+                      <a:srgbClr val="F7F7F7"/>
+                    </a:solidFill>
+                  </a:tcPr>
+                </a:tc>
+                <a:tc>
+                  <a:txBody>
+                    <a:bodyPr/>
+                    <a:lstStyle/>
+                    <a:p>
+                      <a:pPr algn="ctr"/>
+                      <a:r>
+                        <a:rPr sz="1000" b="0">
+                          <a:solidFill>
+                            <a:srgbClr val="333333"/>
+                          </a:solidFill>
+                          <a:latin typeface="Calibri"/>
+                        </a:rPr>
+                        <a:t>84,6%</a:t>
+                      </a:r>
+                    </a:p>
+                  </a:txBody>
+                  <a:tcPr anchor="ctr">
+                    <a:solidFill>
+                      <a:srgbClr val="F7F7F7"/>
+                    </a:solidFill>
+                  </a:tcPr>
+                </a:tc>
+                <a:tc>
+                  <a:txBody>
+                    <a:bodyPr/>
+                    <a:lstStyle/>
+                    <a:p>
+                      <a:pPr algn="ctr"/>
+                      <a:r>
+                        <a:rPr sz="1000" b="0">
+                          <a:solidFill>
+                            <a:srgbClr val="333333"/>
+                          </a:solidFill>
+                          <a:latin typeface="Calibri"/>
+                        </a:rPr>
+                        <a:t>51%</a:t>
+                      </a:r>
+                    </a:p>
+                  </a:txBody>
+                  <a:tcPr anchor="ctr">
+                    <a:solidFill>
+                      <a:srgbClr val="F7F7F7"/>
+                    </a:solidFill>
+                  </a:tcPr>
+                </a:tc>
+              </a:tr>
+              <a:tr h="396240">
+                <a:tc>
+                  <a:txBody>
+                    <a:bodyPr/>
+                    <a:lstStyle/>
+                    <a:p>
+                      <a:pPr algn="l"/>
+                      <a:r>
+                        <a:rPr sz="1000" b="0">
+                          <a:solidFill>
+                            <a:srgbClr val="333333"/>
+                          </a:solidFill>
+                          <a:latin typeface="Calibri"/>
+                        </a:rPr>
+                        <a:t>Взаимодействие внутри отдела</a:t>
+                      </a:r>
+                    </a:p>
+                  </a:txBody>
+                  <a:tcPr anchor="ctr">
+                    <a:solidFill>
+                      <a:srgbClr val="FFFFFF"/>
+                    </a:solidFill>
+                  </a:tcPr>
+                </a:tc>
+                <a:tc>
+                  <a:txBody>
+                    <a:bodyPr/>
+                    <a:lstStyle/>
+                    <a:p>
+                      <a:pPr algn="ctr"/>
+                      <a:r>
+                        <a:rPr sz="1000" b="0">
+                          <a:solidFill>
+                            <a:srgbClr val="333333"/>
+                          </a:solidFill>
+                          <a:latin typeface="Calibri"/>
+                        </a:rPr>
+                        <a:t>8,20</a:t>
+                      </a:r>
+                    </a:p>
+                  </a:txBody>
+                  <a:tcPr anchor="ctr">
+                    <a:solidFill>
+                      <a:srgbClr val="FFFFFF"/>
+                    </a:solidFill>
+                  </a:tcPr>
+                </a:tc>
+                <a:tc>
+                  <a:txBody>
+                    <a:bodyPr/>
+                    <a:lstStyle/>
+                    <a:p>
+                      <a:pPr algn="ctr"/>
+                      <a:r>
+                        <a:rPr sz="1000" b="0">
+                          <a:solidFill>
+                            <a:srgbClr val="333333"/>
+                          </a:solidFill>
+                          <a:latin typeface="Calibri"/>
+                        </a:rPr>
+                        <a:t>82,0%</a:t>
+                      </a:r>
+                    </a:p>
+                  </a:txBody>
+                  <a:tcPr anchor="ctr">
+                    <a:solidFill>
+                      <a:srgbClr val="FFFFFF"/>
+                    </a:solidFill>
+                  </a:tcPr>
+                </a:tc>
+                <a:tc>
+                  <a:txBody>
+                    <a:bodyPr/>
+                    <a:lstStyle/>
+                    <a:p>
+                      <a:pPr algn="ctr"/>
+                      <a:r>
+                        <a:rPr sz="1000" b="0">
+                          <a:solidFill>
+                            <a:srgbClr val="333333"/>
+                          </a:solidFill>
+                          <a:latin typeface="Calibri"/>
+                        </a:rPr>
+                        <a:t>51%</a:t>
+                      </a:r>
+                    </a:p>
+                  </a:txBody>
+                  <a:tcPr anchor="ctr">
+                    <a:solidFill>
+                      <a:srgbClr val="FFFFFF"/>
+                    </a:solidFill>
+                  </a:tcPr>
+                </a:tc>
+              </a:tr>
+              <a:tr h="396240">
+                <a:tc>
+                  <a:txBody>
+                    <a:bodyPr/>
+                    <a:lstStyle/>
+                    <a:p>
+                      <a:pPr algn="l"/>
+                      <a:r>
+                        <a:rPr sz="1000" b="0">
+                          <a:solidFill>
+                            <a:srgbClr val="333333"/>
+                          </a:solidFill>
+                          <a:latin typeface="Calibri"/>
+                        </a:rPr>
+                        <a:t>Взаимодействие внутри филиала</a:t>
+                      </a:r>
+                    </a:p>
+                  </a:txBody>
+                  <a:tcPr anchor="ctr">
+                    <a:solidFill>
+                      <a:srgbClr val="F7F7F7"/>
+                    </a:solidFill>
+                  </a:tcPr>
+                </a:tc>
+                <a:tc>
+                  <a:txBody>
+                    <a:bodyPr/>
+                    <a:lstStyle/>
+                    <a:p>
+                      <a:pPr algn="ctr"/>
+                      <a:r>
+                        <a:rPr sz="1000" b="0">
+                          <a:solidFill>
+                            <a:srgbClr val="333333"/>
+                          </a:solidFill>
+                          <a:latin typeface="Calibri"/>
+                        </a:rPr>
+                        <a:t>7,89</a:t>
+                      </a:r>
+                    </a:p>
+                  </a:txBody>
+                  <a:tcPr anchor="ctr">
+                    <a:solidFill>
+                      <a:srgbClr val="F7F7F7"/>
+                    </a:solidFill>
+                  </a:tcPr>
+                </a:tc>
+                <a:tc>
+                  <a:txBody>
+                    <a:bodyPr/>
+                    <a:lstStyle/>
+                    <a:p>
+                      <a:pPr algn="ctr"/>
+                      <a:r>
+                        <a:rPr sz="1000" b="0">
+                          <a:solidFill>
+                            <a:srgbClr val="333333"/>
+                          </a:solidFill>
+                          <a:latin typeface="Calibri"/>
+                        </a:rPr>
+                        <a:t>78,9%</a:t>
+                      </a:r>
+                    </a:p>
+                  </a:txBody>
+                  <a:tcPr anchor="ctr">
+                    <a:solidFill>
+                      <a:srgbClr val="F7F7F7"/>
+                    </a:solidFill>
+                  </a:tcPr>
+                </a:tc>
+                <a:tc>
+                  <a:txBody>
+                    <a:bodyPr/>
+                    <a:lstStyle/>
+                    <a:p>
+                      <a:pPr algn="ctr"/>
+                      <a:r>
+                        <a:rPr sz="1000" b="0">
+                          <a:solidFill>
+                            <a:srgbClr val="333333"/>
+                          </a:solidFill>
+                          <a:latin typeface="Calibri"/>
+                        </a:rPr>
+                        <a:t>49%</a:t>
+                      </a:r>
+                    </a:p>
+                  </a:txBody>
+                  <a:tcPr anchor="ctr">
+                    <a:solidFill>
+                      <a:srgbClr val="F7F7F7"/>
+                    </a:solidFill>
+                  </a:tcPr>
+                </a:tc>
+              </a:tr>
+              <a:tr h="396240">
+                <a:tc>
+                  <a:txBody>
+                    <a:bodyPr/>
+                    <a:lstStyle/>
+                    <a:p>
+                      <a:pPr algn="l"/>
+                      <a:r>
+                        <a:rPr sz="1000" b="0">
+                          <a:solidFill>
+                            <a:srgbClr val="333333"/>
+                          </a:solidFill>
+                          <a:latin typeface="Calibri"/>
+                        </a:rPr>
+                        <a:t>Удовлетворённость работой</a:t>
+                      </a:r>
+                    </a:p>
+                  </a:txBody>
+                  <a:tcPr anchor="ctr">
+                    <a:solidFill>
+                      <a:srgbClr val="FFFFFF"/>
+                    </a:solidFill>
+                  </a:tcPr>
+                </a:tc>
+                <a:tc>
+                  <a:txBody>
+                    <a:bodyPr/>
+                    <a:lstStyle/>
+                    <a:p>
+                      <a:pPr algn="ctr"/>
+                      <a:r>
+                        <a:rPr sz="1000" b="0">
+                          <a:solidFill>
+                            <a:srgbClr val="333333"/>
+                          </a:solidFill>
+                          <a:latin typeface="Calibri"/>
+                        </a:rPr>
+                        <a:t>7,51</a:t>
+                      </a:r>
+                    </a:p>
+                  </a:txBody>
+                  <a:tcPr anchor="ctr">
+                    <a:solidFill>
+                      <a:srgbClr val="FFFFFF"/>
+                    </a:solidFill>
+                  </a:tcPr>
+                </a:tc>
+                <a:tc>
+                  <a:txBody>
+                    <a:bodyPr/>
+                    <a:lstStyle/>
+                    <a:p>
+                      <a:pPr algn="ctr"/>
+                      <a:r>
+                        <a:rPr sz="1000" b="0">
+                          <a:solidFill>
+                            <a:srgbClr val="333333"/>
+                          </a:solidFill>
+                          <a:latin typeface="Calibri"/>
+                        </a:rPr>
+                        <a:t>75,1%</a:t>
+                      </a:r>
+                    </a:p>
+                  </a:txBody>
+                  <a:tcPr anchor="ctr">
+                    <a:solidFill>
+                      <a:srgbClr val="FFFFFF"/>
+                    </a:solidFill>
+                  </a:tcPr>
+                </a:tc>
+                <a:tc>
+                  <a:txBody>
+                    <a:bodyPr/>
+                    <a:lstStyle/>
+                    <a:p>
+                      <a:pPr algn="ctr"/>
+                      <a:r>
+                        <a:rPr sz="1000" b="0">
+                          <a:solidFill>
+                            <a:srgbClr val="333333"/>
+                          </a:solidFill>
+                          <a:latin typeface="Calibri"/>
+                        </a:rPr>
+                        <a:t>26%</a:t>
+                      </a:r>
+                    </a:p>
+                  </a:txBody>
+                  <a:tcPr anchor="ctr">
+                    <a:solidFill>
+                      <a:srgbClr val="FFFFFF"/>
+                    </a:solidFill>
+                  </a:tcPr>
+                </a:tc>
+              </a:tr>
+              <a:tr h="396240">
+                <a:tc>
+                  <a:txBody>
+                    <a:bodyPr/>
+                    <a:lstStyle/>
+                    <a:p>
+                      <a:pPr algn="l"/>
+                      <a:r>
+                        <a:rPr sz="1000" b="0">
+                          <a:solidFill>
+                            <a:srgbClr val="333333"/>
+                          </a:solidFill>
+                          <a:latin typeface="Calibri"/>
+                        </a:rPr>
+                        <a:t>Удобство и безопасность рабочего места</a:t>
+                      </a:r>
+                    </a:p>
+                  </a:txBody>
+                  <a:tcPr anchor="ctr">
+                    <a:solidFill>
+                      <a:srgbClr val="F7F7F7"/>
+                    </a:solidFill>
+                  </a:tcPr>
+                </a:tc>
+                <a:tc>
+                  <a:txBody>
+                    <a:bodyPr/>
+                    <a:lstStyle/>
+                    <a:p>
+                      <a:pPr algn="ctr"/>
+                      <a:r>
+                        <a:rPr sz="1000" b="0">
+                          <a:solidFill>
+                            <a:srgbClr val="333333"/>
+                          </a:solidFill>
+                          <a:latin typeface="Calibri"/>
+                        </a:rPr>
+                        <a:t>7,49</a:t>
+                      </a:r>
+                    </a:p>
+                  </a:txBody>
+                  <a:tcPr anchor="ctr">
+                    <a:solidFill>
+                      <a:srgbClr val="F7F7F7"/>
+                    </a:solidFill>
+                  </a:tcPr>
+                </a:tc>
+                <a:tc>
+                  <a:txBody>
+                    <a:bodyPr/>
+                    <a:lstStyle/>
+                    <a:p>
+                      <a:pPr algn="ctr"/>
+                      <a:r>
+                        <a:rPr sz="1000" b="0">
+                          <a:solidFill>
+                            <a:srgbClr val="333333"/>
+                          </a:solidFill>
+                          <a:latin typeface="Calibri"/>
+                        </a:rPr>
+                        <a:t>74,9%</a:t>
+                      </a:r>
+                    </a:p>
+                  </a:txBody>
+                  <a:tcPr anchor="ctr">
+                    <a:solidFill>
+                      <a:srgbClr val="F7F7F7"/>
+                    </a:solidFill>
+                  </a:tcPr>
+                </a:tc>
+                <a:tc>
+                  <a:txBody>
+                    <a:bodyPr/>
+                    <a:lstStyle/>
+                    <a:p>
+                      <a:pPr algn="ctr"/>
+                      <a:r>
+                        <a:rPr sz="1000" b="0">
+                          <a:solidFill>
+                            <a:srgbClr val="333333"/>
+                          </a:solidFill>
+                          <a:latin typeface="Calibri"/>
+                        </a:rPr>
+                        <a:t>43%</a:t>
+                      </a:r>
+                    </a:p>
+                  </a:txBody>
+                  <a:tcPr anchor="ctr">
+                    <a:solidFill>
+                      <a:srgbClr val="F7F7F7"/>
+                    </a:solidFill>
+                  </a:tcPr>
+                </a:tc>
+              </a:tr>
+              <a:tr h="396240">
+                <a:tc>
+                  <a:txBody>
+                    <a:bodyPr/>
+                    <a:lstStyle/>
+                    <a:p>
+                      <a:pPr algn="l"/>
+                      <a:r>
+                        <a:rPr sz="1000" b="0">
+                          <a:solidFill>
+                            <a:srgbClr val="333333"/>
+                          </a:solidFill>
+                          <a:latin typeface="Calibri"/>
+                        </a:rPr>
+                        <a:t>Спецодежда и СИЗ</a:t>
+                      </a:r>
+                    </a:p>
+                  </a:txBody>
+                  <a:tcPr anchor="ctr">
+                    <a:solidFill>
+                      <a:srgbClr val="FFFFFF"/>
+                    </a:solidFill>
+                  </a:tcPr>
+                </a:tc>
+                <a:tc>
+                  <a:txBody>
+                    <a:bodyPr/>
+                    <a:lstStyle/>
+                    <a:p>
+                      <a:pPr algn="ctr"/>
+                      <a:r>
+                        <a:rPr sz="1000" b="0">
+                          <a:solidFill>
+                            <a:srgbClr val="333333"/>
+                          </a:solidFill>
+                          <a:latin typeface="Calibri"/>
+                        </a:rPr>
+                        <a:t>7,11</a:t>
+                      </a:r>
+                    </a:p>
+                  </a:txBody>
+                  <a:tcPr anchor="ctr">
+                    <a:solidFill>
+                      <a:srgbClr val="FFFFFF"/>
+                    </a:solidFill>
+                  </a:tcPr>
+                </a:tc>
+                <a:tc>
+                  <a:txBody>
+                    <a:bodyPr/>
+                    <a:lstStyle/>
+                    <a:p>
+                      <a:pPr algn="ctr"/>
+                      <a:r>
+                        <a:rPr sz="1000" b="0">
+                          <a:solidFill>
+                            <a:srgbClr val="333333"/>
+                          </a:solidFill>
+                          <a:latin typeface="Calibri"/>
+                        </a:rPr>
+                        <a:t>71,1%</a:t>
+                      </a:r>
+                    </a:p>
+                  </a:txBody>
+                  <a:tcPr anchor="ctr">
+                    <a:solidFill>
+                      <a:srgbClr val="FFFFFF"/>
+                    </a:solidFill>
+                  </a:tcPr>
+                </a:tc>
+                <a:tc>
+                  <a:txBody>
+                    <a:bodyPr/>
+                    <a:lstStyle/>
+                    <a:p>
+                      <a:pPr algn="ctr"/>
+                      <a:r>
+                        <a:rPr sz="1000" b="0">
+                          <a:solidFill>
+                            <a:srgbClr val="333333"/>
+                          </a:solidFill>
+                          <a:latin typeface="Calibri"/>
+                        </a:rPr>
+                        <a:t>40%</a:t>
+                      </a:r>
+                    </a:p>
+                  </a:txBody>
+                  <a:tcPr anchor="ctr">
+                    <a:solidFill>
+                      <a:srgbClr val="FFFFFF"/>
+                    </a:solidFill>
+                  </a:tcPr>
+                </a:tc>
+              </a:tr>
+              <a:tr h="396240">
+                <a:tc>
+                  <a:txBody>
+                    <a:bodyPr/>
+                    <a:lstStyle/>
+                    <a:p>
+                      <a:pPr algn="l"/>
+                      <a:r>
+                        <a:rPr sz="1000" b="0">
+                          <a:solidFill>
+                            <a:srgbClr val="333333"/>
+                          </a:solidFill>
+                          <a:latin typeface="Calibri"/>
+                        </a:rPr>
+                        <a:t>Вознаграждение и мотивация vs вклад</a:t>
+                      </a:r>
+                    </a:p>
+                  </a:txBody>
+                  <a:tcPr anchor="ctr">
+                    <a:solidFill>
+                      <a:srgbClr val="F7F7F7"/>
+                    </a:solidFill>
+                  </a:tcPr>
+                </a:tc>
+                <a:tc>
+                  <a:txBody>
+                    <a:bodyPr/>
+                    <a:lstStyle/>
+                    <a:p>
+                      <a:pPr algn="ctr"/>
+                      <a:r>
+                        <a:rPr sz="1000" b="0">
+                          <a:solidFill>
+                            <a:srgbClr val="333333"/>
+                          </a:solidFill>
+                          <a:latin typeface="Calibri"/>
+                        </a:rPr>
+                        <a:t>6,69</a:t>
+                      </a:r>
+                    </a:p>
+                  </a:txBody>
+                  <a:tcPr anchor="ctr">
+                    <a:solidFill>
+                      <a:srgbClr val="F7F7F7"/>
+                    </a:solidFill>
+                  </a:tcPr>
+                </a:tc>
+                <a:tc>
+                  <a:txBody>
+                    <a:bodyPr/>
+                    <a:lstStyle/>
+                    <a:p>
+                      <a:pPr algn="ctr"/>
+                      <a:r>
+                        <a:rPr sz="1000" b="0">
+                          <a:solidFill>
+                            <a:srgbClr val="333333"/>
+                          </a:solidFill>
+                          <a:latin typeface="Calibri"/>
+                        </a:rPr>
+                        <a:t>66,9%</a:t>
+                      </a:r>
+                    </a:p>
+                  </a:txBody>
+                  <a:tcPr anchor="ctr">
+                    <a:solidFill>
+                      <a:srgbClr val="F7F7F7"/>
+                    </a:solidFill>
+                  </a:tcPr>
+                </a:tc>
+                <a:tc>
+                  <a:txBody>
+                    <a:bodyPr/>
+                    <a:lstStyle/>
+                    <a:p>
+                      <a:pPr algn="ctr"/>
+                      <a:r>
+                        <a:rPr sz="1000" b="0">
+                          <a:solidFill>
+                            <a:srgbClr val="333333"/>
+                          </a:solidFill>
+                          <a:latin typeface="Calibri"/>
+                        </a:rPr>
+                        <a:t>23%</a:t>
+                      </a:r>
+                    </a:p>
+                  </a:txBody>
+                  <a:tcPr anchor="ctr">
+                    <a:solidFill>
+                      <a:srgbClr val="F7F7F7"/>
+                    </a:solidFill>
+                  </a:tcPr>
+                </a:tc>
+              </a:tr>
+              <a:tr h="396240">
+                <a:tc>
+                  <a:txBody>
+                    <a:bodyPr/>
+                    <a:lstStyle/>
+                    <a:p>
+                      <a:pPr algn="l"/>
+                      <a:r>
+                        <a:rPr sz="1000" b="0">
+                          <a:solidFill>
+                            <a:srgbClr val="333333"/>
+                          </a:solidFill>
+                          <a:latin typeface="Calibri"/>
+                        </a:rPr>
+                        <a:t>Состояние склада / автомобилей</a:t>
+                      </a:r>
+                    </a:p>
+                  </a:txBody>
+                  <a:tcPr anchor="ctr">
+                    <a:solidFill>
+                      <a:srgbClr val="FFFFFF"/>
+                    </a:solidFill>
+                  </a:tcPr>
+                </a:tc>
+                <a:tc>
+                  <a:txBody>
+                    <a:bodyPr/>
+                    <a:lstStyle/>
+                    <a:p>
+                      <a:pPr algn="ctr"/>
+                      <a:r>
+                        <a:rPr sz="1000" b="0">
+                          <a:solidFill>
+                            <a:srgbClr val="333333"/>
+                          </a:solidFill>
+                          <a:latin typeface="Calibri"/>
+                        </a:rPr>
+                        <a:t>6,43</a:t>
+                      </a:r>
+                    </a:p>
+                  </a:txBody>
+                  <a:tcPr anchor="ctr">
+                    <a:solidFill>
+                      <a:srgbClr val="FFFFFF"/>
+                    </a:solidFill>
+                  </a:tcPr>
+                </a:tc>
+                <a:tc>
+                  <a:txBody>
+                    <a:bodyPr/>
+                    <a:lstStyle/>
+                    <a:p>
+                      <a:pPr algn="ctr"/>
+                      <a:r>
+                        <a:rPr sz="1000" b="0">
+                          <a:solidFill>
+                            <a:srgbClr val="333333"/>
+                          </a:solidFill>
+                          <a:latin typeface="Calibri"/>
+                        </a:rPr>
+                        <a:t>64,3%</a:t>
+                      </a:r>
+                    </a:p>
+                  </a:txBody>
+                  <a:tcPr anchor="ctr">
+                    <a:solidFill>
+                      <a:srgbClr val="FFFFFF"/>
+                    </a:solidFill>
+                  </a:tcPr>
+                </a:tc>
+                <a:tc>
+                  <a:txBody>
+                    <a:bodyPr/>
+                    <a:lstStyle/>
+                    <a:p>
+                      <a:pPr algn="ctr"/>
+                      <a:r>
+                        <a:rPr sz="1000" b="0">
+                          <a:solidFill>
+                            <a:srgbClr val="333333"/>
+                          </a:solidFill>
+                          <a:latin typeface="Calibri"/>
+                        </a:rPr>
+                        <a:t>20%</a:t>
+                      </a:r>
+                    </a:p>
+                  </a:txBody>
+                  <a:tcPr anchor="ctr">
+                    <a:solidFill>
+                      <a:srgbClr val="FFFFFF"/>
+                    </a:solidFill>
+                  </a:tcPr>
+                </a:tc>
+              </a:tr>
+              <a:tr h="396240">
+                <a:tc>
+                  <a:txBody>
+                    <a:bodyPr/>
+                    <a:lstStyle/>
+                    <a:p>
+                      <a:pPr algn="l"/>
+                      <a:r>
+                        <a:rPr sz="1000" b="0">
+                          <a:solidFill>
+                            <a:srgbClr val="333333"/>
+                          </a:solidFill>
+                          <a:latin typeface="Calibri"/>
+                        </a:rPr>
+                        <a:t>Среднее по шкалам</a:t>
+                      </a:r>
+                    </a:p>
+                  </a:txBody>
+                  <a:tcPr anchor="ctr">
+                    <a:solidFill>
+                      <a:srgbClr val="F7F7F7"/>
+                    </a:solidFill>
+                  </a:tcPr>
+                </a:tc>
+                <a:tc>
+                  <a:txBody>
+                    <a:bodyPr/>
+                    <a:lstStyle/>
+                    <a:p>
+                      <a:pPr algn="ctr"/>
+                      <a:r>
+                        <a:rPr sz="1000" b="0">
+                          <a:solidFill>
+                            <a:srgbClr val="333333"/>
+                          </a:solidFill>
+                          <a:latin typeface="Calibri"/>
+                        </a:rPr>
+                        <a:t>7,71</a:t>
+                      </a:r>
+                    </a:p>
+                  </a:txBody>
+                  <a:tcPr anchor="ctr">
+                    <a:solidFill>
+                      <a:srgbClr val="F7F7F7"/>
+                    </a:solidFill>
+                  </a:tcPr>
+                </a:tc>
+                <a:tc>
+                  <a:txBody>
+                    <a:bodyPr/>
+                    <a:lstStyle/>
+                    <a:p>
+                      <a:pPr algn="ctr"/>
+                      <a:r>
+                        <a:rPr sz="1000" b="0">
+                          <a:solidFill>
+                            <a:srgbClr val="333333"/>
+                          </a:solidFill>
+                          <a:latin typeface="Calibri"/>
+                        </a:rPr>
+                        <a:t>77,1%</a:t>
+                      </a:r>
+                    </a:p>
+                  </a:txBody>
+                  <a:tcPr anchor="ctr">
+                    <a:solidFill>
+                      <a:srgbClr val="F7F7F7"/>
+                    </a:solidFill>
+                  </a:tcPr>
+                </a:tc>
+                <a:tc>
+                  <a:txBody>
+                    <a:bodyPr/>
+                    <a:lstStyle/>
+                    <a:p>
+                      <a:pPr algn="ctr"/>
+                      <a:r>
+                        <a:rPr sz="1000" b="0">
+                          <a:solidFill>
+                            <a:srgbClr val="333333"/>
+                          </a:solidFill>
+                          <a:latin typeface="Calibri"/>
+                        </a:rPr>
+                        <a:t>43%</a:t>
+                      </a:r>
+                    </a:p>
+                  </a:txBody>
+                  <a:tcPr anchor="ctr">
+                    <a:solidFill>
+                      <a:srgbClr val="F7F7F7"/>
+                    </a:solidFill>
+                  </a:tcPr>
+                </a:tc>
+              </a:tr>
+            </a:tbl>
+          </a:graphicData>
+        </a:graphic>
+      </p:graphicFrame>
+      <p:sp>
+        <p:nvSpPr>
+          <p:cNvPr id="6" name="TextBox 5"/>
+          <p:cNvSpPr txBox="1"/>
+          <p:nvPr/>
+        </p:nvSpPr>
+        <p:spPr>
+          <a:xfrm>
+            <a:off x="8046720" y="1024128"/>
+            <a:ext cx="3703320" cy="4754880"/>
+          </a:xfrm>
+          <a:prstGeom prst="rect">
+            <a:avLst/>
+          </a:prstGeom>
+          <a:noFill/>
+        </p:spPr>
+        <p:txBody>
           <a:bodyPr wrap="square">
             <a:spAutoFit/>
           </a:bodyPr>
@@ -8090,13 +8515,13 @@
               </a:spcAft>
             </a:pPr>
             <a:r>
-              <a:rPr sz="1600" b="0">
+              <a:rPr sz="1400" b="1">
                 <a:solidFill>
                   <a:srgbClr val="333333"/>
                 </a:solidFill>
                 <a:latin typeface="Calibri"/>
               </a:rPr>
-              <a:t>По шкалам 2026 рейтинг офиса / коммерции — 88,0%, СиТЛ — 77,1%. Это стабильно высокий уровень по людям и руководителю и заметный разрыв по системе вознаграждения и (для СиТЛ) по условиям труда.</a:t>
+              <a:t>Сильные стороны</a:t>
             </a:r>
           </a:p>
           <a:p>
@@ -8106,7 +8531,71 @@
               </a:spcAft>
             </a:pPr>
             <a:r>
-              <a:rPr sz="1600" b="0">
+              <a:rPr sz="1400" b="0">
+                <a:solidFill>
+                  <a:srgbClr val="333333"/>
+                </a:solidFill>
+                <a:latin typeface="Calibri"/>
+              </a:rPr>
+              <a:t>• Легко обратиться к руководителю — 8,80</a:t>
+            </a:r>
+          </a:p>
+          <a:p>
+            <a:pPr algn="l">
+              <a:spcAft>
+                <a:spcPts val="800"/>
+              </a:spcAft>
+            </a:pPr>
+            <a:r>
+              <a:rPr sz="1400" b="0">
+                <a:solidFill>
+                  <a:srgbClr val="333333"/>
+                </a:solidFill>
+                <a:latin typeface="Calibri"/>
+              </a:rPr>
+              <a:t>• Комфорт с руководителем — 8,51</a:t>
+            </a:r>
+          </a:p>
+          <a:p>
+            <a:pPr algn="l">
+              <a:spcAft>
+                <a:spcPts val="800"/>
+              </a:spcAft>
+            </a:pPr>
+            <a:r>
+              <a:rPr sz="1400" b="0">
+                <a:solidFill>
+                  <a:srgbClr val="333333"/>
+                </a:solidFill>
+                <a:latin typeface="Calibri"/>
+              </a:rPr>
+              <a:t>• Загрузка — 8,46</a:t>
+            </a:r>
+          </a:p>
+          <a:p>
+            <a:pPr algn="l">
+              <a:spcAft>
+                <a:spcPts val="800"/>
+              </a:spcAft>
+            </a:pPr>
+            <a:r>
+              <a:rPr sz="1400" b="0">
+                <a:solidFill>
+                  <a:srgbClr val="333333"/>
+                </a:solidFill>
+                <a:latin typeface="Calibri"/>
+              </a:rPr>
+              <a:t>• Отношения в отделе — 8,20</a:t>
+            </a:r>
+          </a:p>
+          <a:p>
+            <a:pPr algn="l">
+              <a:spcAft>
+                <a:spcPts val="800"/>
+              </a:spcAft>
+            </a:pPr>
+            <a:r>
+              <a:rPr sz="1400" b="0">
                 <a:solidFill>
                   <a:srgbClr val="333333"/>
                 </a:solidFill>
@@ -8122,13 +8611,13 @@
               </a:spcAft>
             </a:pPr>
             <a:r>
-              <a:rPr sz="1600" b="0">
+              <a:rPr sz="1400" b="0">
                 <a:solidFill>
                   <a:srgbClr val="333333"/>
                 </a:solidFill>
                 <a:latin typeface="Calibri"/>
               </a:rPr>
-              <a:t>Разрыв ожидание vs реальность, который стоит взять в план 2027:</a:t>
+              <a:t>Зоны внимания</a:t>
             </a:r>
           </a:p>
           <a:p>
@@ -8138,13 +8627,13 @@
               </a:spcAft>
             </a:pPr>
             <a:r>
-              <a:rPr sz="1600" b="0">
+              <a:rPr sz="1400" b="0">
                 <a:solidFill>
                   <a:srgbClr val="333333"/>
                 </a:solidFill>
                 <a:latin typeface="Calibri"/>
               </a:rPr>
-              <a:t>• Вознаграждение и мотивация — самое слабое место в обоих контурах (офис 7,72 / СиТЛ 6,69). Тема совпадает с выводом 2025.</a:t>
+              <a:t>• Склад / автомобили — 6,43</a:t>
             </a:r>
           </a:p>
           <a:p>
@@ -8154,13 +8643,13 @@
               </a:spcAft>
             </a:pPr>
             <a:r>
-              <a:rPr sz="1600" b="0">
+              <a:rPr sz="1400" b="0">
                 <a:solidFill>
                   <a:srgbClr val="333333"/>
                 </a:solidFill>
                 <a:latin typeface="Calibri"/>
               </a:rPr>
-              <a:t>• Офис: коммуникации между смежными отделами (8,07) и карьера (43% не видят роста).</a:t>
+              <a:t>• Вознаграждение — 6,69</a:t>
             </a:r>
           </a:p>
           <a:p>
@@ -8170,13 +8659,13 @@
               </a:spcAft>
             </a:pPr>
             <a:r>
-              <a:rPr sz="1600" b="0">
+              <a:rPr sz="1400" b="0">
                 <a:solidFill>
                   <a:srgbClr val="333333"/>
                 </a:solidFill>
                 <a:latin typeface="Calibri"/>
               </a:rPr>
-              <a:t>• СиТЛ: состояние склада и автомобилей (6,43), СИЗ (7,11), удобство и безопасность места (7,49).</a:t>
+              <a:t>• СИЗ и спецодежда — 7,11</a:t>
             </a:r>
           </a:p>
           <a:p>
@@ -8186,13 +8675,13 @@
               </a:spcAft>
             </a:pPr>
             <a:r>
-              <a:rPr sz="1600" b="0">
+              <a:rPr sz="1400" b="0">
                 <a:solidFill>
                   <a:srgbClr val="333333"/>
                 </a:solidFill>
                 <a:latin typeface="Calibri"/>
               </a:rPr>
-              <a:t>• Люди и руководитель — опора: доступность руководителя и отношения в отделе высокие и в офисе, и в СиТЛ.</a:t>
+              <a:t>• Рабочее место — 7,49</a:t>
             </a:r>
           </a:p>
           <a:p>
@@ -8202,29 +8691,13 @@
               </a:spcAft>
             </a:pPr>
             <a:r>
-              <a:rPr sz="1600" b="0">
+              <a:rPr sz="1400" b="0">
                 <a:solidFill>
                   <a:srgbClr val="333333"/>
                 </a:solidFill>
                 <a:latin typeface="Calibri"/>
               </a:rPr>
-              <a:t/>
-            </a:r>
-          </a:p>
-          <a:p>
-            <a:pPr algn="l">
-              <a:spcAft>
-                <a:spcPts val="800"/>
-              </a:spcAft>
-            </a:pPr>
-            <a:r>
-              <a:rPr sz="1600" b="0">
-                <a:solidFill>
-                  <a:srgbClr val="333333"/>
-                </a:solidFill>
-                <a:latin typeface="Calibri"/>
-              </a:rPr>
-              <a:t>Явка 31,2% (102 из 327) ниже, чем 36% в 2025. Цель прошлого года «повысить участие» не выполнена.</a:t>
+              <a:t>• Идеи не учитывают — 29% (10 из 35)</a:t>
             </a:r>
           </a:p>
         </p:txBody>
@@ -8299,6 +8772,216 @@
                 </a:solidFill>
                 <a:latin typeface="Calibri"/>
               </a:rPr>
+              <a:t>Общий вывод</a:t>
+            </a:r>
+          </a:p>
+        </p:txBody>
+      </p:sp>
+      <p:sp>
+        <p:nvSpPr>
+          <p:cNvPr id="4" name="TextBox 3"/>
+          <p:cNvSpPr txBox="1"/>
+          <p:nvPr/>
+        </p:nvSpPr>
+        <p:spPr>
+          <a:xfrm>
+            <a:off x="548640" y="868680"/>
+            <a:ext cx="11064240" cy="4937760"/>
+          </a:xfrm>
+          <a:prstGeom prst="rect">
+            <a:avLst/>
+          </a:prstGeom>
+          <a:noFill/>
+        </p:spPr>
+        <p:txBody>
+          <a:bodyPr wrap="square">
+            <a:spAutoFit/>
+          </a:bodyPr>
+          <a:lstStyle/>
+          <a:p>
+            <a:pPr algn="l">
+              <a:spcAft>
+                <a:spcPts val="800"/>
+              </a:spcAft>
+            </a:pPr>
+            <a:r>
+              <a:rPr sz="1600" b="0">
+                <a:solidFill>
+                  <a:srgbClr val="333333"/>
+                </a:solidFill>
+                <a:latin typeface="Calibri"/>
+              </a:rPr>
+              <a:t>Уровень вовлечённости оптового направления — 74%. Показатель стабилен к 2025 году (76,5%), цель роста на 10 п.п. не достигнута. Явка — 102 из 372 (КС 67 из 205, СиТЛ 35 из 167).</a:t>
+            </a:r>
+          </a:p>
+          <a:p>
+            <a:pPr algn="l">
+              <a:spcAft>
+                <a:spcPts val="800"/>
+              </a:spcAft>
+            </a:pPr>
+            <a:r>
+              <a:rPr sz="1600" b="0">
+                <a:solidFill>
+                  <a:srgbClr val="333333"/>
+                </a:solidFill>
+                <a:latin typeface="Calibri"/>
+              </a:rPr>
+              <a:t/>
+            </a:r>
+          </a:p>
+          <a:p>
+            <a:pPr algn="l">
+              <a:spcAft>
+                <a:spcPts val="800"/>
+              </a:spcAft>
+            </a:pPr>
+            <a:r>
+              <a:rPr sz="1600" b="0">
+                <a:solidFill>
+                  <a:srgbClr val="333333"/>
+                </a:solidFill>
+                <a:latin typeface="Calibri"/>
+              </a:rPr>
+              <a:t>Разрыв, который стоит взять в план 2027:</a:t>
+            </a:r>
+          </a:p>
+          <a:p>
+            <a:pPr algn="l">
+              <a:spcAft>
+                <a:spcPts val="800"/>
+              </a:spcAft>
+            </a:pPr>
+            <a:r>
+              <a:rPr sz="1600" b="0">
+                <a:solidFill>
+                  <a:srgbClr val="333333"/>
+                </a:solidFill>
+                <a:latin typeface="Calibri"/>
+              </a:rPr>
+              <a:t>• Вознаграждение и мотивация — самое слабое место в обоих контурах (КС 7,72 / СиТЛ 6,69).</a:t>
+            </a:r>
+          </a:p>
+          <a:p>
+            <a:pPr algn="l">
+              <a:spcAft>
+                <a:spcPts val="800"/>
+              </a:spcAft>
+            </a:pPr>
+            <a:r>
+              <a:rPr sz="1600" b="0">
+                <a:solidFill>
+                  <a:srgbClr val="333333"/>
+                </a:solidFill>
+                <a:latin typeface="Calibri"/>
+              </a:rPr>
+              <a:t>• КС: коммуникации между смежными отделами (8,07) и карьера (43% не видят роста).</a:t>
+            </a:r>
+          </a:p>
+          <a:p>
+            <a:pPr algn="l">
+              <a:spcAft>
+                <a:spcPts val="800"/>
+              </a:spcAft>
+            </a:pPr>
+            <a:r>
+              <a:rPr sz="1600" b="0">
+                <a:solidFill>
+                  <a:srgbClr val="333333"/>
+                </a:solidFill>
+                <a:latin typeface="Calibri"/>
+              </a:rPr>
+              <a:t>• СиТЛ: состояние склада и автомобилей (6,43), СИЗ (7,11), удобство и безопасность места (7,49).</a:t>
+            </a:r>
+          </a:p>
+          <a:p>
+            <a:pPr algn="l">
+              <a:spcAft>
+                <a:spcPts val="800"/>
+              </a:spcAft>
+            </a:pPr>
+            <a:r>
+              <a:rPr sz="1600" b="0">
+                <a:solidFill>
+                  <a:srgbClr val="333333"/>
+                </a:solidFill>
+                <a:latin typeface="Calibri"/>
+              </a:rPr>
+              <a:t>• Люди и руководитель — опора: доступность руководителя и отношения в отделе высокие и в КС, и в СиТЛ.</a:t>
+            </a:r>
+          </a:p>
+        </p:txBody>
+      </p:sp>
+    </p:spTree>
+  </p:cSld>
+  <p:clrMapOvr>
+    <a:masterClrMapping/>
+  </p:clrMapOvr>
+</p:sld>
+</file>
+
+<file path=ppt/slides/slide8.xml><?xml version="1.0" encoding="utf-8"?>
+<p:sld xmlns:a="http://schemas.openxmlformats.org/drawingml/2006/main" xmlns:p="http://schemas.openxmlformats.org/presentationml/2006/main" xmlns:r="http://schemas.openxmlformats.org/officeDocument/2006/relationships">
+  <p:cSld>
+    <p:spTree>
+      <p:nvGrpSpPr>
+        <p:cNvPr id="1" name=""/>
+        <p:cNvGrpSpPr/>
+        <p:nvPr/>
+      </p:nvGrpSpPr>
+      <p:grpSpPr/>
+      <p:pic>
+        <p:nvPicPr>
+          <p:cNvPr id="2" name="Picture 1" descr="image3.png"/>
+          <p:cNvPicPr>
+            <a:picLocks noChangeAspect="1"/>
+          </p:cNvPicPr>
+          <p:nvPr/>
+        </p:nvPicPr>
+        <p:blipFill>
+          <a:blip r:embed="rId2"/>
+          <a:stretch>
+            <a:fillRect/>
+          </a:stretch>
+        </p:blipFill>
+        <p:spPr>
+          <a:xfrm>
+            <a:off x="0" y="0"/>
+            <a:ext cx="12191695" cy="6858000"/>
+          </a:xfrm>
+          <a:prstGeom prst="rect">
+            <a:avLst/>
+          </a:prstGeom>
+        </p:spPr>
+      </p:pic>
+      <p:sp>
+        <p:nvSpPr>
+          <p:cNvPr id="3" name="TextBox 2"/>
+          <p:cNvSpPr txBox="1"/>
+          <p:nvPr/>
+        </p:nvSpPr>
+        <p:spPr>
+          <a:xfrm>
+            <a:off x="1691640" y="201168"/>
+            <a:ext cx="9966960" cy="438912"/>
+          </a:xfrm>
+          <a:prstGeom prst="rect">
+            <a:avLst/>
+          </a:prstGeom>
+          <a:noFill/>
+        </p:spPr>
+        <p:txBody>
+          <a:bodyPr wrap="square" anchor="t"/>
+          <a:lstStyle/>
+          <a:p>
+            <a:pPr algn="l"/>
+            <a:r>
+              <a:rPr sz="2400" b="1">
+                <a:solidFill>
+                  <a:srgbClr val="2F2F2F"/>
+                </a:solidFill>
+                <a:latin typeface="Calibri"/>
+              </a:rPr>
               <a:t>Рекомендации от HR-отдела</a:t>
             </a:r>
           </a:p>
@@ -8371,7 +9054,7 @@
                 </a:solidFill>
                 <a:latin typeface="Calibri"/>
               </a:rPr>
-              <a:t>*  Совещание с сотрудниками опта: показать, что оценки 2026 услышаны; отдельно разобрать офис и СиТЛ.</a:t>
+              <a:t>*  Совещание с сотрудниками опта: показать, что оценки 2026 услышаны; отдельно разобрать КС и СиТЛ.</a:t>
             </a:r>
           </a:p>
           <a:p>
@@ -8403,7 +9086,7 @@
                 </a:solidFill>
                 <a:latin typeface="Calibri"/>
               </a:rPr>
-              <a:t>СиТЛ: ремонт/утепление складов, состояние авто, СИЗ и спецобувь, базовый интернет — это прямые драйверы 77,1%.</a:t>
+              <a:t>СиТЛ: ремонт/утепление складов, состояние авто, СИЗ и спецобувь, базовый интернет.</a:t>
             </a:r>
           </a:p>
           <a:p>
@@ -8419,7 +9102,7 @@
                 </a:solidFill>
                 <a:latin typeface="Calibri"/>
               </a:rPr>
-              <a:t>Офис: коммуникации между отделами (регламент, стыки, 1С/автоматизация) и видимость карьерного трека / кадрового резерва.</a:t>
+              <a:t>КС: коммуникации между отделами (регламент, стыки, 1С/автоматизация) и видимость карьерного трека / кадрового резерва.</a:t>
             </a:r>
           </a:p>
           <a:p>
@@ -8451,7 +9134,7 @@
                 </a:solidFill>
                 <a:latin typeface="Calibri"/>
               </a:rPr>
-              <a:t>Повысить явку на следующий опрос (сейчас 31,2% против 36% в 2025): короче форма, напоминания, отдельный контур склада.</a:t>
+              <a:t>Повысить явку на следующий опрос (сейчас 102 из 372): короче форма, напоминания, отдельный контур склада.</a:t>
             </a:r>
           </a:p>
           <a:p>
@@ -8480,7 +9163,7 @@
 </p:sld>
 </file>
 
-<file path=ppt/slides/slide8.xml><?xml version="1.0" encoding="utf-8"?>
+<file path=ppt/slides/slide9.xml><?xml version="1.0" encoding="utf-8"?>
 <p:sld xmlns:a="http://schemas.openxmlformats.org/drawingml/2006/main" xmlns:p="http://schemas.openxmlformats.org/presentationml/2006/main" xmlns:r="http://schemas.openxmlformats.org/officeDocument/2006/relationships">
   <p:cSld>
     <p:spTree>
